--- a/out/toks-04-toks-ashyoviy-dalil.pptx
+++ b/out/toks-04-toks-ashyoviy-dalil.pptx
@@ -6613,7 +6613,23 @@
                 </a:solidFill>
                 <a:latin typeface="Calibri"/>
               </a:rPr>
-              <a:t>▸  Metgemoglobin hosil qiluvchi zaharlar (ferrotsianidlar, anilin, nitrobenzol, kaliy permanganat, formaldegid, xromatlar, metilen ko‘ki, asetaldegid) uchun metgemoglobinni aniqlash maqsadida qon olinadi.</a:t>
+              <a:t>▸  Metgemoglobin hosil qiluvchi zaharlar (ferrotsianidlar, anilin, nitrobenzol, kaliy permanganat.</a:t>
+            </a:r>
+          </a:p>
+          <a:p>
+            <a:pPr>
+              <a:spcAft>
+                <a:spcPts val="1200"/>
+              </a:spcAft>
+            </a:pPr>
+            <a:r>
+              <a:rPr sz="2200">
+                <a:solidFill>
+                  <a:srgbClr val="1F2937"/>
+                </a:solidFill>
+                <a:latin typeface="Calibri"/>
+              </a:rPr>
+              <a:t>▸  Formaldegid, xromatlar, metilen ko‘ki, asetaldegid) uchun metgemoglobinni aniqlash maqsadida qon olinadi.</a:t>
             </a:r>
           </a:p>
           <a:p>
@@ -6930,7 +6946,7 @@
         <p:spPr>
           <a:xfrm>
             <a:off x="640080" y="1417320"/>
-            <a:ext cx="10911535" cy="4480560"/>
+            <a:ext cx="4572000" cy="4480560"/>
           </a:xfrm>
           <a:prstGeom prst="rect">
             <a:avLst/>
@@ -6945,11 +6961,11 @@
           <a:p>
             <a:pPr>
               <a:spcAft>
-                <a:spcPts val="1200"/>
+                <a:spcPts val="800"/>
               </a:spcAft>
             </a:pPr>
             <a:r>
-              <a:rPr sz="2200">
+              <a:rPr sz="1800">
                 <a:solidFill>
                   <a:srgbClr val="1F2937"/>
                 </a:solidFill>
@@ -6961,11 +6977,11 @@
           <a:p>
             <a:pPr>
               <a:spcAft>
-                <a:spcPts val="1200"/>
+                <a:spcPts val="800"/>
               </a:spcAft>
             </a:pPr>
             <a:r>
-              <a:rPr sz="2200">
+              <a:rPr sz="1800">
                 <a:solidFill>
                   <a:srgbClr val="1F2937"/>
                 </a:solidFill>
@@ -6977,11 +6993,11 @@
           <a:p>
             <a:pPr>
               <a:spcAft>
-                <a:spcPts val="1200"/>
+                <a:spcPts val="800"/>
               </a:spcAft>
             </a:pPr>
             <a:r>
-              <a:rPr sz="2200">
+              <a:rPr sz="1800">
                 <a:solidFill>
                   <a:srgbClr val="1F2937"/>
                 </a:solidFill>
@@ -6994,7 +7010,681 @@
       </p:sp>
       <p:sp>
         <p:nvSpPr>
-          <p:cNvPr id="9" name="TextBox 8"/>
+          <p:cNvPr id="9" name="Rounded Rectangle 8"/>
+          <p:cNvSpPr/>
+          <p:nvPr/>
+        </p:nvSpPr>
+        <p:spPr>
+          <a:xfrm>
+            <a:off x="5440680" y="1417320"/>
+            <a:ext cx="2973171" cy="1947672"/>
+          </a:xfrm>
+          <a:prstGeom prst="roundRect">
+            <a:avLst>
+              <a:gd name="adj" fmla="val 8000"/>
+            </a:avLst>
+          </a:prstGeom>
+          <a:solidFill>
+            <a:srgbClr val="FFFFFF"/>
+          </a:solidFill>
+          <a:ln w="15875">
+            <a:solidFill>
+              <a:srgbClr val="E8EEF6"/>
+            </a:solidFill>
+          </a:ln>
+          <a:effectLst/>
+        </p:spPr>
+        <p:style>
+          <a:lnRef idx="1">
+            <a:schemeClr val="accent1"/>
+          </a:lnRef>
+          <a:fillRef idx="3">
+            <a:schemeClr val="accent1"/>
+          </a:fillRef>
+          <a:effectRef idx="2">
+            <a:schemeClr val="accent1"/>
+          </a:effectRef>
+          <a:fontRef idx="minor">
+            <a:schemeClr val="lt1"/>
+          </a:fontRef>
+        </p:style>
+        <p:txBody>
+          <a:bodyPr rtlCol="0" anchor="ctr"/>
+          <a:lstStyle/>
+          <a:p>
+            <a:pPr algn="ctr"/>
+          </a:p>
+        </p:txBody>
+      </p:sp>
+      <p:sp>
+        <p:nvSpPr>
+          <p:cNvPr id="10" name="Oval 9"/>
+          <p:cNvSpPr/>
+          <p:nvPr/>
+        </p:nvSpPr>
+        <p:spPr>
+          <a:xfrm>
+            <a:off x="5550408" y="2162556"/>
+            <a:ext cx="457200" cy="457200"/>
+          </a:xfrm>
+          <a:prstGeom prst="ellipse">
+            <a:avLst/>
+          </a:prstGeom>
+          <a:solidFill>
+            <a:srgbClr val="0B1F3A"/>
+          </a:solidFill>
+          <a:ln>
+            <a:noFill/>
+          </a:ln>
+          <a:effectLst/>
+        </p:spPr>
+        <p:style>
+          <a:lnRef idx="1">
+            <a:schemeClr val="accent1"/>
+          </a:lnRef>
+          <a:fillRef idx="3">
+            <a:schemeClr val="accent1"/>
+          </a:fillRef>
+          <a:effectRef idx="2">
+            <a:schemeClr val="accent1"/>
+          </a:effectRef>
+          <a:fontRef idx="minor">
+            <a:schemeClr val="lt1"/>
+          </a:fontRef>
+        </p:style>
+        <p:txBody>
+          <a:bodyPr rtlCol="0" anchor="ctr" wrap="square" lIns="0" rIns="0" tIns="36576" bIns="36576"/>
+          <a:lstStyle/>
+          <a:p>
+            <a:pPr algn="ctr">
+              <a:spcAft>
+                <a:spcPts val="200"/>
+              </a:spcAft>
+            </a:pPr>
+            <a:r>
+              <a:rPr sz="1600" b="1">
+                <a:solidFill>
+                  <a:srgbClr val="FFFFFF"/>
+                </a:solidFill>
+                <a:latin typeface="Calibri"/>
+              </a:rPr>
+              <a:t>1</a:t>
+            </a:r>
+          </a:p>
+        </p:txBody>
+      </p:sp>
+      <p:sp>
+        <p:nvSpPr>
+          <p:cNvPr id="11" name="TextBox 10"/>
+          <p:cNvSpPr txBox="1"/>
+          <p:nvPr/>
+        </p:nvSpPr>
+        <p:spPr>
+          <a:xfrm>
+            <a:off x="6080760" y="1417320"/>
+            <a:ext cx="2259939" cy="1947672"/>
+          </a:xfrm>
+          <a:prstGeom prst="rect">
+            <a:avLst/>
+          </a:prstGeom>
+          <a:noFill/>
+        </p:spPr>
+        <p:txBody>
+          <a:bodyPr wrap="square" anchor="ctr" lIns="18288" rIns="18288" tIns="36576" bIns="36576">
+            <a:spAutoFit/>
+          </a:bodyPr>
+          <a:lstStyle/>
+          <a:p>
+            <a:pPr algn="l">
+              <a:spcAft>
+                <a:spcPts val="200"/>
+              </a:spcAft>
+            </a:pPr>
+            <a:r>
+              <a:rPr sz="1600" b="1">
+                <a:solidFill>
+                  <a:srgbClr val="0B1F3A"/>
+                </a:solidFill>
+                <a:latin typeface="Calibri"/>
+              </a:rPr>
+              <a:t>Ligatura</a:t>
+            </a:r>
+          </a:p>
+          <a:p>
+            <a:pPr algn="l">
+              <a:spcAft>
+                <a:spcPts val="200"/>
+              </a:spcAft>
+            </a:pPr>
+            <a:r>
+              <a:rPr sz="1400" b="0">
+                <a:solidFill>
+                  <a:srgbClr val="1F2937"/>
+                </a:solidFill>
+                <a:latin typeface="Calibri"/>
+              </a:rPr>
+              <a:t>Qizilo‘ngach, oshqozon, ichakka ikkitadan</a:t>
+            </a:r>
+          </a:p>
+        </p:txBody>
+      </p:sp>
+      <p:sp>
+        <p:nvSpPr>
+          <p:cNvPr id="12" name="Rounded Rectangle 11"/>
+          <p:cNvSpPr/>
+          <p:nvPr/>
+        </p:nvSpPr>
+        <p:spPr>
+          <a:xfrm>
+            <a:off x="8578443" y="1417320"/>
+            <a:ext cx="2973171" cy="1947672"/>
+          </a:xfrm>
+          <a:prstGeom prst="roundRect">
+            <a:avLst>
+              <a:gd name="adj" fmla="val 8000"/>
+            </a:avLst>
+          </a:prstGeom>
+          <a:solidFill>
+            <a:srgbClr val="FFFFFF"/>
+          </a:solidFill>
+          <a:ln w="15875">
+            <a:solidFill>
+              <a:srgbClr val="E8EEF6"/>
+            </a:solidFill>
+          </a:ln>
+          <a:effectLst/>
+        </p:spPr>
+        <p:style>
+          <a:lnRef idx="1">
+            <a:schemeClr val="accent1"/>
+          </a:lnRef>
+          <a:fillRef idx="3">
+            <a:schemeClr val="accent1"/>
+          </a:fillRef>
+          <a:effectRef idx="2">
+            <a:schemeClr val="accent1"/>
+          </a:effectRef>
+          <a:fontRef idx="minor">
+            <a:schemeClr val="lt1"/>
+          </a:fontRef>
+        </p:style>
+        <p:txBody>
+          <a:bodyPr rtlCol="0" anchor="ctr"/>
+          <a:lstStyle/>
+          <a:p>
+            <a:pPr algn="ctr"/>
+          </a:p>
+        </p:txBody>
+      </p:sp>
+      <p:sp>
+        <p:nvSpPr>
+          <p:cNvPr id="13" name="Oval 12"/>
+          <p:cNvSpPr/>
+          <p:nvPr/>
+        </p:nvSpPr>
+        <p:spPr>
+          <a:xfrm>
+            <a:off x="8688171" y="2162556"/>
+            <a:ext cx="457200" cy="457200"/>
+          </a:xfrm>
+          <a:prstGeom prst="ellipse">
+            <a:avLst/>
+          </a:prstGeom>
+          <a:solidFill>
+            <a:srgbClr val="0B1F3A"/>
+          </a:solidFill>
+          <a:ln>
+            <a:noFill/>
+          </a:ln>
+          <a:effectLst/>
+        </p:spPr>
+        <p:style>
+          <a:lnRef idx="1">
+            <a:schemeClr val="accent1"/>
+          </a:lnRef>
+          <a:fillRef idx="3">
+            <a:schemeClr val="accent1"/>
+          </a:fillRef>
+          <a:effectRef idx="2">
+            <a:schemeClr val="accent1"/>
+          </a:effectRef>
+          <a:fontRef idx="minor">
+            <a:schemeClr val="lt1"/>
+          </a:fontRef>
+        </p:style>
+        <p:txBody>
+          <a:bodyPr rtlCol="0" anchor="ctr" wrap="square" lIns="0" rIns="0" tIns="36576" bIns="36576"/>
+          <a:lstStyle/>
+          <a:p>
+            <a:pPr algn="ctr">
+              <a:spcAft>
+                <a:spcPts val="200"/>
+              </a:spcAft>
+            </a:pPr>
+            <a:r>
+              <a:rPr sz="1600" b="1">
+                <a:solidFill>
+                  <a:srgbClr val="FFFFFF"/>
+                </a:solidFill>
+                <a:latin typeface="Calibri"/>
+              </a:rPr>
+              <a:t>2</a:t>
+            </a:r>
+          </a:p>
+        </p:txBody>
+      </p:sp>
+      <p:sp>
+        <p:nvSpPr>
+          <p:cNvPr id="14" name="TextBox 13"/>
+          <p:cNvSpPr txBox="1"/>
+          <p:nvPr/>
+        </p:nvSpPr>
+        <p:spPr>
+          <a:xfrm>
+            <a:off x="9218523" y="1417320"/>
+            <a:ext cx="2259939" cy="1947672"/>
+          </a:xfrm>
+          <a:prstGeom prst="rect">
+            <a:avLst/>
+          </a:prstGeom>
+          <a:noFill/>
+        </p:spPr>
+        <p:txBody>
+          <a:bodyPr wrap="square" anchor="ctr" lIns="18288" rIns="18288" tIns="36576" bIns="36576">
+            <a:spAutoFit/>
+          </a:bodyPr>
+          <a:lstStyle/>
+          <a:p>
+            <a:pPr algn="l">
+              <a:spcAft>
+                <a:spcPts val="200"/>
+              </a:spcAft>
+            </a:pPr>
+            <a:r>
+              <a:rPr sz="1600" b="1">
+                <a:solidFill>
+                  <a:srgbClr val="0B1F3A"/>
+                </a:solidFill>
+                <a:latin typeface="Calibri"/>
+              </a:rPr>
+              <a:t>Yuvish mumkin emas</a:t>
+            </a:r>
+          </a:p>
+          <a:p>
+            <a:pPr algn="l">
+              <a:spcAft>
+                <a:spcPts val="200"/>
+              </a:spcAft>
+            </a:pPr>
+            <a:r>
+              <a:rPr sz="1400" b="0">
+                <a:solidFill>
+                  <a:srgbClr val="1F2937"/>
+                </a:solidFill>
+                <a:latin typeface="Calibri"/>
+              </a:rPr>
+              <a:t>Ichki a’zolar suv bilan yuvilmaydi</a:t>
+            </a:r>
+          </a:p>
+        </p:txBody>
+      </p:sp>
+      <p:sp>
+        <p:nvSpPr>
+          <p:cNvPr id="15" name="Rounded Rectangle 14"/>
+          <p:cNvSpPr/>
+          <p:nvPr/>
+        </p:nvSpPr>
+        <p:spPr>
+          <a:xfrm>
+            <a:off x="5440680" y="3493008"/>
+            <a:ext cx="2973171" cy="1947672"/>
+          </a:xfrm>
+          <a:prstGeom prst="roundRect">
+            <a:avLst>
+              <a:gd name="adj" fmla="val 8000"/>
+            </a:avLst>
+          </a:prstGeom>
+          <a:solidFill>
+            <a:srgbClr val="FFFFFF"/>
+          </a:solidFill>
+          <a:ln w="15875">
+            <a:solidFill>
+              <a:srgbClr val="E8EEF6"/>
+            </a:solidFill>
+          </a:ln>
+          <a:effectLst/>
+        </p:spPr>
+        <p:style>
+          <a:lnRef idx="1">
+            <a:schemeClr val="accent1"/>
+          </a:lnRef>
+          <a:fillRef idx="3">
+            <a:schemeClr val="accent1"/>
+          </a:fillRef>
+          <a:effectRef idx="2">
+            <a:schemeClr val="accent1"/>
+          </a:effectRef>
+          <a:fontRef idx="minor">
+            <a:schemeClr val="lt1"/>
+          </a:fontRef>
+        </p:style>
+        <p:txBody>
+          <a:bodyPr rtlCol="0" anchor="ctr"/>
+          <a:lstStyle/>
+          <a:p>
+            <a:pPr algn="ctr"/>
+          </a:p>
+        </p:txBody>
+      </p:sp>
+      <p:sp>
+        <p:nvSpPr>
+          <p:cNvPr id="16" name="Oval 15"/>
+          <p:cNvSpPr/>
+          <p:nvPr/>
+        </p:nvSpPr>
+        <p:spPr>
+          <a:xfrm>
+            <a:off x="5550408" y="4238244"/>
+            <a:ext cx="457200" cy="457200"/>
+          </a:xfrm>
+          <a:prstGeom prst="ellipse">
+            <a:avLst/>
+          </a:prstGeom>
+          <a:solidFill>
+            <a:srgbClr val="0B1F3A"/>
+          </a:solidFill>
+          <a:ln>
+            <a:noFill/>
+          </a:ln>
+          <a:effectLst/>
+        </p:spPr>
+        <p:style>
+          <a:lnRef idx="1">
+            <a:schemeClr val="accent1"/>
+          </a:lnRef>
+          <a:fillRef idx="3">
+            <a:schemeClr val="accent1"/>
+          </a:fillRef>
+          <a:effectRef idx="2">
+            <a:schemeClr val="accent1"/>
+          </a:effectRef>
+          <a:fontRef idx="minor">
+            <a:schemeClr val="lt1"/>
+          </a:fontRef>
+        </p:style>
+        <p:txBody>
+          <a:bodyPr rtlCol="0" anchor="ctr" wrap="square" lIns="0" rIns="0" tIns="36576" bIns="36576"/>
+          <a:lstStyle/>
+          <a:p>
+            <a:pPr algn="ctr">
+              <a:spcAft>
+                <a:spcPts val="200"/>
+              </a:spcAft>
+            </a:pPr>
+            <a:r>
+              <a:rPr sz="1600" b="1">
+                <a:solidFill>
+                  <a:srgbClr val="FFFFFF"/>
+                </a:solidFill>
+                <a:latin typeface="Calibri"/>
+              </a:rPr>
+              <a:t>3</a:t>
+            </a:r>
+          </a:p>
+        </p:txBody>
+      </p:sp>
+      <p:sp>
+        <p:nvSpPr>
+          <p:cNvPr id="17" name="TextBox 16"/>
+          <p:cNvSpPr txBox="1"/>
+          <p:nvPr/>
+        </p:nvSpPr>
+        <p:spPr>
+          <a:xfrm>
+            <a:off x="6080760" y="3493008"/>
+            <a:ext cx="2259939" cy="1947672"/>
+          </a:xfrm>
+          <a:prstGeom prst="rect">
+            <a:avLst/>
+          </a:prstGeom>
+          <a:noFill/>
+        </p:spPr>
+        <p:txBody>
+          <a:bodyPr wrap="square" anchor="ctr" lIns="18288" rIns="18288" tIns="36576" bIns="36576">
+            <a:spAutoFit/>
+          </a:bodyPr>
+          <a:lstStyle/>
+          <a:p>
+            <a:pPr algn="l">
+              <a:spcAft>
+                <a:spcPts val="200"/>
+              </a:spcAft>
+            </a:pPr>
+            <a:r>
+              <a:rPr sz="1600" b="1">
+                <a:solidFill>
+                  <a:srgbClr val="0B1F3A"/>
+                </a:solidFill>
+                <a:latin typeface="Calibri"/>
+              </a:rPr>
+              <a:t>Idish</a:t>
+            </a:r>
+          </a:p>
+          <a:p>
+            <a:pPr algn="l">
+              <a:spcAft>
+                <a:spcPts val="200"/>
+              </a:spcAft>
+            </a:pPr>
+            <a:r>
+              <a:rPr sz="1400" b="0">
+                <a:solidFill>
+                  <a:srgbClr val="1F2937"/>
+                </a:solidFill>
+                <a:latin typeface="Calibri"/>
+              </a:rPr>
+              <a:t>Og‘zi keng quruq shisha banka</a:t>
+            </a:r>
+          </a:p>
+        </p:txBody>
+      </p:sp>
+      <p:sp>
+        <p:nvSpPr>
+          <p:cNvPr id="18" name="Rounded Rectangle 17"/>
+          <p:cNvSpPr/>
+          <p:nvPr/>
+        </p:nvSpPr>
+        <p:spPr>
+          <a:xfrm>
+            <a:off x="8578443" y="3493008"/>
+            <a:ext cx="2973171" cy="1947672"/>
+          </a:xfrm>
+          <a:prstGeom prst="roundRect">
+            <a:avLst>
+              <a:gd name="adj" fmla="val 8000"/>
+            </a:avLst>
+          </a:prstGeom>
+          <a:solidFill>
+            <a:srgbClr val="FFFFFF"/>
+          </a:solidFill>
+          <a:ln w="15875">
+            <a:solidFill>
+              <a:srgbClr val="E8EEF6"/>
+            </a:solidFill>
+          </a:ln>
+          <a:effectLst/>
+        </p:spPr>
+        <p:style>
+          <a:lnRef idx="1">
+            <a:schemeClr val="accent1"/>
+          </a:lnRef>
+          <a:fillRef idx="3">
+            <a:schemeClr val="accent1"/>
+          </a:fillRef>
+          <a:effectRef idx="2">
+            <a:schemeClr val="accent1"/>
+          </a:effectRef>
+          <a:fontRef idx="minor">
+            <a:schemeClr val="lt1"/>
+          </a:fontRef>
+        </p:style>
+        <p:txBody>
+          <a:bodyPr rtlCol="0" anchor="ctr"/>
+          <a:lstStyle/>
+          <a:p>
+            <a:pPr algn="ctr"/>
+          </a:p>
+        </p:txBody>
+      </p:sp>
+      <p:sp>
+        <p:nvSpPr>
+          <p:cNvPr id="19" name="Oval 18"/>
+          <p:cNvSpPr/>
+          <p:nvPr/>
+        </p:nvSpPr>
+        <p:spPr>
+          <a:xfrm>
+            <a:off x="8688171" y="4238244"/>
+            <a:ext cx="457200" cy="457200"/>
+          </a:xfrm>
+          <a:prstGeom prst="ellipse">
+            <a:avLst/>
+          </a:prstGeom>
+          <a:solidFill>
+            <a:srgbClr val="0B1F3A"/>
+          </a:solidFill>
+          <a:ln>
+            <a:noFill/>
+          </a:ln>
+          <a:effectLst/>
+        </p:spPr>
+        <p:style>
+          <a:lnRef idx="1">
+            <a:schemeClr val="accent1"/>
+          </a:lnRef>
+          <a:fillRef idx="3">
+            <a:schemeClr val="accent1"/>
+          </a:fillRef>
+          <a:effectRef idx="2">
+            <a:schemeClr val="accent1"/>
+          </a:effectRef>
+          <a:fontRef idx="minor">
+            <a:schemeClr val="lt1"/>
+          </a:fontRef>
+        </p:style>
+        <p:txBody>
+          <a:bodyPr rtlCol="0" anchor="ctr" wrap="square" lIns="0" rIns="0" tIns="36576" bIns="36576"/>
+          <a:lstStyle/>
+          <a:p>
+            <a:pPr algn="ctr">
+              <a:spcAft>
+                <a:spcPts val="200"/>
+              </a:spcAft>
+            </a:pPr>
+            <a:r>
+              <a:rPr sz="1600" b="1">
+                <a:solidFill>
+                  <a:srgbClr val="FFFFFF"/>
+                </a:solidFill>
+                <a:latin typeface="Calibri"/>
+              </a:rPr>
+              <a:t>4</a:t>
+            </a:r>
+          </a:p>
+        </p:txBody>
+      </p:sp>
+      <p:sp>
+        <p:nvSpPr>
+          <p:cNvPr id="20" name="TextBox 19"/>
+          <p:cNvSpPr txBox="1"/>
+          <p:nvPr/>
+        </p:nvSpPr>
+        <p:spPr>
+          <a:xfrm>
+            <a:off x="9218523" y="3493008"/>
+            <a:ext cx="2259939" cy="1947672"/>
+          </a:xfrm>
+          <a:prstGeom prst="rect">
+            <a:avLst/>
+          </a:prstGeom>
+          <a:noFill/>
+        </p:spPr>
+        <p:txBody>
+          <a:bodyPr wrap="square" anchor="ctr" lIns="18288" rIns="18288" tIns="36576" bIns="36576">
+            <a:spAutoFit/>
+          </a:bodyPr>
+          <a:lstStyle/>
+          <a:p>
+            <a:pPr algn="l">
+              <a:spcAft>
+                <a:spcPts val="200"/>
+              </a:spcAft>
+            </a:pPr>
+            <a:r>
+              <a:rPr sz="1600" b="1">
+                <a:solidFill>
+                  <a:srgbClr val="0B1F3A"/>
+                </a:solidFill>
+                <a:latin typeface="Calibri"/>
+              </a:rPr>
+              <a:t>Man etiladi</a:t>
+            </a:r>
+          </a:p>
+          <a:p>
+            <a:pPr algn="l">
+              <a:spcAft>
+                <a:spcPts val="200"/>
+              </a:spcAft>
+            </a:pPr>
+            <a:r>
+              <a:rPr sz="1400" b="0">
+                <a:solidFill>
+                  <a:srgbClr val="1F2937"/>
+                </a:solidFill>
+                <a:latin typeface="Calibri"/>
+              </a:rPr>
+              <a:t>Metall yoki keramik idish</a:t>
+            </a:r>
+          </a:p>
+        </p:txBody>
+      </p:sp>
+      <p:sp>
+        <p:nvSpPr>
+          <p:cNvPr id="21" name="TextBox 20"/>
+          <p:cNvSpPr txBox="1"/>
+          <p:nvPr/>
+        </p:nvSpPr>
+        <p:spPr>
+          <a:xfrm>
+            <a:off x="5440680" y="5486400"/>
+            <a:ext cx="6110935" cy="365760"/>
+          </a:xfrm>
+          <a:prstGeom prst="rect">
+            <a:avLst/>
+          </a:prstGeom>
+          <a:noFill/>
+        </p:spPr>
+        <p:txBody>
+          <a:bodyPr wrap="square">
+            <a:spAutoFit/>
+          </a:bodyPr>
+          <a:lstStyle/>
+          <a:p>
+            <a:r>
+              <a:rPr sz="1200" b="0">
+                <a:solidFill>
+                  <a:srgbClr val="6B7280"/>
+                </a:solidFill>
+                <a:latin typeface="Calibri"/>
+              </a:rPr>
+              <a:t>Ajratib olish qoidalari</a:t>
+            </a:r>
+          </a:p>
+        </p:txBody>
+      </p:sp>
+      <p:sp>
+        <p:nvSpPr>
+          <p:cNvPr id="22" name="TextBox 21"/>
           <p:cNvSpPr txBox="1"/>
           <p:nvPr/>
         </p:nvSpPr>
@@ -7646,7 +8336,7 @@
         <p:spPr>
           <a:xfrm>
             <a:off x="640080" y="1417320"/>
-            <a:ext cx="10911535" cy="4480560"/>
+            <a:ext cx="4572000" cy="4480560"/>
           </a:xfrm>
           <a:prstGeom prst="rect">
             <a:avLst/>
@@ -7661,11 +8351,11 @@
           <a:p>
             <a:pPr>
               <a:spcAft>
-                <a:spcPts val="1200"/>
+                <a:spcPts val="800"/>
               </a:spcAft>
             </a:pPr>
             <a:r>
-              <a:rPr sz="2200">
+              <a:rPr sz="1800">
                 <a:solidFill>
                   <a:srgbClr val="1F2937"/>
                 </a:solidFill>
@@ -7677,11 +8367,11 @@
           <a:p>
             <a:pPr>
               <a:spcAft>
-                <a:spcPts val="1200"/>
+                <a:spcPts val="800"/>
               </a:spcAft>
             </a:pPr>
             <a:r>
-              <a:rPr sz="2200">
+              <a:rPr sz="1800">
                 <a:solidFill>
                   <a:srgbClr val="1F2937"/>
                 </a:solidFill>
@@ -7693,11 +8383,11 @@
           <a:p>
             <a:pPr>
               <a:spcAft>
-                <a:spcPts val="1200"/>
+                <a:spcPts val="800"/>
               </a:spcAft>
             </a:pPr>
             <a:r>
-              <a:rPr sz="2200">
+              <a:rPr sz="1800">
                 <a:solidFill>
                   <a:srgbClr val="1F2937"/>
                 </a:solidFill>
@@ -7709,11 +8399,11 @@
           <a:p>
             <a:pPr>
               <a:spcAft>
-                <a:spcPts val="1200"/>
+                <a:spcPts val="800"/>
               </a:spcAft>
             </a:pPr>
             <a:r>
-              <a:rPr sz="2200">
+              <a:rPr sz="1800">
                 <a:solidFill>
                   <a:srgbClr val="1F2937"/>
                 </a:solidFill>
@@ -7726,7 +8416,366 @@
       </p:sp>
       <p:sp>
         <p:nvSpPr>
-          <p:cNvPr id="9" name="TextBox 8"/>
+          <p:cNvPr id="9" name="Rounded Rectangle 8"/>
+          <p:cNvSpPr/>
+          <p:nvPr/>
+        </p:nvSpPr>
+        <p:spPr>
+          <a:xfrm>
+            <a:off x="5440680" y="1417320"/>
+            <a:ext cx="2986887" cy="548640"/>
+          </a:xfrm>
+          <a:prstGeom prst="roundRect">
+            <a:avLst/>
+          </a:prstGeom>
+          <a:solidFill>
+            <a:srgbClr val="0B1F3A"/>
+          </a:solidFill>
+          <a:ln>
+            <a:noFill/>
+          </a:ln>
+          <a:effectLst/>
+        </p:spPr>
+        <p:style>
+          <a:lnRef idx="1">
+            <a:schemeClr val="accent1"/>
+          </a:lnRef>
+          <a:fillRef idx="3">
+            <a:schemeClr val="accent1"/>
+          </a:fillRef>
+          <a:effectRef idx="2">
+            <a:schemeClr val="accent1"/>
+          </a:effectRef>
+          <a:fontRef idx="minor">
+            <a:schemeClr val="lt1"/>
+          </a:fontRef>
+        </p:style>
+        <p:txBody>
+          <a:bodyPr rtlCol="0" anchor="ctr" wrap="square" tIns="36576" bIns="36576"/>
+          <a:lstStyle/>
+          <a:p>
+            <a:pPr algn="ctr">
+              <a:spcAft>
+                <a:spcPts val="200"/>
+              </a:spcAft>
+            </a:pPr>
+            <a:r>
+              <a:rPr sz="1600" b="1">
+                <a:solidFill>
+                  <a:srgbClr val="FFFFFF"/>
+                </a:solidFill>
+                <a:latin typeface="Calibri"/>
+              </a:rPr>
+              <a:t>Ruxsat etiladi</a:t>
+            </a:r>
+          </a:p>
+        </p:txBody>
+      </p:sp>
+      <p:sp>
+        <p:nvSpPr>
+          <p:cNvPr id="10" name="Rectangle 9"/>
+          <p:cNvSpPr/>
+          <p:nvPr/>
+        </p:nvSpPr>
+        <p:spPr>
+          <a:xfrm>
+            <a:off x="5440680" y="2020824"/>
+            <a:ext cx="2986887" cy="3419856"/>
+          </a:xfrm>
+          <a:prstGeom prst="rect">
+            <a:avLst/>
+          </a:prstGeom>
+          <a:solidFill>
+            <a:srgbClr val="E8EEF6"/>
+          </a:solidFill>
+          <a:ln w="15875">
+            <a:solidFill>
+              <a:srgbClr val="E8EEF6"/>
+            </a:solidFill>
+          </a:ln>
+          <a:effectLst/>
+        </p:spPr>
+        <p:style>
+          <a:lnRef idx="1">
+            <a:schemeClr val="accent1"/>
+          </a:lnRef>
+          <a:fillRef idx="3">
+            <a:schemeClr val="accent1"/>
+          </a:fillRef>
+          <a:effectRef idx="2">
+            <a:schemeClr val="accent1"/>
+          </a:effectRef>
+          <a:fontRef idx="minor">
+            <a:schemeClr val="lt1"/>
+          </a:fontRef>
+        </p:style>
+        <p:txBody>
+          <a:bodyPr rtlCol="0" anchor="t" wrap="square" tIns="36576" bIns="36576"/>
+          <a:lstStyle/>
+          <a:p>
+            <a:pPr algn="l">
+              <a:spcAft>
+                <a:spcPts val="700"/>
+              </a:spcAft>
+            </a:pPr>
+            <a:r>
+              <a:rPr sz="1500" b="1">
+                <a:solidFill>
+                  <a:srgbClr val="C9A227"/>
+                </a:solidFill>
+                <a:latin typeface="Calibri"/>
+              </a:rPr>
+              <a:t>●  </a:t>
+            </a:r>
+            <a:r>
+              <a:rPr sz="1500" b="0">
+                <a:solidFill>
+                  <a:srgbClr val="1F2937"/>
+                </a:solidFill>
+                <a:latin typeface="Calibri"/>
+              </a:rPr>
+              <a:t>Issiq kunda uzoqqa yuborilsa</a:t>
+            </a:r>
+          </a:p>
+          <a:p>
+            <a:pPr algn="l">
+              <a:spcAft>
+                <a:spcPts val="700"/>
+              </a:spcAft>
+            </a:pPr>
+            <a:r>
+              <a:rPr sz="1500" b="1">
+                <a:solidFill>
+                  <a:srgbClr val="C9A227"/>
+                </a:solidFill>
+                <a:latin typeface="Calibri"/>
+              </a:rPr>
+              <a:t>●  </a:t>
+            </a:r>
+            <a:r>
+              <a:rPr sz="1500" b="0">
+                <a:solidFill>
+                  <a:srgbClr val="1F2937"/>
+                </a:solidFill>
+                <a:latin typeface="Calibri"/>
+              </a:rPr>
+              <a:t>Konservant — etil spirti</a:t>
+            </a:r>
+          </a:p>
+          <a:p>
+            <a:pPr algn="l">
+              <a:spcAft>
+                <a:spcPts val="700"/>
+              </a:spcAft>
+            </a:pPr>
+            <a:r>
+              <a:rPr sz="1500" b="1">
+                <a:solidFill>
+                  <a:srgbClr val="C9A227"/>
+                </a:solidFill>
+                <a:latin typeface="Calibri"/>
+              </a:rPr>
+              <a:t>●  </a:t>
+            </a:r>
+            <a:r>
+              <a:rPr sz="1500" b="0">
+                <a:solidFill>
+                  <a:srgbClr val="1F2937"/>
+                </a:solidFill>
+                <a:latin typeface="Calibri"/>
+              </a:rPr>
+              <a:t>Spirt namunasi ham yuboriladi</a:t>
+            </a:r>
+          </a:p>
+        </p:txBody>
+      </p:sp>
+      <p:sp>
+        <p:nvSpPr>
+          <p:cNvPr id="11" name="Rounded Rectangle 10"/>
+          <p:cNvSpPr/>
+          <p:nvPr/>
+        </p:nvSpPr>
+        <p:spPr>
+          <a:xfrm>
+            <a:off x="8564727" y="1417320"/>
+            <a:ext cx="2986887" cy="548640"/>
+          </a:xfrm>
+          <a:prstGeom prst="roundRect">
+            <a:avLst/>
+          </a:prstGeom>
+          <a:solidFill>
+            <a:srgbClr val="1F4E79"/>
+          </a:solidFill>
+          <a:ln>
+            <a:noFill/>
+          </a:ln>
+          <a:effectLst/>
+        </p:spPr>
+        <p:style>
+          <a:lnRef idx="1">
+            <a:schemeClr val="accent1"/>
+          </a:lnRef>
+          <a:fillRef idx="3">
+            <a:schemeClr val="accent1"/>
+          </a:fillRef>
+          <a:effectRef idx="2">
+            <a:schemeClr val="accent1"/>
+          </a:effectRef>
+          <a:fontRef idx="minor">
+            <a:schemeClr val="lt1"/>
+          </a:fontRef>
+        </p:style>
+        <p:txBody>
+          <a:bodyPr rtlCol="0" anchor="ctr" wrap="square" tIns="36576" bIns="36576"/>
+          <a:lstStyle/>
+          <a:p>
+            <a:pPr algn="ctr">
+              <a:spcAft>
+                <a:spcPts val="200"/>
+              </a:spcAft>
+            </a:pPr>
+            <a:r>
+              <a:rPr sz="1600" b="1">
+                <a:solidFill>
+                  <a:srgbClr val="FFFFFF"/>
+                </a:solidFill>
+                <a:latin typeface="Calibri"/>
+              </a:rPr>
+              <a:t>Man etiladi</a:t>
+            </a:r>
+          </a:p>
+        </p:txBody>
+      </p:sp>
+      <p:sp>
+        <p:nvSpPr>
+          <p:cNvPr id="12" name="Rectangle 11"/>
+          <p:cNvSpPr/>
+          <p:nvPr/>
+        </p:nvSpPr>
+        <p:spPr>
+          <a:xfrm>
+            <a:off x="8564727" y="2020824"/>
+            <a:ext cx="2986887" cy="3419856"/>
+          </a:xfrm>
+          <a:prstGeom prst="rect">
+            <a:avLst/>
+          </a:prstGeom>
+          <a:solidFill>
+            <a:srgbClr val="E8EEF6"/>
+          </a:solidFill>
+          <a:ln w="15875">
+            <a:solidFill>
+              <a:srgbClr val="E8EEF6"/>
+            </a:solidFill>
+          </a:ln>
+          <a:effectLst/>
+        </p:spPr>
+        <p:style>
+          <a:lnRef idx="1">
+            <a:schemeClr val="accent1"/>
+          </a:lnRef>
+          <a:fillRef idx="3">
+            <a:schemeClr val="accent1"/>
+          </a:fillRef>
+          <a:effectRef idx="2">
+            <a:schemeClr val="accent1"/>
+          </a:effectRef>
+          <a:fontRef idx="minor">
+            <a:schemeClr val="lt1"/>
+          </a:fontRef>
+        </p:style>
+        <p:txBody>
+          <a:bodyPr rtlCol="0" anchor="t" wrap="square" tIns="36576" bIns="36576"/>
+          <a:lstStyle/>
+          <a:p>
+            <a:pPr algn="l">
+              <a:spcAft>
+                <a:spcPts val="700"/>
+              </a:spcAft>
+            </a:pPr>
+            <a:r>
+              <a:rPr sz="1500" b="1">
+                <a:solidFill>
+                  <a:srgbClr val="C9A227"/>
+                </a:solidFill>
+                <a:latin typeface="Calibri"/>
+              </a:rPr>
+              <a:t>●  </a:t>
+            </a:r>
+            <a:r>
+              <a:rPr sz="1500" b="0">
+                <a:solidFill>
+                  <a:srgbClr val="1F2937"/>
+                </a:solidFill>
+                <a:latin typeface="Calibri"/>
+              </a:rPr>
+              <a:t>Etil spirti/nitritga tekshirilsa</a:t>
+            </a:r>
+          </a:p>
+          <a:p>
+            <a:pPr algn="l">
+              <a:spcAft>
+                <a:spcPts val="700"/>
+              </a:spcAft>
+            </a:pPr>
+            <a:r>
+              <a:rPr sz="1500" b="1">
+                <a:solidFill>
+                  <a:srgbClr val="C9A227"/>
+                </a:solidFill>
+                <a:latin typeface="Calibri"/>
+              </a:rPr>
+              <a:t>●  </a:t>
+            </a:r>
+            <a:r>
+              <a:rPr sz="1500" b="0">
+                <a:solidFill>
+                  <a:srgbClr val="1F2937"/>
+                </a:solidFill>
+                <a:latin typeface="Calibri"/>
+              </a:rPr>
+              <a:t>Metall, keramik idish</a:t>
+            </a:r>
+          </a:p>
+        </p:txBody>
+      </p:sp>
+      <p:sp>
+        <p:nvSpPr>
+          <p:cNvPr id="13" name="TextBox 12"/>
+          <p:cNvSpPr txBox="1"/>
+          <p:nvPr/>
+        </p:nvSpPr>
+        <p:spPr>
+          <a:xfrm>
+            <a:off x="5440680" y="5486400"/>
+            <a:ext cx="6110935" cy="365760"/>
+          </a:xfrm>
+          <a:prstGeom prst="rect">
+            <a:avLst/>
+          </a:prstGeom>
+          <a:noFill/>
+        </p:spPr>
+        <p:txBody>
+          <a:bodyPr wrap="square">
+            <a:spAutoFit/>
+          </a:bodyPr>
+          <a:lstStyle/>
+          <a:p>
+            <a:r>
+              <a:rPr sz="1200" b="0">
+                <a:solidFill>
+                  <a:srgbClr val="6B7280"/>
+                </a:solidFill>
+                <a:latin typeface="Calibri"/>
+              </a:rPr>
+              <a:t>Konservatsiya qoidalari</a:t>
+            </a:r>
+          </a:p>
+        </p:txBody>
+      </p:sp>
+      <p:sp>
+        <p:nvSpPr>
+          <p:cNvPr id="14" name="TextBox 13"/>
           <p:cNvSpPr txBox="1"/>
           <p:nvPr/>
         </p:nvSpPr>
@@ -8020,7 +9069,7 @@
         <p:spPr>
           <a:xfrm>
             <a:off x="640080" y="1417320"/>
-            <a:ext cx="10911535" cy="4480560"/>
+            <a:ext cx="4572000" cy="4480560"/>
           </a:xfrm>
           <a:prstGeom prst="rect">
             <a:avLst/>
@@ -8035,11 +9084,11 @@
           <a:p>
             <a:pPr>
               <a:spcAft>
-                <a:spcPts val="1200"/>
+                <a:spcPts val="800"/>
               </a:spcAft>
             </a:pPr>
             <a:r>
-              <a:rPr sz="2200">
+              <a:rPr sz="1800">
                 <a:solidFill>
                   <a:srgbClr val="1F2937"/>
                 </a:solidFill>
@@ -8051,11 +9100,11 @@
           <a:p>
             <a:pPr>
               <a:spcAft>
-                <a:spcPts val="1200"/>
+                <a:spcPts val="800"/>
               </a:spcAft>
             </a:pPr>
             <a:r>
-              <a:rPr sz="2200">
+              <a:rPr sz="1800">
                 <a:solidFill>
                   <a:srgbClr val="1F2937"/>
                 </a:solidFill>
@@ -8067,11 +9116,11 @@
           <a:p>
             <a:pPr>
               <a:spcAft>
-                <a:spcPts val="1200"/>
+                <a:spcPts val="800"/>
               </a:spcAft>
             </a:pPr>
             <a:r>
-              <a:rPr sz="2200">
+              <a:rPr sz="1800">
                 <a:solidFill>
                   <a:srgbClr val="1F2937"/>
                 </a:solidFill>
@@ -8083,11 +9132,11 @@
           <a:p>
             <a:pPr>
               <a:spcAft>
-                <a:spcPts val="1200"/>
+                <a:spcPts val="800"/>
               </a:spcAft>
             </a:pPr>
             <a:r>
-              <a:rPr sz="2200">
+              <a:rPr sz="1800">
                 <a:solidFill>
                   <a:srgbClr val="1F2937"/>
                 </a:solidFill>
@@ -8100,7 +9149,681 @@
       </p:sp>
       <p:sp>
         <p:nvSpPr>
-          <p:cNvPr id="9" name="TextBox 8"/>
+          <p:cNvPr id="9" name="Rounded Rectangle 8"/>
+          <p:cNvSpPr/>
+          <p:nvPr/>
+        </p:nvSpPr>
+        <p:spPr>
+          <a:xfrm>
+            <a:off x="5440680" y="1417320"/>
+            <a:ext cx="2973171" cy="1947672"/>
+          </a:xfrm>
+          <a:prstGeom prst="roundRect">
+            <a:avLst>
+              <a:gd name="adj" fmla="val 8000"/>
+            </a:avLst>
+          </a:prstGeom>
+          <a:solidFill>
+            <a:srgbClr val="FFFFFF"/>
+          </a:solidFill>
+          <a:ln w="15875">
+            <a:solidFill>
+              <a:srgbClr val="E8EEF6"/>
+            </a:solidFill>
+          </a:ln>
+          <a:effectLst/>
+        </p:spPr>
+        <p:style>
+          <a:lnRef idx="1">
+            <a:schemeClr val="accent1"/>
+          </a:lnRef>
+          <a:fillRef idx="3">
+            <a:schemeClr val="accent1"/>
+          </a:fillRef>
+          <a:effectRef idx="2">
+            <a:schemeClr val="accent1"/>
+          </a:effectRef>
+          <a:fontRef idx="minor">
+            <a:schemeClr val="lt1"/>
+          </a:fontRef>
+        </p:style>
+        <p:txBody>
+          <a:bodyPr rtlCol="0" anchor="ctr"/>
+          <a:lstStyle/>
+          <a:p>
+            <a:pPr algn="ctr"/>
+          </a:p>
+        </p:txBody>
+      </p:sp>
+      <p:sp>
+        <p:nvSpPr>
+          <p:cNvPr id="10" name="Oval 9"/>
+          <p:cNvSpPr/>
+          <p:nvPr/>
+        </p:nvSpPr>
+        <p:spPr>
+          <a:xfrm>
+            <a:off x="5550408" y="2162556"/>
+            <a:ext cx="457200" cy="457200"/>
+          </a:xfrm>
+          <a:prstGeom prst="ellipse">
+            <a:avLst/>
+          </a:prstGeom>
+          <a:solidFill>
+            <a:srgbClr val="0B1F3A"/>
+          </a:solidFill>
+          <a:ln>
+            <a:noFill/>
+          </a:ln>
+          <a:effectLst/>
+        </p:spPr>
+        <p:style>
+          <a:lnRef idx="1">
+            <a:schemeClr val="accent1"/>
+          </a:lnRef>
+          <a:fillRef idx="3">
+            <a:schemeClr val="accent1"/>
+          </a:fillRef>
+          <a:effectRef idx="2">
+            <a:schemeClr val="accent1"/>
+          </a:effectRef>
+          <a:fontRef idx="minor">
+            <a:schemeClr val="lt1"/>
+          </a:fontRef>
+        </p:style>
+        <p:txBody>
+          <a:bodyPr rtlCol="0" anchor="ctr" wrap="square" lIns="0" rIns="0" tIns="36576" bIns="36576"/>
+          <a:lstStyle/>
+          <a:p>
+            <a:pPr algn="ctr">
+              <a:spcAft>
+                <a:spcPts val="200"/>
+              </a:spcAft>
+            </a:pPr>
+            <a:r>
+              <a:rPr sz="1600" b="1">
+                <a:solidFill>
+                  <a:srgbClr val="FFFFFF"/>
+                </a:solidFill>
+                <a:latin typeface="Calibri"/>
+              </a:rPr>
+              <a:t>1</a:t>
+            </a:r>
+          </a:p>
+        </p:txBody>
+      </p:sp>
+      <p:sp>
+        <p:nvSpPr>
+          <p:cNvPr id="11" name="TextBox 10"/>
+          <p:cNvSpPr txBox="1"/>
+          <p:nvPr/>
+        </p:nvSpPr>
+        <p:spPr>
+          <a:xfrm>
+            <a:off x="6080760" y="1417320"/>
+            <a:ext cx="2259939" cy="1947672"/>
+          </a:xfrm>
+          <a:prstGeom prst="rect">
+            <a:avLst/>
+          </a:prstGeom>
+          <a:noFill/>
+        </p:spPr>
+        <p:txBody>
+          <a:bodyPr wrap="square" anchor="ctr" lIns="18288" rIns="18288" tIns="36576" bIns="36576">
+            <a:spAutoFit/>
+          </a:bodyPr>
+          <a:lstStyle/>
+          <a:p>
+            <a:pPr algn="l">
+              <a:spcAft>
+                <a:spcPts val="200"/>
+              </a:spcAft>
+            </a:pPr>
+            <a:r>
+              <a:rPr sz="1600" b="1">
+                <a:solidFill>
+                  <a:srgbClr val="0B1F3A"/>
+                </a:solidFill>
+                <a:latin typeface="Calibri"/>
+              </a:rPr>
+              <a:t>Banka berkitiladi</a:t>
+            </a:r>
+          </a:p>
+          <a:p>
+            <a:pPr algn="l">
+              <a:spcAft>
+                <a:spcPts val="200"/>
+              </a:spcAft>
+            </a:pPr>
+            <a:r>
+              <a:rPr sz="1400" b="0">
+                <a:solidFill>
+                  <a:srgbClr val="1F2937"/>
+                </a:solidFill>
+                <a:latin typeface="Calibri"/>
+              </a:rPr>
+              <a:t>Zich yopiladi, surg‘uchli muhr</a:t>
+            </a:r>
+          </a:p>
+        </p:txBody>
+      </p:sp>
+      <p:sp>
+        <p:nvSpPr>
+          <p:cNvPr id="12" name="Rounded Rectangle 11"/>
+          <p:cNvSpPr/>
+          <p:nvPr/>
+        </p:nvSpPr>
+        <p:spPr>
+          <a:xfrm>
+            <a:off x="8578443" y="1417320"/>
+            <a:ext cx="2973171" cy="1947672"/>
+          </a:xfrm>
+          <a:prstGeom prst="roundRect">
+            <a:avLst>
+              <a:gd name="adj" fmla="val 8000"/>
+            </a:avLst>
+          </a:prstGeom>
+          <a:solidFill>
+            <a:srgbClr val="FFFFFF"/>
+          </a:solidFill>
+          <a:ln w="15875">
+            <a:solidFill>
+              <a:srgbClr val="E8EEF6"/>
+            </a:solidFill>
+          </a:ln>
+          <a:effectLst/>
+        </p:spPr>
+        <p:style>
+          <a:lnRef idx="1">
+            <a:schemeClr val="accent1"/>
+          </a:lnRef>
+          <a:fillRef idx="3">
+            <a:schemeClr val="accent1"/>
+          </a:fillRef>
+          <a:effectRef idx="2">
+            <a:schemeClr val="accent1"/>
+          </a:effectRef>
+          <a:fontRef idx="minor">
+            <a:schemeClr val="lt1"/>
+          </a:fontRef>
+        </p:style>
+        <p:txBody>
+          <a:bodyPr rtlCol="0" anchor="ctr"/>
+          <a:lstStyle/>
+          <a:p>
+            <a:pPr algn="ctr"/>
+          </a:p>
+        </p:txBody>
+      </p:sp>
+      <p:sp>
+        <p:nvSpPr>
+          <p:cNvPr id="13" name="Oval 12"/>
+          <p:cNvSpPr/>
+          <p:nvPr/>
+        </p:nvSpPr>
+        <p:spPr>
+          <a:xfrm>
+            <a:off x="8688171" y="2162556"/>
+            <a:ext cx="457200" cy="457200"/>
+          </a:xfrm>
+          <a:prstGeom prst="ellipse">
+            <a:avLst/>
+          </a:prstGeom>
+          <a:solidFill>
+            <a:srgbClr val="0B1F3A"/>
+          </a:solidFill>
+          <a:ln>
+            <a:noFill/>
+          </a:ln>
+          <a:effectLst/>
+        </p:spPr>
+        <p:style>
+          <a:lnRef idx="1">
+            <a:schemeClr val="accent1"/>
+          </a:lnRef>
+          <a:fillRef idx="3">
+            <a:schemeClr val="accent1"/>
+          </a:fillRef>
+          <a:effectRef idx="2">
+            <a:schemeClr val="accent1"/>
+          </a:effectRef>
+          <a:fontRef idx="minor">
+            <a:schemeClr val="lt1"/>
+          </a:fontRef>
+        </p:style>
+        <p:txBody>
+          <a:bodyPr rtlCol="0" anchor="ctr" wrap="square" lIns="0" rIns="0" tIns="36576" bIns="36576"/>
+          <a:lstStyle/>
+          <a:p>
+            <a:pPr algn="ctr">
+              <a:spcAft>
+                <a:spcPts val="200"/>
+              </a:spcAft>
+            </a:pPr>
+            <a:r>
+              <a:rPr sz="1600" b="1">
+                <a:solidFill>
+                  <a:srgbClr val="FFFFFF"/>
+                </a:solidFill>
+                <a:latin typeface="Calibri"/>
+              </a:rPr>
+              <a:t>2</a:t>
+            </a:r>
+          </a:p>
+        </p:txBody>
+      </p:sp>
+      <p:sp>
+        <p:nvSpPr>
+          <p:cNvPr id="14" name="TextBox 13"/>
+          <p:cNvSpPr txBox="1"/>
+          <p:nvPr/>
+        </p:nvSpPr>
+        <p:spPr>
+          <a:xfrm>
+            <a:off x="9218523" y="1417320"/>
+            <a:ext cx="2259939" cy="1947672"/>
+          </a:xfrm>
+          <a:prstGeom prst="rect">
+            <a:avLst/>
+          </a:prstGeom>
+          <a:noFill/>
+        </p:spPr>
+        <p:txBody>
+          <a:bodyPr wrap="square" anchor="ctr" lIns="18288" rIns="18288" tIns="36576" bIns="36576">
+            <a:spAutoFit/>
+          </a:bodyPr>
+          <a:lstStyle/>
+          <a:p>
+            <a:pPr algn="l">
+              <a:spcAft>
+                <a:spcPts val="200"/>
+              </a:spcAft>
+            </a:pPr>
+            <a:r>
+              <a:rPr sz="1600" b="1">
+                <a:solidFill>
+                  <a:srgbClr val="0B1F3A"/>
+                </a:solidFill>
+                <a:latin typeface="Calibri"/>
+              </a:rPr>
+              <a:t>Etiketka</a:t>
+            </a:r>
+          </a:p>
+          <a:p>
+            <a:pPr algn="l">
+              <a:spcAft>
+                <a:spcPts val="200"/>
+              </a:spcAft>
+            </a:pPr>
+            <a:r>
+              <a:rPr sz="1400" b="0">
+                <a:solidFill>
+                  <a:srgbClr val="1F2937"/>
+                </a:solidFill>
+                <a:latin typeface="Calibri"/>
+              </a:rPr>
+              <a:t>Ism, familiya, yil, a’zo nomi, akt va tartib raqami</a:t>
+            </a:r>
+          </a:p>
+        </p:txBody>
+      </p:sp>
+      <p:sp>
+        <p:nvSpPr>
+          <p:cNvPr id="15" name="Rounded Rectangle 14"/>
+          <p:cNvSpPr/>
+          <p:nvPr/>
+        </p:nvSpPr>
+        <p:spPr>
+          <a:xfrm>
+            <a:off x="5440680" y="3493008"/>
+            <a:ext cx="2973171" cy="1947672"/>
+          </a:xfrm>
+          <a:prstGeom prst="roundRect">
+            <a:avLst>
+              <a:gd name="adj" fmla="val 8000"/>
+            </a:avLst>
+          </a:prstGeom>
+          <a:solidFill>
+            <a:srgbClr val="FFFFFF"/>
+          </a:solidFill>
+          <a:ln w="15875">
+            <a:solidFill>
+              <a:srgbClr val="E8EEF6"/>
+            </a:solidFill>
+          </a:ln>
+          <a:effectLst/>
+        </p:spPr>
+        <p:style>
+          <a:lnRef idx="1">
+            <a:schemeClr val="accent1"/>
+          </a:lnRef>
+          <a:fillRef idx="3">
+            <a:schemeClr val="accent1"/>
+          </a:fillRef>
+          <a:effectRef idx="2">
+            <a:schemeClr val="accent1"/>
+          </a:effectRef>
+          <a:fontRef idx="minor">
+            <a:schemeClr val="lt1"/>
+          </a:fontRef>
+        </p:style>
+        <p:txBody>
+          <a:bodyPr rtlCol="0" anchor="ctr"/>
+          <a:lstStyle/>
+          <a:p>
+            <a:pPr algn="ctr"/>
+          </a:p>
+        </p:txBody>
+      </p:sp>
+      <p:sp>
+        <p:nvSpPr>
+          <p:cNvPr id="16" name="Oval 15"/>
+          <p:cNvSpPr/>
+          <p:nvPr/>
+        </p:nvSpPr>
+        <p:spPr>
+          <a:xfrm>
+            <a:off x="5550408" y="4238244"/>
+            <a:ext cx="457200" cy="457200"/>
+          </a:xfrm>
+          <a:prstGeom prst="ellipse">
+            <a:avLst/>
+          </a:prstGeom>
+          <a:solidFill>
+            <a:srgbClr val="0B1F3A"/>
+          </a:solidFill>
+          <a:ln>
+            <a:noFill/>
+          </a:ln>
+          <a:effectLst/>
+        </p:spPr>
+        <p:style>
+          <a:lnRef idx="1">
+            <a:schemeClr val="accent1"/>
+          </a:lnRef>
+          <a:fillRef idx="3">
+            <a:schemeClr val="accent1"/>
+          </a:fillRef>
+          <a:effectRef idx="2">
+            <a:schemeClr val="accent1"/>
+          </a:effectRef>
+          <a:fontRef idx="minor">
+            <a:schemeClr val="lt1"/>
+          </a:fontRef>
+        </p:style>
+        <p:txBody>
+          <a:bodyPr rtlCol="0" anchor="ctr" wrap="square" lIns="0" rIns="0" tIns="36576" bIns="36576"/>
+          <a:lstStyle/>
+          <a:p>
+            <a:pPr algn="ctr">
+              <a:spcAft>
+                <a:spcPts val="200"/>
+              </a:spcAft>
+            </a:pPr>
+            <a:r>
+              <a:rPr sz="1600" b="1">
+                <a:solidFill>
+                  <a:srgbClr val="FFFFFF"/>
+                </a:solidFill>
+                <a:latin typeface="Calibri"/>
+              </a:rPr>
+              <a:t>3</a:t>
+            </a:r>
+          </a:p>
+        </p:txBody>
+      </p:sp>
+      <p:sp>
+        <p:nvSpPr>
+          <p:cNvPr id="17" name="TextBox 16"/>
+          <p:cNvSpPr txBox="1"/>
+          <p:nvPr/>
+        </p:nvSpPr>
+        <p:spPr>
+          <a:xfrm>
+            <a:off x="6080760" y="3493008"/>
+            <a:ext cx="2259939" cy="1947672"/>
+          </a:xfrm>
+          <a:prstGeom prst="rect">
+            <a:avLst/>
+          </a:prstGeom>
+          <a:noFill/>
+        </p:spPr>
+        <p:txBody>
+          <a:bodyPr wrap="square" anchor="ctr" lIns="18288" rIns="18288" tIns="36576" bIns="36576">
+            <a:spAutoFit/>
+          </a:bodyPr>
+          <a:lstStyle/>
+          <a:p>
+            <a:pPr algn="l">
+              <a:spcAft>
+                <a:spcPts val="200"/>
+              </a:spcAft>
+            </a:pPr>
+            <a:r>
+              <a:rPr sz="1600" b="1">
+                <a:solidFill>
+                  <a:srgbClr val="0B1F3A"/>
+                </a:solidFill>
+                <a:latin typeface="Calibri"/>
+              </a:rPr>
+              <a:t>Qadoqlash</a:t>
+            </a:r>
+          </a:p>
+          <a:p>
+            <a:pPr algn="l">
+              <a:spcAft>
+                <a:spcPts val="200"/>
+              </a:spcAft>
+            </a:pPr>
+            <a:r>
+              <a:rPr sz="1400" b="0">
+                <a:solidFill>
+                  <a:srgbClr val="1F2937"/>
+                </a:solidFill>
+                <a:latin typeface="Calibri"/>
+              </a:rPr>
+              <a:t>Muhrlangan polietilen xalta yoki konteyner</a:t>
+            </a:r>
+          </a:p>
+        </p:txBody>
+      </p:sp>
+      <p:sp>
+        <p:nvSpPr>
+          <p:cNvPr id="18" name="Rounded Rectangle 17"/>
+          <p:cNvSpPr/>
+          <p:nvPr/>
+        </p:nvSpPr>
+        <p:spPr>
+          <a:xfrm>
+            <a:off x="8578443" y="3493008"/>
+            <a:ext cx="2973171" cy="1947672"/>
+          </a:xfrm>
+          <a:prstGeom prst="roundRect">
+            <a:avLst>
+              <a:gd name="adj" fmla="val 8000"/>
+            </a:avLst>
+          </a:prstGeom>
+          <a:solidFill>
+            <a:srgbClr val="FFFFFF"/>
+          </a:solidFill>
+          <a:ln w="15875">
+            <a:solidFill>
+              <a:srgbClr val="E8EEF6"/>
+            </a:solidFill>
+          </a:ln>
+          <a:effectLst/>
+        </p:spPr>
+        <p:style>
+          <a:lnRef idx="1">
+            <a:schemeClr val="accent1"/>
+          </a:lnRef>
+          <a:fillRef idx="3">
+            <a:schemeClr val="accent1"/>
+          </a:fillRef>
+          <a:effectRef idx="2">
+            <a:schemeClr val="accent1"/>
+          </a:effectRef>
+          <a:fontRef idx="minor">
+            <a:schemeClr val="lt1"/>
+          </a:fontRef>
+        </p:style>
+        <p:txBody>
+          <a:bodyPr rtlCol="0" anchor="ctr"/>
+          <a:lstStyle/>
+          <a:p>
+            <a:pPr algn="ctr"/>
+          </a:p>
+        </p:txBody>
+      </p:sp>
+      <p:sp>
+        <p:nvSpPr>
+          <p:cNvPr id="19" name="Oval 18"/>
+          <p:cNvSpPr/>
+          <p:nvPr/>
+        </p:nvSpPr>
+        <p:spPr>
+          <a:xfrm>
+            <a:off x="8688171" y="4238244"/>
+            <a:ext cx="457200" cy="457200"/>
+          </a:xfrm>
+          <a:prstGeom prst="ellipse">
+            <a:avLst/>
+          </a:prstGeom>
+          <a:solidFill>
+            <a:srgbClr val="0B1F3A"/>
+          </a:solidFill>
+          <a:ln>
+            <a:noFill/>
+          </a:ln>
+          <a:effectLst/>
+        </p:spPr>
+        <p:style>
+          <a:lnRef idx="1">
+            <a:schemeClr val="accent1"/>
+          </a:lnRef>
+          <a:fillRef idx="3">
+            <a:schemeClr val="accent1"/>
+          </a:fillRef>
+          <a:effectRef idx="2">
+            <a:schemeClr val="accent1"/>
+          </a:effectRef>
+          <a:fontRef idx="minor">
+            <a:schemeClr val="lt1"/>
+          </a:fontRef>
+        </p:style>
+        <p:txBody>
+          <a:bodyPr rtlCol="0" anchor="ctr" wrap="square" lIns="0" rIns="0" tIns="36576" bIns="36576"/>
+          <a:lstStyle/>
+          <a:p>
+            <a:pPr algn="ctr">
+              <a:spcAft>
+                <a:spcPts val="200"/>
+              </a:spcAft>
+            </a:pPr>
+            <a:r>
+              <a:rPr sz="1600" b="1">
+                <a:solidFill>
+                  <a:srgbClr val="FFFFFF"/>
+                </a:solidFill>
+                <a:latin typeface="Calibri"/>
+              </a:rPr>
+              <a:t>4</a:t>
+            </a:r>
+          </a:p>
+        </p:txBody>
+      </p:sp>
+      <p:sp>
+        <p:nvSpPr>
+          <p:cNvPr id="20" name="TextBox 19"/>
+          <p:cNvSpPr txBox="1"/>
+          <p:nvPr/>
+        </p:nvSpPr>
+        <p:spPr>
+          <a:xfrm>
+            <a:off x="9218523" y="3493008"/>
+            <a:ext cx="2259939" cy="1947672"/>
+          </a:xfrm>
+          <a:prstGeom prst="rect">
+            <a:avLst/>
+          </a:prstGeom>
+          <a:noFill/>
+        </p:spPr>
+        <p:txBody>
+          <a:bodyPr wrap="square" anchor="ctr" lIns="18288" rIns="18288" tIns="36576" bIns="36576">
+            <a:spAutoFit/>
+          </a:bodyPr>
+          <a:lstStyle/>
+          <a:p>
+            <a:pPr algn="l">
+              <a:spcAft>
+                <a:spcPts val="200"/>
+              </a:spcAft>
+            </a:pPr>
+            <a:r>
+              <a:rPr sz="1600" b="1">
+                <a:solidFill>
+                  <a:srgbClr val="0B1F3A"/>
+                </a:solidFill>
+                <a:latin typeface="Calibri"/>
+              </a:rPr>
+              <a:t>Hujjat</a:t>
+            </a:r>
+          </a:p>
+          <a:p>
+            <a:pPr algn="l">
+              <a:spcAft>
+                <a:spcPts val="200"/>
+              </a:spcAft>
+            </a:pPr>
+            <a:r>
+              <a:rPr sz="1400" b="0">
+                <a:solidFill>
+                  <a:srgbClr val="1F2937"/>
+                </a:solidFill>
+                <a:latin typeface="Calibri"/>
+              </a:rPr>
+              <a:t>Yo‘llanma yoki ekspertiza qarori</a:t>
+            </a:r>
+          </a:p>
+        </p:txBody>
+      </p:sp>
+      <p:sp>
+        <p:nvSpPr>
+          <p:cNvPr id="21" name="TextBox 20"/>
+          <p:cNvSpPr txBox="1"/>
+          <p:nvPr/>
+        </p:nvSpPr>
+        <p:spPr>
+          <a:xfrm>
+            <a:off x="5440680" y="5486400"/>
+            <a:ext cx="6110935" cy="365760"/>
+          </a:xfrm>
+          <a:prstGeom prst="rect">
+            <a:avLst/>
+          </a:prstGeom>
+          <a:noFill/>
+        </p:spPr>
+        <p:txBody>
+          <a:bodyPr wrap="square">
+            <a:spAutoFit/>
+          </a:bodyPr>
+          <a:lstStyle/>
+          <a:p>
+            <a:r>
+              <a:rPr sz="1200" b="0">
+                <a:solidFill>
+                  <a:srgbClr val="6B7280"/>
+                </a:solidFill>
+                <a:latin typeface="Calibri"/>
+              </a:rPr>
+              <a:t>Yuborish tartibi</a:t>
+            </a:r>
+          </a:p>
+        </p:txBody>
+      </p:sp>
+      <p:sp>
+        <p:nvSpPr>
+          <p:cNvPr id="22" name="TextBox 21"/>
           <p:cNvSpPr txBox="1"/>
           <p:nvPr/>
         </p:nvSpPr>
@@ -8394,7 +10117,7 @@
         <p:spPr>
           <a:xfrm>
             <a:off x="640080" y="1417320"/>
-            <a:ext cx="10911535" cy="4480560"/>
+            <a:ext cx="4572000" cy="4480560"/>
           </a:xfrm>
           <a:prstGeom prst="rect">
             <a:avLst/>
@@ -8409,11 +10132,11 @@
           <a:p>
             <a:pPr>
               <a:spcAft>
-                <a:spcPts val="1200"/>
+                <a:spcPts val="800"/>
               </a:spcAft>
             </a:pPr>
             <a:r>
-              <a:rPr sz="2200">
+              <a:rPr sz="1800">
                 <a:solidFill>
                   <a:srgbClr val="1F2937"/>
                 </a:solidFill>
@@ -8425,11 +10148,11 @@
           <a:p>
             <a:pPr>
               <a:spcAft>
-                <a:spcPts val="1200"/>
+                <a:spcPts val="800"/>
               </a:spcAft>
             </a:pPr>
             <a:r>
-              <a:rPr sz="2200">
+              <a:rPr sz="1800">
                 <a:solidFill>
                   <a:srgbClr val="1F2937"/>
                 </a:solidFill>
@@ -8441,11 +10164,11 @@
           <a:p>
             <a:pPr>
               <a:spcAft>
-                <a:spcPts val="1200"/>
+                <a:spcPts val="800"/>
               </a:spcAft>
             </a:pPr>
             <a:r>
-              <a:rPr sz="2200">
+              <a:rPr sz="1800">
                 <a:solidFill>
                   <a:srgbClr val="1F2937"/>
                 </a:solidFill>
@@ -8458,7 +10181,629 @@
       </p:sp>
       <p:sp>
         <p:nvSpPr>
-          <p:cNvPr id="9" name="TextBox 8"/>
+          <p:cNvPr id="9" name="Rounded Rectangle 8"/>
+          <p:cNvSpPr/>
+          <p:nvPr/>
+        </p:nvSpPr>
+        <p:spPr>
+          <a:xfrm>
+            <a:off x="5440680" y="1417320"/>
+            <a:ext cx="2973171" cy="1554480"/>
+          </a:xfrm>
+          <a:prstGeom prst="roundRect">
+            <a:avLst>
+              <a:gd name="adj" fmla="val 8000"/>
+            </a:avLst>
+          </a:prstGeom>
+          <a:solidFill>
+            <a:srgbClr val="FFFFFF"/>
+          </a:solidFill>
+          <a:ln w="15875">
+            <a:solidFill>
+              <a:srgbClr val="E8EEF6"/>
+            </a:solidFill>
+          </a:ln>
+          <a:effectLst/>
+        </p:spPr>
+        <p:style>
+          <a:lnRef idx="1">
+            <a:schemeClr val="accent1"/>
+          </a:lnRef>
+          <a:fillRef idx="3">
+            <a:schemeClr val="accent1"/>
+          </a:fillRef>
+          <a:effectRef idx="2">
+            <a:schemeClr val="accent1"/>
+          </a:effectRef>
+          <a:fontRef idx="minor">
+            <a:schemeClr val="lt1"/>
+          </a:fontRef>
+        </p:style>
+        <p:txBody>
+          <a:bodyPr rtlCol="0" anchor="ctr"/>
+          <a:lstStyle/>
+          <a:p>
+            <a:pPr algn="ctr"/>
+          </a:p>
+        </p:txBody>
+      </p:sp>
+      <p:sp>
+        <p:nvSpPr>
+          <p:cNvPr id="10" name="Rectangle 9"/>
+          <p:cNvSpPr/>
+          <p:nvPr/>
+        </p:nvSpPr>
+        <p:spPr>
+          <a:xfrm>
+            <a:off x="5440680" y="1508760"/>
+            <a:ext cx="64008" cy="1371600"/>
+          </a:xfrm>
+          <a:prstGeom prst="rect">
+            <a:avLst/>
+          </a:prstGeom>
+          <a:solidFill>
+            <a:srgbClr val="C9A227"/>
+          </a:solidFill>
+          <a:ln>
+            <a:noFill/>
+          </a:ln>
+          <a:effectLst/>
+        </p:spPr>
+        <p:style>
+          <a:lnRef idx="1">
+            <a:schemeClr val="accent1"/>
+          </a:lnRef>
+          <a:fillRef idx="3">
+            <a:schemeClr val="accent1"/>
+          </a:fillRef>
+          <a:effectRef idx="2">
+            <a:schemeClr val="accent1"/>
+          </a:effectRef>
+          <a:fontRef idx="minor">
+            <a:schemeClr val="lt1"/>
+          </a:fontRef>
+        </p:style>
+        <p:txBody>
+          <a:bodyPr rtlCol="0" anchor="ctr"/>
+          <a:lstStyle/>
+          <a:p>
+            <a:pPr algn="ctr"/>
+          </a:p>
+        </p:txBody>
+      </p:sp>
+      <p:sp>
+        <p:nvSpPr>
+          <p:cNvPr id="11" name="TextBox 10"/>
+          <p:cNvSpPr txBox="1"/>
+          <p:nvPr/>
+        </p:nvSpPr>
+        <p:spPr>
+          <a:xfrm>
+            <a:off x="5550408" y="1417320"/>
+            <a:ext cx="2863443" cy="1554480"/>
+          </a:xfrm>
+          <a:prstGeom prst="rect">
+            <a:avLst/>
+          </a:prstGeom>
+          <a:noFill/>
+        </p:spPr>
+        <p:txBody>
+          <a:bodyPr wrap="square" anchor="ctr" tIns="36576" bIns="36576">
+            <a:spAutoFit/>
+          </a:bodyPr>
+          <a:lstStyle/>
+          <a:p>
+            <a:pPr algn="l">
+              <a:spcAft>
+                <a:spcPts val="100"/>
+              </a:spcAft>
+            </a:pPr>
+            <a:r>
+              <a:rPr sz="1300" b="0">
+                <a:solidFill>
+                  <a:srgbClr val="6B7280"/>
+                </a:solidFill>
+                <a:latin typeface="Calibri"/>
+              </a:rPr>
+              <a:t>Tuproq</a:t>
+            </a:r>
+          </a:p>
+          <a:p>
+            <a:pPr algn="l">
+              <a:spcAft>
+                <a:spcPts val="100"/>
+              </a:spcAft>
+            </a:pPr>
+            <a:r>
+              <a:rPr sz="2300" b="1">
+                <a:solidFill>
+                  <a:srgbClr val="0B1F3A"/>
+                </a:solidFill>
+                <a:latin typeface="Calibri"/>
+              </a:rPr>
+              <a:t>6 joydan, 500 g dan</a:t>
+            </a:r>
+          </a:p>
+        </p:txBody>
+      </p:sp>
+      <p:sp>
+        <p:nvSpPr>
+          <p:cNvPr id="12" name="Rounded Rectangle 11"/>
+          <p:cNvSpPr/>
+          <p:nvPr/>
+        </p:nvSpPr>
+        <p:spPr>
+          <a:xfrm>
+            <a:off x="8578443" y="1417320"/>
+            <a:ext cx="2973171" cy="1554480"/>
+          </a:xfrm>
+          <a:prstGeom prst="roundRect">
+            <a:avLst>
+              <a:gd name="adj" fmla="val 8000"/>
+            </a:avLst>
+          </a:prstGeom>
+          <a:solidFill>
+            <a:srgbClr val="FFFFFF"/>
+          </a:solidFill>
+          <a:ln w="15875">
+            <a:solidFill>
+              <a:srgbClr val="E8EEF6"/>
+            </a:solidFill>
+          </a:ln>
+          <a:effectLst/>
+        </p:spPr>
+        <p:style>
+          <a:lnRef idx="1">
+            <a:schemeClr val="accent1"/>
+          </a:lnRef>
+          <a:fillRef idx="3">
+            <a:schemeClr val="accent1"/>
+          </a:fillRef>
+          <a:effectRef idx="2">
+            <a:schemeClr val="accent1"/>
+          </a:effectRef>
+          <a:fontRef idx="minor">
+            <a:schemeClr val="lt1"/>
+          </a:fontRef>
+        </p:style>
+        <p:txBody>
+          <a:bodyPr rtlCol="0" anchor="ctr"/>
+          <a:lstStyle/>
+          <a:p>
+            <a:pPr algn="ctr"/>
+          </a:p>
+        </p:txBody>
+      </p:sp>
+      <p:sp>
+        <p:nvSpPr>
+          <p:cNvPr id="13" name="Rectangle 12"/>
+          <p:cNvSpPr/>
+          <p:nvPr/>
+        </p:nvSpPr>
+        <p:spPr>
+          <a:xfrm>
+            <a:off x="8578443" y="1508760"/>
+            <a:ext cx="64008" cy="1371600"/>
+          </a:xfrm>
+          <a:prstGeom prst="rect">
+            <a:avLst/>
+          </a:prstGeom>
+          <a:solidFill>
+            <a:srgbClr val="C9A227"/>
+          </a:solidFill>
+          <a:ln>
+            <a:noFill/>
+          </a:ln>
+          <a:effectLst/>
+        </p:spPr>
+        <p:style>
+          <a:lnRef idx="1">
+            <a:schemeClr val="accent1"/>
+          </a:lnRef>
+          <a:fillRef idx="3">
+            <a:schemeClr val="accent1"/>
+          </a:fillRef>
+          <a:effectRef idx="2">
+            <a:schemeClr val="accent1"/>
+          </a:effectRef>
+          <a:fontRef idx="minor">
+            <a:schemeClr val="lt1"/>
+          </a:fontRef>
+        </p:style>
+        <p:txBody>
+          <a:bodyPr rtlCol="0" anchor="ctr"/>
+          <a:lstStyle/>
+          <a:p>
+            <a:pPr algn="ctr"/>
+          </a:p>
+        </p:txBody>
+      </p:sp>
+      <p:sp>
+        <p:nvSpPr>
+          <p:cNvPr id="14" name="TextBox 13"/>
+          <p:cNvSpPr txBox="1"/>
+          <p:nvPr/>
+        </p:nvSpPr>
+        <p:spPr>
+          <a:xfrm>
+            <a:off x="8688171" y="1417320"/>
+            <a:ext cx="2863443" cy="1554480"/>
+          </a:xfrm>
+          <a:prstGeom prst="rect">
+            <a:avLst/>
+          </a:prstGeom>
+          <a:noFill/>
+        </p:spPr>
+        <p:txBody>
+          <a:bodyPr wrap="square" anchor="ctr" tIns="36576" bIns="36576">
+            <a:spAutoFit/>
+          </a:bodyPr>
+          <a:lstStyle/>
+          <a:p>
+            <a:pPr algn="l">
+              <a:spcAft>
+                <a:spcPts val="100"/>
+              </a:spcAft>
+            </a:pPr>
+            <a:r>
+              <a:rPr sz="1300" b="0">
+                <a:solidFill>
+                  <a:srgbClr val="6B7280"/>
+                </a:solidFill>
+                <a:latin typeface="Calibri"/>
+              </a:rPr>
+              <a:t>Tobut taxtasi</a:t>
+            </a:r>
+          </a:p>
+          <a:p>
+            <a:pPr algn="l">
+              <a:spcAft>
+                <a:spcPts val="100"/>
+              </a:spcAft>
+            </a:pPr>
+            <a:r>
+              <a:rPr sz="3000" b="1">
+                <a:solidFill>
+                  <a:srgbClr val="0B1F3A"/>
+                </a:solidFill>
+                <a:latin typeface="Calibri"/>
+              </a:rPr>
+              <a:t>500 kub sm</a:t>
+            </a:r>
+          </a:p>
+        </p:txBody>
+      </p:sp>
+      <p:sp>
+        <p:nvSpPr>
+          <p:cNvPr id="15" name="Rounded Rectangle 14"/>
+          <p:cNvSpPr/>
+          <p:nvPr/>
+        </p:nvSpPr>
+        <p:spPr>
+          <a:xfrm>
+            <a:off x="5440680" y="3118104"/>
+            <a:ext cx="2973171" cy="1554480"/>
+          </a:xfrm>
+          <a:prstGeom prst="roundRect">
+            <a:avLst>
+              <a:gd name="adj" fmla="val 8000"/>
+            </a:avLst>
+          </a:prstGeom>
+          <a:solidFill>
+            <a:srgbClr val="FFFFFF"/>
+          </a:solidFill>
+          <a:ln w="15875">
+            <a:solidFill>
+              <a:srgbClr val="E8EEF6"/>
+            </a:solidFill>
+          </a:ln>
+          <a:effectLst/>
+        </p:spPr>
+        <p:style>
+          <a:lnRef idx="1">
+            <a:schemeClr val="accent1"/>
+          </a:lnRef>
+          <a:fillRef idx="3">
+            <a:schemeClr val="accent1"/>
+          </a:fillRef>
+          <a:effectRef idx="2">
+            <a:schemeClr val="accent1"/>
+          </a:effectRef>
+          <a:fontRef idx="minor">
+            <a:schemeClr val="lt1"/>
+          </a:fontRef>
+        </p:style>
+        <p:txBody>
+          <a:bodyPr rtlCol="0" anchor="ctr"/>
+          <a:lstStyle/>
+          <a:p>
+            <a:pPr algn="ctr"/>
+          </a:p>
+        </p:txBody>
+      </p:sp>
+      <p:sp>
+        <p:nvSpPr>
+          <p:cNvPr id="16" name="Rectangle 15"/>
+          <p:cNvSpPr/>
+          <p:nvPr/>
+        </p:nvSpPr>
+        <p:spPr>
+          <a:xfrm>
+            <a:off x="5440680" y="3209544"/>
+            <a:ext cx="64008" cy="1371600"/>
+          </a:xfrm>
+          <a:prstGeom prst="rect">
+            <a:avLst/>
+          </a:prstGeom>
+          <a:solidFill>
+            <a:srgbClr val="C9A227"/>
+          </a:solidFill>
+          <a:ln>
+            <a:noFill/>
+          </a:ln>
+          <a:effectLst/>
+        </p:spPr>
+        <p:style>
+          <a:lnRef idx="1">
+            <a:schemeClr val="accent1"/>
+          </a:lnRef>
+          <a:fillRef idx="3">
+            <a:schemeClr val="accent1"/>
+          </a:fillRef>
+          <a:effectRef idx="2">
+            <a:schemeClr val="accent1"/>
+          </a:effectRef>
+          <a:fontRef idx="minor">
+            <a:schemeClr val="lt1"/>
+          </a:fontRef>
+        </p:style>
+        <p:txBody>
+          <a:bodyPr rtlCol="0" anchor="ctr"/>
+          <a:lstStyle/>
+          <a:p>
+            <a:pPr algn="ctr"/>
+          </a:p>
+        </p:txBody>
+      </p:sp>
+      <p:sp>
+        <p:nvSpPr>
+          <p:cNvPr id="17" name="TextBox 16"/>
+          <p:cNvSpPr txBox="1"/>
+          <p:nvPr/>
+        </p:nvSpPr>
+        <p:spPr>
+          <a:xfrm>
+            <a:off x="5550408" y="3118104"/>
+            <a:ext cx="2863443" cy="1554480"/>
+          </a:xfrm>
+          <a:prstGeom prst="rect">
+            <a:avLst/>
+          </a:prstGeom>
+          <a:noFill/>
+        </p:spPr>
+        <p:txBody>
+          <a:bodyPr wrap="square" anchor="ctr" tIns="36576" bIns="36576">
+            <a:spAutoFit/>
+          </a:bodyPr>
+          <a:lstStyle/>
+          <a:p>
+            <a:pPr algn="l">
+              <a:spcAft>
+                <a:spcPts val="100"/>
+              </a:spcAft>
+            </a:pPr>
+            <a:r>
+              <a:rPr sz="1300" b="0">
+                <a:solidFill>
+                  <a:srgbClr val="6B7280"/>
+                </a:solidFill>
+                <a:latin typeface="Calibri"/>
+              </a:rPr>
+              <a:t>Matolar</a:t>
+            </a:r>
+          </a:p>
+          <a:p>
+            <a:pPr algn="l">
+              <a:spcAft>
+                <a:spcPts val="100"/>
+              </a:spcAft>
+            </a:pPr>
+            <a:r>
+              <a:rPr sz="2700" b="1">
+                <a:solidFill>
+                  <a:srgbClr val="0B1F3A"/>
+                </a:solidFill>
+                <a:latin typeface="Calibri"/>
+              </a:rPr>
+              <a:t>kiyim, qoplama</a:t>
+            </a:r>
+          </a:p>
+        </p:txBody>
+      </p:sp>
+      <p:sp>
+        <p:nvSpPr>
+          <p:cNvPr id="18" name="Rounded Rectangle 17"/>
+          <p:cNvSpPr/>
+          <p:nvPr/>
+        </p:nvSpPr>
+        <p:spPr>
+          <a:xfrm>
+            <a:off x="8578443" y="3118104"/>
+            <a:ext cx="2973171" cy="1554480"/>
+          </a:xfrm>
+          <a:prstGeom prst="roundRect">
+            <a:avLst>
+              <a:gd name="adj" fmla="val 8000"/>
+            </a:avLst>
+          </a:prstGeom>
+          <a:solidFill>
+            <a:srgbClr val="FFFFFF"/>
+          </a:solidFill>
+          <a:ln w="15875">
+            <a:solidFill>
+              <a:srgbClr val="E8EEF6"/>
+            </a:solidFill>
+          </a:ln>
+          <a:effectLst/>
+        </p:spPr>
+        <p:style>
+          <a:lnRef idx="1">
+            <a:schemeClr val="accent1"/>
+          </a:lnRef>
+          <a:fillRef idx="3">
+            <a:schemeClr val="accent1"/>
+          </a:fillRef>
+          <a:effectRef idx="2">
+            <a:schemeClr val="accent1"/>
+          </a:effectRef>
+          <a:fontRef idx="minor">
+            <a:schemeClr val="lt1"/>
+          </a:fontRef>
+        </p:style>
+        <p:txBody>
+          <a:bodyPr rtlCol="0" anchor="ctr"/>
+          <a:lstStyle/>
+          <a:p>
+            <a:pPr algn="ctr"/>
+          </a:p>
+        </p:txBody>
+      </p:sp>
+      <p:sp>
+        <p:nvSpPr>
+          <p:cNvPr id="19" name="Rectangle 18"/>
+          <p:cNvSpPr/>
+          <p:nvPr/>
+        </p:nvSpPr>
+        <p:spPr>
+          <a:xfrm>
+            <a:off x="8578443" y="3209544"/>
+            <a:ext cx="64008" cy="1371600"/>
+          </a:xfrm>
+          <a:prstGeom prst="rect">
+            <a:avLst/>
+          </a:prstGeom>
+          <a:solidFill>
+            <a:srgbClr val="C9A227"/>
+          </a:solidFill>
+          <a:ln>
+            <a:noFill/>
+          </a:ln>
+          <a:effectLst/>
+        </p:spPr>
+        <p:style>
+          <a:lnRef idx="1">
+            <a:schemeClr val="accent1"/>
+          </a:lnRef>
+          <a:fillRef idx="3">
+            <a:schemeClr val="accent1"/>
+          </a:fillRef>
+          <a:effectRef idx="2">
+            <a:schemeClr val="accent1"/>
+          </a:effectRef>
+          <a:fontRef idx="minor">
+            <a:schemeClr val="lt1"/>
+          </a:fontRef>
+        </p:style>
+        <p:txBody>
+          <a:bodyPr rtlCol="0" anchor="ctr"/>
+          <a:lstStyle/>
+          <a:p>
+            <a:pPr algn="ctr"/>
+          </a:p>
+        </p:txBody>
+      </p:sp>
+      <p:sp>
+        <p:nvSpPr>
+          <p:cNvPr id="20" name="TextBox 19"/>
+          <p:cNvSpPr txBox="1"/>
+          <p:nvPr/>
+        </p:nvSpPr>
+        <p:spPr>
+          <a:xfrm>
+            <a:off x="8688171" y="3118104"/>
+            <a:ext cx="2863443" cy="1554480"/>
+          </a:xfrm>
+          <a:prstGeom prst="rect">
+            <a:avLst/>
+          </a:prstGeom>
+          <a:noFill/>
+        </p:spPr>
+        <p:txBody>
+          <a:bodyPr wrap="square" anchor="ctr" tIns="36576" bIns="36576">
+            <a:spAutoFit/>
+          </a:bodyPr>
+          <a:lstStyle/>
+          <a:p>
+            <a:pPr algn="l">
+              <a:spcAft>
+                <a:spcPts val="100"/>
+              </a:spcAft>
+            </a:pPr>
+            <a:r>
+              <a:rPr sz="1300" b="0">
+                <a:solidFill>
+                  <a:srgbClr val="6B7280"/>
+                </a:solidFill>
+                <a:latin typeface="Calibri"/>
+              </a:rPr>
+              <a:t>Boshqa</a:t>
+            </a:r>
+          </a:p>
+          <a:p>
+            <a:pPr algn="l">
+              <a:spcAft>
+                <a:spcPts val="100"/>
+              </a:spcAft>
+            </a:pPr>
+            <a:r>
+              <a:rPr sz="2500" b="1">
+                <a:solidFill>
+                  <a:srgbClr val="0B1F3A"/>
+                </a:solidFill>
+                <a:latin typeface="Calibri"/>
+              </a:rPr>
+              <a:t>taqinchoq va b.</a:t>
+            </a:r>
+          </a:p>
+        </p:txBody>
+      </p:sp>
+      <p:sp>
+        <p:nvSpPr>
+          <p:cNvPr id="21" name="TextBox 20"/>
+          <p:cNvSpPr txBox="1"/>
+          <p:nvPr/>
+        </p:nvSpPr>
+        <p:spPr>
+          <a:xfrm>
+            <a:off x="5440680" y="5486400"/>
+            <a:ext cx="6110935" cy="365760"/>
+          </a:xfrm>
+          <a:prstGeom prst="rect">
+            <a:avLst/>
+          </a:prstGeom>
+          <a:noFill/>
+        </p:spPr>
+        <p:txBody>
+          <a:bodyPr wrap="square">
+            <a:spAutoFit/>
+          </a:bodyPr>
+          <a:lstStyle/>
+          <a:p>
+            <a:r>
+              <a:rPr sz="1200" b="0">
+                <a:solidFill>
+                  <a:srgbClr val="6B7280"/>
+                </a:solidFill>
+                <a:latin typeface="Calibri"/>
+              </a:rPr>
+              <a:t>Eksgumatsiya: ob’ektlar</a:t>
+            </a:r>
+          </a:p>
+        </p:txBody>
+      </p:sp>
+      <p:sp>
+        <p:nvSpPr>
+          <p:cNvPr id="22" name="TextBox 21"/>
           <p:cNvSpPr txBox="1"/>
           <p:nvPr/>
         </p:nvSpPr>
@@ -8825,7 +11170,23 @@
                 </a:solidFill>
                 <a:latin typeface="Calibri"/>
               </a:rPr>
-              <a:t>▸  Organik erituvchilar, kislotalar, ishqorlar, sinil kislotasi, kokain kabi moddalar uchuvchan va tez parchalanadi, shuning uchun ekspertiza qabul qilingan kuni boshlanishi kerak.</a:t>
+              <a:t>▸  Organik erituvchilar, kislotalar, ishqorlar, sinil kislotasi, kokain kabi moddalar uchuvchan va tez parchalanadi.</a:t>
+            </a:r>
+          </a:p>
+          <a:p>
+            <a:pPr>
+              <a:spcAft>
+                <a:spcPts val="1200"/>
+              </a:spcAft>
+            </a:pPr>
+            <a:r>
+              <a:rPr sz="2200">
+                <a:solidFill>
+                  <a:srgbClr val="1F2937"/>
+                </a:solidFill>
+                <a:latin typeface="Calibri"/>
+              </a:rPr>
+              <a:t>▸  Shuning uchun ekspertiza qabul qilingan kuni boshlanishi kerak.</a:t>
             </a:r>
           </a:p>
         </p:txBody>
@@ -9557,7 +11918,7 @@
                 </a:solidFill>
                 <a:latin typeface="Calibri"/>
               </a:rPr>
-              <a:t>▸  Bunday hollarda darhol uch kishidan iborat hay’at ishtirokida dalolatnoma tuziladi va sud organlari yoki sud-tibbiyot laboratoriyasidan boshqa ashyoviy dalillar talab qilinadi.</a:t>
+              <a:t>▸  Bunday hollarda uch kishilik hay’at ishtirokida dalolatnoma tuziladi va sud organlari yoki sud-tibbiyot laboratoriyasidan boshqa dalillar talab qilinadi.</a:t>
             </a:r>
           </a:p>
           <a:p>
@@ -9931,7 +12292,23 @@
                 </a:solidFill>
                 <a:latin typeface="Calibri"/>
               </a:rPr>
-              <a:t>▸  Chirishga uchraydigan ob’ektlar qaytarib bo‘lmasa, etil spirtida konservatsiyalangan holda muzlatgichda bir yil saqlanadi, so‘ng belgilangan tartibda yo‘q qilinadi.</a:t>
+              <a:t>▸  Chirishga uchraydigan ob’ektlar qaytarib bo‘lmasa.</a:t>
+            </a:r>
+          </a:p>
+          <a:p>
+            <a:pPr>
+              <a:spcAft>
+                <a:spcPts val="1200"/>
+              </a:spcAft>
+            </a:pPr>
+            <a:r>
+              <a:rPr sz="2200">
+                <a:solidFill>
+                  <a:srgbClr val="1F2937"/>
+                </a:solidFill>
+                <a:latin typeface="Calibri"/>
+              </a:rPr>
+              <a:t>▸  Etil spirtida konservatsiyalangan holda muzlatgichda bir yil saqlanadi, so‘ng belgilangan tartibda yo‘q qilinadi.</a:t>
             </a:r>
           </a:p>
           <a:p>
@@ -10305,7 +12682,23 @@
                 </a:solidFill>
                 <a:latin typeface="Calibri"/>
               </a:rPr>
-              <a:t>▸  Sud kimyosi tekshiruvi asosan ashyoviy dalilni tekshirishdir; u ko‘p hollarda qaytarib bo‘lmaydigan ob’ekt, shuning uchun ehtiyotkorlik va tejamkorlik talab etiladi.</a:t>
+              <a:t>▸  Sud kimyosi tekshiruvi asosan ashyoviy dalilni tekshirishdir.</a:t>
+            </a:r>
+          </a:p>
+          <a:p>
+            <a:pPr>
+              <a:spcAft>
+                <a:spcPts val="1200"/>
+              </a:spcAft>
+            </a:pPr>
+            <a:r>
+              <a:rPr sz="2200">
+                <a:solidFill>
+                  <a:srgbClr val="1F2937"/>
+                </a:solidFill>
+                <a:latin typeface="Calibri"/>
+              </a:rPr>
+              <a:t>▸  U ko‘p hollarda qaytarib bo‘lmaydigan ob’ekt, shuning uchun ehtiyotkorlik va tejamkorlik talab etiladi.</a:t>
             </a:r>
           </a:p>
         </p:txBody>
@@ -10606,7 +12999,7 @@
         <p:spPr>
           <a:xfrm>
             <a:off x="640080" y="1417320"/>
-            <a:ext cx="10911535" cy="4480560"/>
+            <a:ext cx="4572000" cy="4480560"/>
           </a:xfrm>
           <a:prstGeom prst="rect">
             <a:avLst/>
@@ -10621,11 +13014,11 @@
           <a:p>
             <a:pPr>
               <a:spcAft>
-                <a:spcPts val="1200"/>
+                <a:spcPts val="800"/>
               </a:spcAft>
             </a:pPr>
             <a:r>
-              <a:rPr sz="2200">
+              <a:rPr sz="1800">
                 <a:solidFill>
                   <a:srgbClr val="1F2937"/>
                 </a:solidFill>
@@ -10637,11 +13030,11 @@
           <a:p>
             <a:pPr>
               <a:spcAft>
-                <a:spcPts val="1200"/>
+                <a:spcPts val="800"/>
               </a:spcAft>
             </a:pPr>
             <a:r>
-              <a:rPr sz="2200">
+              <a:rPr sz="1800">
                 <a:solidFill>
                   <a:srgbClr val="1F2937"/>
                 </a:solidFill>
@@ -10653,11 +13046,11 @@
           <a:p>
             <a:pPr>
               <a:spcAft>
-                <a:spcPts val="1200"/>
+                <a:spcPts val="800"/>
               </a:spcAft>
             </a:pPr>
             <a:r>
-              <a:rPr sz="2200">
+              <a:rPr sz="1800">
                 <a:solidFill>
                   <a:srgbClr val="1F2937"/>
                 </a:solidFill>
@@ -10670,7 +13063,341 @@
       </p:sp>
       <p:sp>
         <p:nvSpPr>
-          <p:cNvPr id="9" name="TextBox 8"/>
+          <p:cNvPr id="9" name="Rounded Rectangle 8"/>
+          <p:cNvSpPr/>
+          <p:nvPr/>
+        </p:nvSpPr>
+        <p:spPr>
+          <a:xfrm>
+            <a:off x="5440680" y="1417320"/>
+            <a:ext cx="2986887" cy="548640"/>
+          </a:xfrm>
+          <a:prstGeom prst="roundRect">
+            <a:avLst/>
+          </a:prstGeom>
+          <a:solidFill>
+            <a:srgbClr val="0B1F3A"/>
+          </a:solidFill>
+          <a:ln>
+            <a:noFill/>
+          </a:ln>
+          <a:effectLst/>
+        </p:spPr>
+        <p:style>
+          <a:lnRef idx="1">
+            <a:schemeClr val="accent1"/>
+          </a:lnRef>
+          <a:fillRef idx="3">
+            <a:schemeClr val="accent1"/>
+          </a:fillRef>
+          <a:effectRef idx="2">
+            <a:schemeClr val="accent1"/>
+          </a:effectRef>
+          <a:fontRef idx="minor">
+            <a:schemeClr val="lt1"/>
+          </a:fontRef>
+        </p:style>
+        <p:txBody>
+          <a:bodyPr rtlCol="0" anchor="ctr" wrap="square" tIns="36576" bIns="36576"/>
+          <a:lstStyle/>
+          <a:p>
+            <a:pPr algn="ctr">
+              <a:spcAft>
+                <a:spcPts val="200"/>
+              </a:spcAft>
+            </a:pPr>
+            <a:r>
+              <a:rPr sz="1600" b="1">
+                <a:solidFill>
+                  <a:srgbClr val="FFFFFF"/>
+                </a:solidFill>
+                <a:latin typeface="Calibri"/>
+              </a:rPr>
+              <a:t>To‘liqmas tahlil</a:t>
+            </a:r>
+          </a:p>
+        </p:txBody>
+      </p:sp>
+      <p:sp>
+        <p:nvSpPr>
+          <p:cNvPr id="10" name="Rectangle 9"/>
+          <p:cNvSpPr/>
+          <p:nvPr/>
+        </p:nvSpPr>
+        <p:spPr>
+          <a:xfrm>
+            <a:off x="5440680" y="2020824"/>
+            <a:ext cx="2986887" cy="3419856"/>
+          </a:xfrm>
+          <a:prstGeom prst="rect">
+            <a:avLst/>
+          </a:prstGeom>
+          <a:solidFill>
+            <a:srgbClr val="E8EEF6"/>
+          </a:solidFill>
+          <a:ln w="15875">
+            <a:solidFill>
+              <a:srgbClr val="E8EEF6"/>
+            </a:solidFill>
+          </a:ln>
+          <a:effectLst/>
+        </p:spPr>
+        <p:style>
+          <a:lnRef idx="1">
+            <a:schemeClr val="accent1"/>
+          </a:lnRef>
+          <a:fillRef idx="3">
+            <a:schemeClr val="accent1"/>
+          </a:fillRef>
+          <a:effectRef idx="2">
+            <a:schemeClr val="accent1"/>
+          </a:effectRef>
+          <a:fontRef idx="minor">
+            <a:schemeClr val="lt1"/>
+          </a:fontRef>
+        </p:style>
+        <p:txBody>
+          <a:bodyPr rtlCol="0" anchor="t" wrap="square" tIns="36576" bIns="36576"/>
+          <a:lstStyle/>
+          <a:p>
+            <a:pPr algn="l">
+              <a:spcAft>
+                <a:spcPts val="700"/>
+              </a:spcAft>
+            </a:pPr>
+            <a:r>
+              <a:rPr sz="1500" b="1">
+                <a:solidFill>
+                  <a:srgbClr val="C9A227"/>
+                </a:solidFill>
+                <a:latin typeface="Calibri"/>
+              </a:rPr>
+              <a:t>●  </a:t>
+            </a:r>
+            <a:r>
+              <a:rPr sz="1500" b="0">
+                <a:solidFill>
+                  <a:srgbClr val="1F2937"/>
+                </a:solidFill>
+                <a:latin typeface="Calibri"/>
+              </a:rPr>
+              <a:t>Alohida ko‘rsatma bo‘yicha</a:t>
+            </a:r>
+          </a:p>
+          <a:p>
+            <a:pPr algn="l">
+              <a:spcAft>
+                <a:spcPts val="700"/>
+              </a:spcAft>
+            </a:pPr>
+            <a:r>
+              <a:rPr sz="1500" b="1">
+                <a:solidFill>
+                  <a:srgbClr val="C9A227"/>
+                </a:solidFill>
+                <a:latin typeface="Calibri"/>
+              </a:rPr>
+              <a:t>●  </a:t>
+            </a:r>
+            <a:r>
+              <a:rPr sz="1500" b="0">
+                <a:solidFill>
+                  <a:srgbClr val="1F2937"/>
+                </a:solidFill>
+                <a:latin typeface="Calibri"/>
+              </a:rPr>
+              <a:t>Bir yoki bir necha modda</a:t>
+            </a:r>
+          </a:p>
+        </p:txBody>
+      </p:sp>
+      <p:sp>
+        <p:nvSpPr>
+          <p:cNvPr id="11" name="Rounded Rectangle 10"/>
+          <p:cNvSpPr/>
+          <p:nvPr/>
+        </p:nvSpPr>
+        <p:spPr>
+          <a:xfrm>
+            <a:off x="8564727" y="1417320"/>
+            <a:ext cx="2986887" cy="548640"/>
+          </a:xfrm>
+          <a:prstGeom prst="roundRect">
+            <a:avLst/>
+          </a:prstGeom>
+          <a:solidFill>
+            <a:srgbClr val="1F4E79"/>
+          </a:solidFill>
+          <a:ln>
+            <a:noFill/>
+          </a:ln>
+          <a:effectLst/>
+        </p:spPr>
+        <p:style>
+          <a:lnRef idx="1">
+            <a:schemeClr val="accent1"/>
+          </a:lnRef>
+          <a:fillRef idx="3">
+            <a:schemeClr val="accent1"/>
+          </a:fillRef>
+          <a:effectRef idx="2">
+            <a:schemeClr val="accent1"/>
+          </a:effectRef>
+          <a:fontRef idx="minor">
+            <a:schemeClr val="lt1"/>
+          </a:fontRef>
+        </p:style>
+        <p:txBody>
+          <a:bodyPr rtlCol="0" anchor="ctr" wrap="square" tIns="36576" bIns="36576"/>
+          <a:lstStyle/>
+          <a:p>
+            <a:pPr algn="ctr">
+              <a:spcAft>
+                <a:spcPts val="200"/>
+              </a:spcAft>
+            </a:pPr>
+            <a:r>
+              <a:rPr sz="1600" b="1">
+                <a:solidFill>
+                  <a:srgbClr val="FFFFFF"/>
+                </a:solidFill>
+                <a:latin typeface="Calibri"/>
+              </a:rPr>
+              <a:t>To‘liq tahlil</a:t>
+            </a:r>
+          </a:p>
+        </p:txBody>
+      </p:sp>
+      <p:sp>
+        <p:nvSpPr>
+          <p:cNvPr id="12" name="Rectangle 11"/>
+          <p:cNvSpPr/>
+          <p:nvPr/>
+        </p:nvSpPr>
+        <p:spPr>
+          <a:xfrm>
+            <a:off x="8564727" y="2020824"/>
+            <a:ext cx="2986887" cy="3419856"/>
+          </a:xfrm>
+          <a:prstGeom prst="rect">
+            <a:avLst/>
+          </a:prstGeom>
+          <a:solidFill>
+            <a:srgbClr val="E8EEF6"/>
+          </a:solidFill>
+          <a:ln w="15875">
+            <a:solidFill>
+              <a:srgbClr val="E8EEF6"/>
+            </a:solidFill>
+          </a:ln>
+          <a:effectLst/>
+        </p:spPr>
+        <p:style>
+          <a:lnRef idx="1">
+            <a:schemeClr val="accent1"/>
+          </a:lnRef>
+          <a:fillRef idx="3">
+            <a:schemeClr val="accent1"/>
+          </a:fillRef>
+          <a:effectRef idx="2">
+            <a:schemeClr val="accent1"/>
+          </a:effectRef>
+          <a:fontRef idx="minor">
+            <a:schemeClr val="lt1"/>
+          </a:fontRef>
+        </p:style>
+        <p:txBody>
+          <a:bodyPr rtlCol="0" anchor="t" wrap="square" tIns="36576" bIns="36576"/>
+          <a:lstStyle/>
+          <a:p>
+            <a:pPr algn="l">
+              <a:spcAft>
+                <a:spcPts val="700"/>
+              </a:spcAft>
+            </a:pPr>
+            <a:r>
+              <a:rPr sz="1500" b="1">
+                <a:solidFill>
+                  <a:srgbClr val="C9A227"/>
+                </a:solidFill>
+                <a:latin typeface="Calibri"/>
+              </a:rPr>
+              <a:t>●  </a:t>
+            </a:r>
+            <a:r>
+              <a:rPr sz="1500" b="0">
+                <a:solidFill>
+                  <a:srgbClr val="1F2937"/>
+                </a:solidFill>
+                <a:latin typeface="Calibri"/>
+              </a:rPr>
+              <a:t>67 ta zaharli moddaga</a:t>
+            </a:r>
+          </a:p>
+          <a:p>
+            <a:pPr algn="l">
+              <a:spcAft>
+                <a:spcPts val="700"/>
+              </a:spcAft>
+            </a:pPr>
+            <a:r>
+              <a:rPr sz="1500" b="1">
+                <a:solidFill>
+                  <a:srgbClr val="C9A227"/>
+                </a:solidFill>
+                <a:latin typeface="Calibri"/>
+              </a:rPr>
+              <a:t>●  </a:t>
+            </a:r>
+            <a:r>
+              <a:rPr sz="1500" b="0">
+                <a:solidFill>
+                  <a:srgbClr val="1F2937"/>
+                </a:solidFill>
+                <a:latin typeface="Calibri"/>
+              </a:rPr>
+              <a:t>Tekshiruv shart</a:t>
+            </a:r>
+          </a:p>
+        </p:txBody>
+      </p:sp>
+      <p:sp>
+        <p:nvSpPr>
+          <p:cNvPr id="13" name="TextBox 12"/>
+          <p:cNvSpPr txBox="1"/>
+          <p:nvPr/>
+        </p:nvSpPr>
+        <p:spPr>
+          <a:xfrm>
+            <a:off x="5440680" y="5486400"/>
+            <a:ext cx="6110935" cy="365760"/>
+          </a:xfrm>
+          <a:prstGeom prst="rect">
+            <a:avLst/>
+          </a:prstGeom>
+          <a:noFill/>
+        </p:spPr>
+        <p:txBody>
+          <a:bodyPr wrap="square">
+            <a:spAutoFit/>
+          </a:bodyPr>
+          <a:lstStyle/>
+          <a:p>
+            <a:r>
+              <a:rPr sz="1200" b="0">
+                <a:solidFill>
+                  <a:srgbClr val="6B7280"/>
+                </a:solidFill>
+                <a:latin typeface="Calibri"/>
+              </a:rPr>
+              <a:t>Tahlil turlari</a:t>
+            </a:r>
+          </a:p>
+        </p:txBody>
+      </p:sp>
+      <p:sp>
+        <p:nvSpPr>
+          <p:cNvPr id="14" name="TextBox 13"/>
           <p:cNvSpPr txBox="1"/>
           <p:nvPr/>
         </p:nvSpPr>
@@ -10964,7 +13691,7 @@
         <p:spPr>
           <a:xfrm>
             <a:off x="640080" y="1417320"/>
-            <a:ext cx="10911535" cy="4480560"/>
+            <a:ext cx="4572000" cy="4480560"/>
           </a:xfrm>
           <a:prstGeom prst="rect">
             <a:avLst/>
@@ -10979,48 +13706,64 @@
           <a:p>
             <a:pPr>
               <a:spcAft>
-                <a:spcPts val="1200"/>
+                <a:spcPts val="800"/>
               </a:spcAft>
             </a:pPr>
             <a:r>
-              <a:rPr sz="2200">
+              <a:rPr sz="1600">
                 <a:solidFill>
                   <a:srgbClr val="1F2937"/>
                 </a:solidFill>
                 <a:latin typeface="Calibri"/>
               </a:rPr>
-              <a:t>▸  Uchuvchi zaharlar (13): sinil kislotasi va uning birikmalari; metil, etil, propil, butil, amil, izoamil spirtlari; formaldegid; xloroform; xloralgidrat; to‘rt xlor uglerod; dixloretan; fenol va krezollar.</a:t>
+              <a:t>▸  Uchuvchi zaharlar (13): sinil kislotasi va uning birikmalari; metil, etil, propil, butil, amil, izoamil spirtlari.</a:t>
             </a:r>
           </a:p>
           <a:p>
             <a:pPr>
               <a:spcAft>
-                <a:spcPts val="1200"/>
+                <a:spcPts val="800"/>
               </a:spcAft>
             </a:pPr>
             <a:r>
-              <a:rPr sz="2200">
+              <a:rPr sz="1600">
                 <a:solidFill>
                   <a:srgbClr val="1F2937"/>
                 </a:solidFill>
                 <a:latin typeface="Calibri"/>
               </a:rPr>
-              <a:t>▸  Metall saqlovchi zaharlar (jami 13): bariy, marganets, xrom, sink, talliy, qo‘rg‘oshin, mis, simob, vismut, kadmiy, kumush, margimush va surma tuzlari.</a:t>
+              <a:t>▸  Formaldegid; xloroform; xloralgidrat; to‘rt xlor uglerod; dixloretan; fenol va krezollar.</a:t>
             </a:r>
           </a:p>
           <a:p>
             <a:pPr>
               <a:spcAft>
-                <a:spcPts val="1200"/>
+                <a:spcPts val="800"/>
               </a:spcAft>
             </a:pPr>
             <a:r>
-              <a:rPr sz="2200">
+              <a:rPr sz="1600">
                 <a:solidFill>
                   <a:srgbClr val="1F2937"/>
                 </a:solidFill>
                 <a:latin typeface="Calibri"/>
               </a:rPr>
+              <a:t>▸  Metall saqlovchi zaharlar (jami 13): bariy, marganets, xrom, sink, talliy, qo‘rg‘oshin, mis, simob, vismut, kadmiy, kumush, margimush va surma tuzlari.</a:t>
+            </a:r>
+          </a:p>
+          <a:p>
+            <a:pPr>
+              <a:spcAft>
+                <a:spcPts val="800"/>
+              </a:spcAft>
+            </a:pPr>
+            <a:r>
+              <a:rPr sz="1600">
+                <a:solidFill>
+                  <a:srgbClr val="1F2937"/>
+                </a:solidFill>
+                <a:latin typeface="Calibri"/>
+              </a:rPr>
               <a:t>▸  O‘zSSV ning 551-sonli buyrug‘ida 13 uchuvchi moddaga to‘liq ekspertizada tekshiruv olib borish zarurligi ko‘rsatilgan; ular haydash usullari bilan ajratiladi.</a:t>
             </a:r>
           </a:p>
@@ -11028,7 +13771,444 @@
       </p:sp>
       <p:sp>
         <p:nvSpPr>
-          <p:cNvPr id="9" name="TextBox 8"/>
+          <p:cNvPr id="9" name="Rounded Rectangle 8"/>
+          <p:cNvSpPr/>
+          <p:nvPr/>
+        </p:nvSpPr>
+        <p:spPr>
+          <a:xfrm>
+            <a:off x="5440680" y="2788920"/>
+            <a:ext cx="2011680" cy="1280160"/>
+          </a:xfrm>
+          <a:prstGeom prst="roundRect">
+            <a:avLst/>
+          </a:prstGeom>
+          <a:solidFill>
+            <a:srgbClr val="0B1F3A"/>
+          </a:solidFill>
+          <a:ln>
+            <a:noFill/>
+          </a:ln>
+          <a:effectLst/>
+        </p:spPr>
+        <p:style>
+          <a:lnRef idx="1">
+            <a:schemeClr val="accent1"/>
+          </a:lnRef>
+          <a:fillRef idx="3">
+            <a:schemeClr val="accent1"/>
+          </a:fillRef>
+          <a:effectRef idx="2">
+            <a:schemeClr val="accent1"/>
+          </a:effectRef>
+          <a:fontRef idx="minor">
+            <a:schemeClr val="lt1"/>
+          </a:fontRef>
+        </p:style>
+        <p:txBody>
+          <a:bodyPr rtlCol="0" anchor="ctr" wrap="square" tIns="36576" bIns="36576"/>
+          <a:lstStyle/>
+          <a:p>
+            <a:pPr algn="ctr">
+              <a:spcAft>
+                <a:spcPts val="200"/>
+              </a:spcAft>
+            </a:pPr>
+            <a:r>
+              <a:rPr sz="1800" b="1">
+                <a:solidFill>
+                  <a:srgbClr val="FFFFFF"/>
+                </a:solidFill>
+                <a:latin typeface="Calibri"/>
+              </a:rPr>
+              <a:t>Uchuvchi va metall zaharlar</a:t>
+            </a:r>
+          </a:p>
+        </p:txBody>
+      </p:sp>
+      <p:cxnSp>
+        <p:nvCxnSpPr>
+          <p:cNvPr id="10" name="Connector 9"/>
+          <p:cNvCxnSpPr/>
+          <p:nvPr/>
+        </p:nvCxnSpPr>
+        <p:spPr>
+          <a:xfrm>
+            <a:off x="7452360" y="3429000"/>
+            <a:ext cx="160020" cy="0"/>
+          </a:xfrm>
+          <a:prstGeom prst="line">
+            <a:avLst/>
+          </a:prstGeom>
+          <a:ln w="25400">
+            <a:solidFill>
+              <a:srgbClr val="C9A227"/>
+            </a:solidFill>
+          </a:ln>
+        </p:spPr>
+        <p:style>
+          <a:lnRef idx="2">
+            <a:schemeClr val="accent1"/>
+          </a:lnRef>
+          <a:fillRef idx="0">
+            <a:schemeClr val="accent1"/>
+          </a:fillRef>
+          <a:effectRef idx="1">
+            <a:schemeClr val="accent1"/>
+          </a:effectRef>
+          <a:fontRef idx="minor">
+            <a:schemeClr val="tx1"/>
+          </a:fontRef>
+        </p:style>
+      </p:cxnSp>
+      <p:cxnSp>
+        <p:nvCxnSpPr>
+          <p:cNvPr id="11" name="Connector 10"/>
+          <p:cNvCxnSpPr/>
+          <p:nvPr/>
+        </p:nvCxnSpPr>
+        <p:spPr>
+          <a:xfrm>
+            <a:off x="7612380" y="2404872"/>
+            <a:ext cx="0" cy="2048256"/>
+          </a:xfrm>
+          <a:prstGeom prst="line">
+            <a:avLst/>
+          </a:prstGeom>
+          <a:ln w="25400">
+            <a:solidFill>
+              <a:srgbClr val="C9A227"/>
+            </a:solidFill>
+          </a:ln>
+        </p:spPr>
+        <p:style>
+          <a:lnRef idx="2">
+            <a:schemeClr val="accent1"/>
+          </a:lnRef>
+          <a:fillRef idx="0">
+            <a:schemeClr val="accent1"/>
+          </a:fillRef>
+          <a:effectRef idx="1">
+            <a:schemeClr val="accent1"/>
+          </a:effectRef>
+          <a:fontRef idx="minor">
+            <a:schemeClr val="tx1"/>
+          </a:fontRef>
+        </p:style>
+      </p:cxnSp>
+      <p:cxnSp>
+        <p:nvCxnSpPr>
+          <p:cNvPr id="12" name="Connector 11"/>
+          <p:cNvCxnSpPr/>
+          <p:nvPr/>
+        </p:nvCxnSpPr>
+        <p:spPr>
+          <a:xfrm>
+            <a:off x="7612380" y="2404872"/>
+            <a:ext cx="160020" cy="0"/>
+          </a:xfrm>
+          <a:prstGeom prst="line">
+            <a:avLst/>
+          </a:prstGeom>
+          <a:ln w="25400">
+            <a:solidFill>
+              <a:srgbClr val="C9A227"/>
+            </a:solidFill>
+          </a:ln>
+        </p:spPr>
+        <p:style>
+          <a:lnRef idx="2">
+            <a:schemeClr val="accent1"/>
+          </a:lnRef>
+          <a:fillRef idx="0">
+            <a:schemeClr val="accent1"/>
+          </a:fillRef>
+          <a:effectRef idx="1">
+            <a:schemeClr val="accent1"/>
+          </a:effectRef>
+          <a:fontRef idx="minor">
+            <a:schemeClr val="tx1"/>
+          </a:fontRef>
+        </p:style>
+      </p:cxnSp>
+      <p:sp>
+        <p:nvSpPr>
+          <p:cNvPr id="13" name="Rounded Rectangle 12"/>
+          <p:cNvSpPr/>
+          <p:nvPr/>
+        </p:nvSpPr>
+        <p:spPr>
+          <a:xfrm>
+            <a:off x="7772400" y="1417320"/>
+            <a:ext cx="3779215" cy="1975104"/>
+          </a:xfrm>
+          <a:prstGeom prst="roundRect">
+            <a:avLst>
+              <a:gd name="adj" fmla="val 8000"/>
+            </a:avLst>
+          </a:prstGeom>
+          <a:solidFill>
+            <a:srgbClr val="FFFFFF"/>
+          </a:solidFill>
+          <a:ln w="15875">
+            <a:solidFill>
+              <a:srgbClr val="C9A227"/>
+            </a:solidFill>
+          </a:ln>
+          <a:effectLst/>
+        </p:spPr>
+        <p:style>
+          <a:lnRef idx="1">
+            <a:schemeClr val="accent1"/>
+          </a:lnRef>
+          <a:fillRef idx="3">
+            <a:schemeClr val="accent1"/>
+          </a:fillRef>
+          <a:effectRef idx="2">
+            <a:schemeClr val="accent1"/>
+          </a:effectRef>
+          <a:fontRef idx="minor">
+            <a:schemeClr val="lt1"/>
+          </a:fontRef>
+        </p:style>
+        <p:txBody>
+          <a:bodyPr rtlCol="0" anchor="ctr"/>
+          <a:lstStyle/>
+          <a:p>
+            <a:pPr algn="ctr"/>
+          </a:p>
+        </p:txBody>
+      </p:sp>
+      <p:sp>
+        <p:nvSpPr>
+          <p:cNvPr id="14" name="TextBox 13"/>
+          <p:cNvSpPr txBox="1"/>
+          <p:nvPr/>
+        </p:nvSpPr>
+        <p:spPr>
+          <a:xfrm>
+            <a:off x="7772400" y="1417320"/>
+            <a:ext cx="3779215" cy="1975104"/>
+          </a:xfrm>
+          <a:prstGeom prst="rect">
+            <a:avLst/>
+          </a:prstGeom>
+          <a:noFill/>
+        </p:spPr>
+        <p:txBody>
+          <a:bodyPr wrap="square" anchor="ctr" tIns="36576" bIns="36576">
+            <a:spAutoFit/>
+          </a:bodyPr>
+          <a:lstStyle/>
+          <a:p>
+            <a:pPr algn="l">
+              <a:spcAft>
+                <a:spcPts val="0"/>
+              </a:spcAft>
+            </a:pPr>
+            <a:r>
+              <a:rPr sz="1400" b="1">
+                <a:solidFill>
+                  <a:srgbClr val="0B1F3A"/>
+                </a:solidFill>
+                <a:latin typeface="Calibri"/>
+              </a:rPr>
+              <a:t>Uchuvchi zaharlar (13)</a:t>
+            </a:r>
+          </a:p>
+          <a:p>
+            <a:pPr algn="l">
+              <a:spcAft>
+                <a:spcPts val="0"/>
+              </a:spcAft>
+            </a:pPr>
+            <a:r>
+              <a:rPr sz="1200" b="0">
+                <a:solidFill>
+                  <a:srgbClr val="1F2937"/>
+                </a:solidFill>
+                <a:latin typeface="Calibri"/>
+              </a:rPr>
+              <a:t>Sinil kislota, spirtlar  ·  Formaldegid, xloroform  ·  Fenol va krezollar</a:t>
+            </a:r>
+          </a:p>
+        </p:txBody>
+      </p:sp>
+      <p:cxnSp>
+        <p:nvCxnSpPr>
+          <p:cNvPr id="15" name="Connector 14"/>
+          <p:cNvCxnSpPr/>
+          <p:nvPr/>
+        </p:nvCxnSpPr>
+        <p:spPr>
+          <a:xfrm>
+            <a:off x="7612380" y="4453128"/>
+            <a:ext cx="160020" cy="0"/>
+          </a:xfrm>
+          <a:prstGeom prst="line">
+            <a:avLst/>
+          </a:prstGeom>
+          <a:ln w="25400">
+            <a:solidFill>
+              <a:srgbClr val="C9A227"/>
+            </a:solidFill>
+          </a:ln>
+        </p:spPr>
+        <p:style>
+          <a:lnRef idx="2">
+            <a:schemeClr val="accent1"/>
+          </a:lnRef>
+          <a:fillRef idx="0">
+            <a:schemeClr val="accent1"/>
+          </a:fillRef>
+          <a:effectRef idx="1">
+            <a:schemeClr val="accent1"/>
+          </a:effectRef>
+          <a:fontRef idx="minor">
+            <a:schemeClr val="tx1"/>
+          </a:fontRef>
+        </p:style>
+      </p:cxnSp>
+      <p:sp>
+        <p:nvSpPr>
+          <p:cNvPr id="16" name="Rounded Rectangle 15"/>
+          <p:cNvSpPr/>
+          <p:nvPr/>
+        </p:nvSpPr>
+        <p:spPr>
+          <a:xfrm>
+            <a:off x="7772400" y="3465576"/>
+            <a:ext cx="3779215" cy="1975104"/>
+          </a:xfrm>
+          <a:prstGeom prst="roundRect">
+            <a:avLst>
+              <a:gd name="adj" fmla="val 8000"/>
+            </a:avLst>
+          </a:prstGeom>
+          <a:solidFill>
+            <a:srgbClr val="FFFFFF"/>
+          </a:solidFill>
+          <a:ln w="15875">
+            <a:solidFill>
+              <a:srgbClr val="C9A227"/>
+            </a:solidFill>
+          </a:ln>
+          <a:effectLst/>
+        </p:spPr>
+        <p:style>
+          <a:lnRef idx="1">
+            <a:schemeClr val="accent1"/>
+          </a:lnRef>
+          <a:fillRef idx="3">
+            <a:schemeClr val="accent1"/>
+          </a:fillRef>
+          <a:effectRef idx="2">
+            <a:schemeClr val="accent1"/>
+          </a:effectRef>
+          <a:fontRef idx="minor">
+            <a:schemeClr val="lt1"/>
+          </a:fontRef>
+        </p:style>
+        <p:txBody>
+          <a:bodyPr rtlCol="0" anchor="ctr"/>
+          <a:lstStyle/>
+          <a:p>
+            <a:pPr algn="ctr"/>
+          </a:p>
+        </p:txBody>
+      </p:sp>
+      <p:sp>
+        <p:nvSpPr>
+          <p:cNvPr id="17" name="TextBox 16"/>
+          <p:cNvSpPr txBox="1"/>
+          <p:nvPr/>
+        </p:nvSpPr>
+        <p:spPr>
+          <a:xfrm>
+            <a:off x="7772400" y="3465576"/>
+            <a:ext cx="3779215" cy="1975104"/>
+          </a:xfrm>
+          <a:prstGeom prst="rect">
+            <a:avLst/>
+          </a:prstGeom>
+          <a:noFill/>
+        </p:spPr>
+        <p:txBody>
+          <a:bodyPr wrap="square" anchor="ctr" tIns="36576" bIns="36576">
+            <a:spAutoFit/>
+          </a:bodyPr>
+          <a:lstStyle/>
+          <a:p>
+            <a:pPr algn="l">
+              <a:spcAft>
+                <a:spcPts val="0"/>
+              </a:spcAft>
+            </a:pPr>
+            <a:r>
+              <a:rPr sz="1400" b="1">
+                <a:solidFill>
+                  <a:srgbClr val="0B1F3A"/>
+                </a:solidFill>
+                <a:latin typeface="Calibri"/>
+              </a:rPr>
+              <a:t>Metall zaharlar (13)</a:t>
+            </a:r>
+          </a:p>
+          <a:p>
+            <a:pPr algn="l">
+              <a:spcAft>
+                <a:spcPts val="0"/>
+              </a:spcAft>
+            </a:pPr>
+            <a:r>
+              <a:rPr sz="1200" b="0">
+                <a:solidFill>
+                  <a:srgbClr val="1F2937"/>
+                </a:solidFill>
+                <a:latin typeface="Calibri"/>
+              </a:rPr>
+              <a:t>Bariy, marganets, xrom, sink  ·  Talliy, qo‘rg‘oshin, mis, simob  ·  Kumush, margimush, surma</a:t>
+            </a:r>
+          </a:p>
+        </p:txBody>
+      </p:sp>
+      <p:sp>
+        <p:nvSpPr>
+          <p:cNvPr id="18" name="TextBox 17"/>
+          <p:cNvSpPr txBox="1"/>
+          <p:nvPr/>
+        </p:nvSpPr>
+        <p:spPr>
+          <a:xfrm>
+            <a:off x="5440680" y="5486400"/>
+            <a:ext cx="6110935" cy="365760"/>
+          </a:xfrm>
+          <a:prstGeom prst="rect">
+            <a:avLst/>
+          </a:prstGeom>
+          <a:noFill/>
+        </p:spPr>
+        <p:txBody>
+          <a:bodyPr wrap="square">
+            <a:spAutoFit/>
+          </a:bodyPr>
+          <a:lstStyle/>
+          <a:p>
+            <a:r>
+              <a:rPr sz="1200" b="0">
+                <a:solidFill>
+                  <a:srgbClr val="6B7280"/>
+                </a:solidFill>
+                <a:latin typeface="Calibri"/>
+              </a:rPr>
+              <a:t>To‘liq tahlil: 13 + 13</a:t>
+            </a:r>
+          </a:p>
+        </p:txBody>
+      </p:sp>
+      <p:sp>
+        <p:nvSpPr>
+          <p:cNvPr id="19" name="TextBox 18"/>
           <p:cNvSpPr txBox="1"/>
           <p:nvPr/>
         </p:nvSpPr>
@@ -11379,7 +14559,23 @@
                 </a:solidFill>
                 <a:latin typeface="Calibri"/>
               </a:rPr>
-              <a:t>▸  Ro‘yxatning davomi: morfin, kodein, dionin, geroin, gidrokodon, papaverin, promedol, strixnin, atropin, giostsiamin, skopolamin, kokain, paxikarpin, anabazin, nikotin.</a:t>
+              <a:t>▸  Ro‘yxatning davomi: morfin, kodein, dionin, geroin, gidrokodon, papaverin, promedol.</a:t>
+            </a:r>
+          </a:p>
+          <a:p>
+            <a:pPr>
+              <a:spcAft>
+                <a:spcPts val="1200"/>
+              </a:spcAft>
+            </a:pPr>
+            <a:r>
+              <a:rPr sz="2200">
+                <a:solidFill>
+                  <a:srgbClr val="1F2937"/>
+                </a:solidFill>
+                <a:latin typeface="Calibri"/>
+              </a:rPr>
+              <a:t>▸  Strixnin, atropin, giostsiamin, skopolamin, kokain, paxikarpin, anabazin, nikotin.</a:t>
             </a:r>
           </a:p>
           <a:p>
@@ -11721,7 +14917,23 @@
                 </a:solidFill>
                 <a:latin typeface="Calibri"/>
               </a:rPr>
-              <a:t>▸  Organik erituvchi quyib qo‘yish yo‘li bilan ajratib olinadiganlar: karbofos, metafos, metiletiltiofos, metilnitrofos, trixlormetafos, fozalon, butifos, xlorofos, ftalofos, oktametil va sevin.</a:t>
+              <a:t>▸  Organik erituvchi quyib qo‘yish yo‘li bilan ajratib olinadiganlar: karbofos, metafos, metiletiltiofos.</a:t>
+            </a:r>
+          </a:p>
+          <a:p>
+            <a:pPr>
+              <a:spcAft>
+                <a:spcPts val="1200"/>
+              </a:spcAft>
+            </a:pPr>
+            <a:r>
+              <a:rPr sz="2200">
+                <a:solidFill>
+                  <a:srgbClr val="1F2937"/>
+                </a:solidFill>
+                <a:latin typeface="Calibri"/>
+              </a:rPr>
+              <a:t>▸  Metilnitrofos, trixlormetafos, fozalon, butifos, xlorofos, ftalofos, oktametil va sevin.</a:t>
             </a:r>
           </a:p>
           <a:p>
@@ -13534,7 +16746,7 @@
         <p:spPr>
           <a:xfrm>
             <a:off x="640080" y="1417320"/>
-            <a:ext cx="10911535" cy="4480560"/>
+            <a:ext cx="4572000" cy="4480560"/>
           </a:xfrm>
           <a:prstGeom prst="rect">
             <a:avLst/>
@@ -13549,11 +16761,11 @@
           <a:p>
             <a:pPr>
               <a:spcAft>
-                <a:spcPts val="1200"/>
+                <a:spcPts val="800"/>
               </a:spcAft>
             </a:pPr>
             <a:r>
-              <a:rPr sz="2200">
+              <a:rPr sz="1600">
                 <a:solidFill>
                   <a:srgbClr val="1F2937"/>
                 </a:solidFill>
@@ -13565,48 +16777,64 @@
           <a:p>
             <a:pPr>
               <a:spcAft>
-                <a:spcPts val="1200"/>
+                <a:spcPts val="800"/>
               </a:spcAft>
             </a:pPr>
             <a:r>
-              <a:rPr sz="2200">
+              <a:rPr sz="1600">
                 <a:solidFill>
                   <a:srgbClr val="1F2937"/>
                 </a:solidFill>
                 <a:latin typeface="Calibri"/>
               </a:rPr>
-              <a:t>▸  Qayta ekstraksiya: pH o‘zgarishi bilan eruvchanlik o‘zgaradi; kislota xossali moddalar ishqoriy sharoitda suvda, alkaloidlar esa organik erituvchida yaxshi eriydi.</a:t>
+              <a:t>▸  Qayta ekstraksiya: pH o‘zgarishi bilan eruvchanlik o‘zgaradi.</a:t>
             </a:r>
           </a:p>
           <a:p>
             <a:pPr>
               <a:spcAft>
-                <a:spcPts val="1200"/>
+                <a:spcPts val="800"/>
               </a:spcAft>
             </a:pPr>
             <a:r>
-              <a:rPr sz="2200">
+              <a:rPr sz="1600">
                 <a:solidFill>
                   <a:srgbClr val="1F2937"/>
                 </a:solidFill>
                 <a:latin typeface="Calibri"/>
               </a:rPr>
-              <a:t>▸  Sulfirlash — yog‘ va lipidga boy ekstraktlarda konsentrlangan sulfat kislotaga chidamli moddalar (masalan, barbituratlar) uchun.</a:t>
+              <a:t>▸  Kislota xossali moddalar ishqoriy sharoitda suvda, alkaloidlar esa organik erituvchida yaxshi eriydi.</a:t>
             </a:r>
           </a:p>
           <a:p>
             <a:pPr>
               <a:spcAft>
-                <a:spcPts val="1200"/>
+                <a:spcPts val="800"/>
               </a:spcAft>
             </a:pPr>
             <a:r>
-              <a:rPr sz="2200">
+              <a:rPr sz="1600">
                 <a:solidFill>
                   <a:srgbClr val="1F2937"/>
                 </a:solidFill>
                 <a:latin typeface="Calibri"/>
               </a:rPr>
+              <a:t>▸  Sulfirlash — yog‘ va lipidga boy ekstraktlarda konsentrlangan sulfat kislotaga chidamli moddalar (masalan, barbituratlar) uchun.</a:t>
+            </a:r>
+          </a:p>
+          <a:p>
+            <a:pPr>
+              <a:spcAft>
+                <a:spcPts val="800"/>
+              </a:spcAft>
+            </a:pPr>
+            <a:r>
+              <a:rPr sz="1600">
+                <a:solidFill>
+                  <a:srgbClr val="1F2937"/>
+                </a:solidFill>
+                <a:latin typeface="Calibri"/>
+              </a:rPr>
               <a:t>▸  Xromatografik usullar (yupqa qavatli, gaz-suyuqlik) kengroq qo‘llaniladi; yog‘ va mumsimon moddalar aseton, atsetonitrilda sovuq sharoitda cho‘ktiriladi.</a:t>
             </a:r>
           </a:p>
@@ -13614,7 +16842,841 @@
       </p:sp>
       <p:sp>
         <p:nvSpPr>
-          <p:cNvPr id="9" name="TextBox 8"/>
+          <p:cNvPr id="9" name="Rounded Rectangle 8"/>
+          <p:cNvSpPr/>
+          <p:nvPr/>
+        </p:nvSpPr>
+        <p:spPr>
+          <a:xfrm>
+            <a:off x="5440680" y="1417320"/>
+            <a:ext cx="2973171" cy="1255776"/>
+          </a:xfrm>
+          <a:prstGeom prst="roundRect">
+            <a:avLst>
+              <a:gd name="adj" fmla="val 8000"/>
+            </a:avLst>
+          </a:prstGeom>
+          <a:solidFill>
+            <a:srgbClr val="FFFFFF"/>
+          </a:solidFill>
+          <a:ln w="15875">
+            <a:solidFill>
+              <a:srgbClr val="E8EEF6"/>
+            </a:solidFill>
+          </a:ln>
+          <a:effectLst/>
+        </p:spPr>
+        <p:style>
+          <a:lnRef idx="1">
+            <a:schemeClr val="accent1"/>
+          </a:lnRef>
+          <a:fillRef idx="3">
+            <a:schemeClr val="accent1"/>
+          </a:fillRef>
+          <a:effectRef idx="2">
+            <a:schemeClr val="accent1"/>
+          </a:effectRef>
+          <a:fontRef idx="minor">
+            <a:schemeClr val="lt1"/>
+          </a:fontRef>
+        </p:style>
+        <p:txBody>
+          <a:bodyPr rtlCol="0" anchor="ctr"/>
+          <a:lstStyle/>
+          <a:p>
+            <a:pPr algn="ctr"/>
+          </a:p>
+        </p:txBody>
+      </p:sp>
+      <p:sp>
+        <p:nvSpPr>
+          <p:cNvPr id="10" name="Oval 9"/>
+          <p:cNvSpPr/>
+          <p:nvPr/>
+        </p:nvSpPr>
+        <p:spPr>
+          <a:xfrm>
+            <a:off x="5550408" y="1816608"/>
+            <a:ext cx="457200" cy="457200"/>
+          </a:xfrm>
+          <a:prstGeom prst="ellipse">
+            <a:avLst/>
+          </a:prstGeom>
+          <a:solidFill>
+            <a:srgbClr val="0B1F3A"/>
+          </a:solidFill>
+          <a:ln>
+            <a:noFill/>
+          </a:ln>
+          <a:effectLst/>
+        </p:spPr>
+        <p:style>
+          <a:lnRef idx="1">
+            <a:schemeClr val="accent1"/>
+          </a:lnRef>
+          <a:fillRef idx="3">
+            <a:schemeClr val="accent1"/>
+          </a:fillRef>
+          <a:effectRef idx="2">
+            <a:schemeClr val="accent1"/>
+          </a:effectRef>
+          <a:fontRef idx="minor">
+            <a:schemeClr val="lt1"/>
+          </a:fontRef>
+        </p:style>
+        <p:txBody>
+          <a:bodyPr rtlCol="0" anchor="ctr" wrap="square" lIns="0" rIns="0" tIns="36576" bIns="36576"/>
+          <a:lstStyle/>
+          <a:p>
+            <a:pPr algn="ctr">
+              <a:spcAft>
+                <a:spcPts val="200"/>
+              </a:spcAft>
+            </a:pPr>
+            <a:r>
+              <a:rPr sz="1600" b="1">
+                <a:solidFill>
+                  <a:srgbClr val="FFFFFF"/>
+                </a:solidFill>
+                <a:latin typeface="Calibri"/>
+              </a:rPr>
+              <a:t>1</a:t>
+            </a:r>
+          </a:p>
+        </p:txBody>
+      </p:sp>
+      <p:sp>
+        <p:nvSpPr>
+          <p:cNvPr id="11" name="TextBox 10"/>
+          <p:cNvSpPr txBox="1"/>
+          <p:nvPr/>
+        </p:nvSpPr>
+        <p:spPr>
+          <a:xfrm>
+            <a:off x="6080760" y="1417320"/>
+            <a:ext cx="2259939" cy="1255776"/>
+          </a:xfrm>
+          <a:prstGeom prst="rect">
+            <a:avLst/>
+          </a:prstGeom>
+          <a:noFill/>
+        </p:spPr>
+        <p:txBody>
+          <a:bodyPr wrap="square" anchor="ctr" lIns="18288" rIns="18288" tIns="36576" bIns="36576">
+            <a:spAutoFit/>
+          </a:bodyPr>
+          <a:lstStyle/>
+          <a:p>
+            <a:pPr algn="l">
+              <a:spcAft>
+                <a:spcPts val="200"/>
+              </a:spcAft>
+            </a:pPr>
+            <a:r>
+              <a:rPr sz="1600" b="1">
+                <a:solidFill>
+                  <a:srgbClr val="0B1F3A"/>
+                </a:solidFill>
+                <a:latin typeface="Calibri"/>
+              </a:rPr>
+              <a:t>Sovunlash</a:t>
+            </a:r>
+          </a:p>
+          <a:p>
+            <a:pPr algn="l">
+              <a:spcAft>
+                <a:spcPts val="200"/>
+              </a:spcAft>
+            </a:pPr>
+            <a:r>
+              <a:rPr sz="1400" b="0">
+                <a:solidFill>
+                  <a:srgbClr val="1F2937"/>
+                </a:solidFill>
+                <a:latin typeface="Calibri"/>
+              </a:rPr>
+              <a:t>Gidrolizga chidamli birikmalar</a:t>
+            </a:r>
+          </a:p>
+        </p:txBody>
+      </p:sp>
+      <p:sp>
+        <p:nvSpPr>
+          <p:cNvPr id="12" name="Rounded Rectangle 11"/>
+          <p:cNvSpPr/>
+          <p:nvPr/>
+        </p:nvSpPr>
+        <p:spPr>
+          <a:xfrm>
+            <a:off x="8578443" y="1417320"/>
+            <a:ext cx="2973171" cy="1255776"/>
+          </a:xfrm>
+          <a:prstGeom prst="roundRect">
+            <a:avLst>
+              <a:gd name="adj" fmla="val 8000"/>
+            </a:avLst>
+          </a:prstGeom>
+          <a:solidFill>
+            <a:srgbClr val="FFFFFF"/>
+          </a:solidFill>
+          <a:ln w="15875">
+            <a:solidFill>
+              <a:srgbClr val="E8EEF6"/>
+            </a:solidFill>
+          </a:ln>
+          <a:effectLst/>
+        </p:spPr>
+        <p:style>
+          <a:lnRef idx="1">
+            <a:schemeClr val="accent1"/>
+          </a:lnRef>
+          <a:fillRef idx="3">
+            <a:schemeClr val="accent1"/>
+          </a:fillRef>
+          <a:effectRef idx="2">
+            <a:schemeClr val="accent1"/>
+          </a:effectRef>
+          <a:fontRef idx="minor">
+            <a:schemeClr val="lt1"/>
+          </a:fontRef>
+        </p:style>
+        <p:txBody>
+          <a:bodyPr rtlCol="0" anchor="ctr"/>
+          <a:lstStyle/>
+          <a:p>
+            <a:pPr algn="ctr"/>
+          </a:p>
+        </p:txBody>
+      </p:sp>
+      <p:sp>
+        <p:nvSpPr>
+          <p:cNvPr id="13" name="Oval 12"/>
+          <p:cNvSpPr/>
+          <p:nvPr/>
+        </p:nvSpPr>
+        <p:spPr>
+          <a:xfrm>
+            <a:off x="8688171" y="1816608"/>
+            <a:ext cx="457200" cy="457200"/>
+          </a:xfrm>
+          <a:prstGeom prst="ellipse">
+            <a:avLst/>
+          </a:prstGeom>
+          <a:solidFill>
+            <a:srgbClr val="0B1F3A"/>
+          </a:solidFill>
+          <a:ln>
+            <a:noFill/>
+          </a:ln>
+          <a:effectLst/>
+        </p:spPr>
+        <p:style>
+          <a:lnRef idx="1">
+            <a:schemeClr val="accent1"/>
+          </a:lnRef>
+          <a:fillRef idx="3">
+            <a:schemeClr val="accent1"/>
+          </a:fillRef>
+          <a:effectRef idx="2">
+            <a:schemeClr val="accent1"/>
+          </a:effectRef>
+          <a:fontRef idx="minor">
+            <a:schemeClr val="lt1"/>
+          </a:fontRef>
+        </p:style>
+        <p:txBody>
+          <a:bodyPr rtlCol="0" anchor="ctr" wrap="square" lIns="0" rIns="0" tIns="36576" bIns="36576"/>
+          <a:lstStyle/>
+          <a:p>
+            <a:pPr algn="ctr">
+              <a:spcAft>
+                <a:spcPts val="200"/>
+              </a:spcAft>
+            </a:pPr>
+            <a:r>
+              <a:rPr sz="1600" b="1">
+                <a:solidFill>
+                  <a:srgbClr val="FFFFFF"/>
+                </a:solidFill>
+                <a:latin typeface="Calibri"/>
+              </a:rPr>
+              <a:t>2</a:t>
+            </a:r>
+          </a:p>
+        </p:txBody>
+      </p:sp>
+      <p:sp>
+        <p:nvSpPr>
+          <p:cNvPr id="14" name="TextBox 13"/>
+          <p:cNvSpPr txBox="1"/>
+          <p:nvPr/>
+        </p:nvSpPr>
+        <p:spPr>
+          <a:xfrm>
+            <a:off x="9218523" y="1417320"/>
+            <a:ext cx="2259939" cy="1255776"/>
+          </a:xfrm>
+          <a:prstGeom prst="rect">
+            <a:avLst/>
+          </a:prstGeom>
+          <a:noFill/>
+        </p:spPr>
+        <p:txBody>
+          <a:bodyPr wrap="square" anchor="ctr" lIns="18288" rIns="18288" tIns="36576" bIns="36576">
+            <a:spAutoFit/>
+          </a:bodyPr>
+          <a:lstStyle/>
+          <a:p>
+            <a:pPr algn="l">
+              <a:spcAft>
+                <a:spcPts val="200"/>
+              </a:spcAft>
+            </a:pPr>
+            <a:r>
+              <a:rPr sz="1600" b="1">
+                <a:solidFill>
+                  <a:srgbClr val="0B1F3A"/>
+                </a:solidFill>
+                <a:latin typeface="Calibri"/>
+              </a:rPr>
+              <a:t>Qayta ekstraksiya</a:t>
+            </a:r>
+          </a:p>
+          <a:p>
+            <a:pPr algn="l">
+              <a:spcAft>
+                <a:spcPts val="200"/>
+              </a:spcAft>
+            </a:pPr>
+            <a:r>
+              <a:rPr sz="1400" b="0">
+                <a:solidFill>
+                  <a:srgbClr val="1F2937"/>
+                </a:solidFill>
+                <a:latin typeface="Calibri"/>
+              </a:rPr>
+              <a:t>pH o‘zgarishi bilan eruvchanlik</a:t>
+            </a:r>
+          </a:p>
+        </p:txBody>
+      </p:sp>
+      <p:sp>
+        <p:nvSpPr>
+          <p:cNvPr id="15" name="Rounded Rectangle 14"/>
+          <p:cNvSpPr/>
+          <p:nvPr/>
+        </p:nvSpPr>
+        <p:spPr>
+          <a:xfrm>
+            <a:off x="5440680" y="2801112"/>
+            <a:ext cx="2973171" cy="1255776"/>
+          </a:xfrm>
+          <a:prstGeom prst="roundRect">
+            <a:avLst>
+              <a:gd name="adj" fmla="val 8000"/>
+            </a:avLst>
+          </a:prstGeom>
+          <a:solidFill>
+            <a:srgbClr val="FFFFFF"/>
+          </a:solidFill>
+          <a:ln w="15875">
+            <a:solidFill>
+              <a:srgbClr val="E8EEF6"/>
+            </a:solidFill>
+          </a:ln>
+          <a:effectLst/>
+        </p:spPr>
+        <p:style>
+          <a:lnRef idx="1">
+            <a:schemeClr val="accent1"/>
+          </a:lnRef>
+          <a:fillRef idx="3">
+            <a:schemeClr val="accent1"/>
+          </a:fillRef>
+          <a:effectRef idx="2">
+            <a:schemeClr val="accent1"/>
+          </a:effectRef>
+          <a:fontRef idx="minor">
+            <a:schemeClr val="lt1"/>
+          </a:fontRef>
+        </p:style>
+        <p:txBody>
+          <a:bodyPr rtlCol="0" anchor="ctr"/>
+          <a:lstStyle/>
+          <a:p>
+            <a:pPr algn="ctr"/>
+          </a:p>
+        </p:txBody>
+      </p:sp>
+      <p:sp>
+        <p:nvSpPr>
+          <p:cNvPr id="16" name="Oval 15"/>
+          <p:cNvSpPr/>
+          <p:nvPr/>
+        </p:nvSpPr>
+        <p:spPr>
+          <a:xfrm>
+            <a:off x="5550408" y="3200400"/>
+            <a:ext cx="457200" cy="457200"/>
+          </a:xfrm>
+          <a:prstGeom prst="ellipse">
+            <a:avLst/>
+          </a:prstGeom>
+          <a:solidFill>
+            <a:srgbClr val="0B1F3A"/>
+          </a:solidFill>
+          <a:ln>
+            <a:noFill/>
+          </a:ln>
+          <a:effectLst/>
+        </p:spPr>
+        <p:style>
+          <a:lnRef idx="1">
+            <a:schemeClr val="accent1"/>
+          </a:lnRef>
+          <a:fillRef idx="3">
+            <a:schemeClr val="accent1"/>
+          </a:fillRef>
+          <a:effectRef idx="2">
+            <a:schemeClr val="accent1"/>
+          </a:effectRef>
+          <a:fontRef idx="minor">
+            <a:schemeClr val="lt1"/>
+          </a:fontRef>
+        </p:style>
+        <p:txBody>
+          <a:bodyPr rtlCol="0" anchor="ctr" wrap="square" lIns="0" rIns="0" tIns="36576" bIns="36576"/>
+          <a:lstStyle/>
+          <a:p>
+            <a:pPr algn="ctr">
+              <a:spcAft>
+                <a:spcPts val="200"/>
+              </a:spcAft>
+            </a:pPr>
+            <a:r>
+              <a:rPr sz="1600" b="1">
+                <a:solidFill>
+                  <a:srgbClr val="FFFFFF"/>
+                </a:solidFill>
+                <a:latin typeface="Calibri"/>
+              </a:rPr>
+              <a:t>3</a:t>
+            </a:r>
+          </a:p>
+        </p:txBody>
+      </p:sp>
+      <p:sp>
+        <p:nvSpPr>
+          <p:cNvPr id="17" name="TextBox 16"/>
+          <p:cNvSpPr txBox="1"/>
+          <p:nvPr/>
+        </p:nvSpPr>
+        <p:spPr>
+          <a:xfrm>
+            <a:off x="6080760" y="2801112"/>
+            <a:ext cx="2259939" cy="1255776"/>
+          </a:xfrm>
+          <a:prstGeom prst="rect">
+            <a:avLst/>
+          </a:prstGeom>
+          <a:noFill/>
+        </p:spPr>
+        <p:txBody>
+          <a:bodyPr wrap="square" anchor="ctr" lIns="18288" rIns="18288" tIns="36576" bIns="36576">
+            <a:spAutoFit/>
+          </a:bodyPr>
+          <a:lstStyle/>
+          <a:p>
+            <a:pPr algn="l">
+              <a:spcAft>
+                <a:spcPts val="200"/>
+              </a:spcAft>
+            </a:pPr>
+            <a:r>
+              <a:rPr sz="1600" b="1">
+                <a:solidFill>
+                  <a:srgbClr val="0B1F3A"/>
+                </a:solidFill>
+                <a:latin typeface="Calibri"/>
+              </a:rPr>
+              <a:t>Sulfirlash</a:t>
+            </a:r>
+          </a:p>
+          <a:p>
+            <a:pPr algn="l">
+              <a:spcAft>
+                <a:spcPts val="200"/>
+              </a:spcAft>
+            </a:pPr>
+            <a:r>
+              <a:rPr sz="1400" b="0">
+                <a:solidFill>
+                  <a:srgbClr val="1F2937"/>
+                </a:solidFill>
+                <a:latin typeface="Calibri"/>
+              </a:rPr>
+              <a:t>Barbituratlar kabi chidamli moddalar</a:t>
+            </a:r>
+          </a:p>
+        </p:txBody>
+      </p:sp>
+      <p:sp>
+        <p:nvSpPr>
+          <p:cNvPr id="18" name="Rounded Rectangle 17"/>
+          <p:cNvSpPr/>
+          <p:nvPr/>
+        </p:nvSpPr>
+        <p:spPr>
+          <a:xfrm>
+            <a:off x="8578443" y="2801112"/>
+            <a:ext cx="2973171" cy="1255776"/>
+          </a:xfrm>
+          <a:prstGeom prst="roundRect">
+            <a:avLst>
+              <a:gd name="adj" fmla="val 8000"/>
+            </a:avLst>
+          </a:prstGeom>
+          <a:solidFill>
+            <a:srgbClr val="FFFFFF"/>
+          </a:solidFill>
+          <a:ln w="15875">
+            <a:solidFill>
+              <a:srgbClr val="E8EEF6"/>
+            </a:solidFill>
+          </a:ln>
+          <a:effectLst/>
+        </p:spPr>
+        <p:style>
+          <a:lnRef idx="1">
+            <a:schemeClr val="accent1"/>
+          </a:lnRef>
+          <a:fillRef idx="3">
+            <a:schemeClr val="accent1"/>
+          </a:fillRef>
+          <a:effectRef idx="2">
+            <a:schemeClr val="accent1"/>
+          </a:effectRef>
+          <a:fontRef idx="minor">
+            <a:schemeClr val="lt1"/>
+          </a:fontRef>
+        </p:style>
+        <p:txBody>
+          <a:bodyPr rtlCol="0" anchor="ctr"/>
+          <a:lstStyle/>
+          <a:p>
+            <a:pPr algn="ctr"/>
+          </a:p>
+        </p:txBody>
+      </p:sp>
+      <p:sp>
+        <p:nvSpPr>
+          <p:cNvPr id="19" name="Oval 18"/>
+          <p:cNvSpPr/>
+          <p:nvPr/>
+        </p:nvSpPr>
+        <p:spPr>
+          <a:xfrm>
+            <a:off x="8688171" y="3200400"/>
+            <a:ext cx="457200" cy="457200"/>
+          </a:xfrm>
+          <a:prstGeom prst="ellipse">
+            <a:avLst/>
+          </a:prstGeom>
+          <a:solidFill>
+            <a:srgbClr val="0B1F3A"/>
+          </a:solidFill>
+          <a:ln>
+            <a:noFill/>
+          </a:ln>
+          <a:effectLst/>
+        </p:spPr>
+        <p:style>
+          <a:lnRef idx="1">
+            <a:schemeClr val="accent1"/>
+          </a:lnRef>
+          <a:fillRef idx="3">
+            <a:schemeClr val="accent1"/>
+          </a:fillRef>
+          <a:effectRef idx="2">
+            <a:schemeClr val="accent1"/>
+          </a:effectRef>
+          <a:fontRef idx="minor">
+            <a:schemeClr val="lt1"/>
+          </a:fontRef>
+        </p:style>
+        <p:txBody>
+          <a:bodyPr rtlCol="0" anchor="ctr" wrap="square" lIns="0" rIns="0" tIns="36576" bIns="36576"/>
+          <a:lstStyle/>
+          <a:p>
+            <a:pPr algn="ctr">
+              <a:spcAft>
+                <a:spcPts val="200"/>
+              </a:spcAft>
+            </a:pPr>
+            <a:r>
+              <a:rPr sz="1600" b="1">
+                <a:solidFill>
+                  <a:srgbClr val="FFFFFF"/>
+                </a:solidFill>
+                <a:latin typeface="Calibri"/>
+              </a:rPr>
+              <a:t>4</a:t>
+            </a:r>
+          </a:p>
+        </p:txBody>
+      </p:sp>
+      <p:sp>
+        <p:nvSpPr>
+          <p:cNvPr id="20" name="TextBox 19"/>
+          <p:cNvSpPr txBox="1"/>
+          <p:nvPr/>
+        </p:nvSpPr>
+        <p:spPr>
+          <a:xfrm>
+            <a:off x="9218523" y="2801112"/>
+            <a:ext cx="2259939" cy="1255776"/>
+          </a:xfrm>
+          <a:prstGeom prst="rect">
+            <a:avLst/>
+          </a:prstGeom>
+          <a:noFill/>
+        </p:spPr>
+        <p:txBody>
+          <a:bodyPr wrap="square" anchor="ctr" lIns="18288" rIns="18288" tIns="36576" bIns="36576">
+            <a:spAutoFit/>
+          </a:bodyPr>
+          <a:lstStyle/>
+          <a:p>
+            <a:pPr algn="l">
+              <a:spcAft>
+                <a:spcPts val="200"/>
+              </a:spcAft>
+            </a:pPr>
+            <a:r>
+              <a:rPr sz="1600" b="1">
+                <a:solidFill>
+                  <a:srgbClr val="0B1F3A"/>
+                </a:solidFill>
+                <a:latin typeface="Calibri"/>
+              </a:rPr>
+              <a:t>Xromatografiya</a:t>
+            </a:r>
+          </a:p>
+          <a:p>
+            <a:pPr algn="l">
+              <a:spcAft>
+                <a:spcPts val="200"/>
+              </a:spcAft>
+            </a:pPr>
+            <a:r>
+              <a:rPr sz="1400" b="0">
+                <a:solidFill>
+                  <a:srgbClr val="1F2937"/>
+                </a:solidFill>
+                <a:latin typeface="Calibri"/>
+              </a:rPr>
+              <a:t>Yupqa qavatli, gaz-suyuqlik</a:t>
+            </a:r>
+          </a:p>
+        </p:txBody>
+      </p:sp>
+      <p:sp>
+        <p:nvSpPr>
+          <p:cNvPr id="21" name="Rounded Rectangle 20"/>
+          <p:cNvSpPr/>
+          <p:nvPr/>
+        </p:nvSpPr>
+        <p:spPr>
+          <a:xfrm>
+            <a:off x="5440680" y="4184904"/>
+            <a:ext cx="2973171" cy="1255776"/>
+          </a:xfrm>
+          <a:prstGeom prst="roundRect">
+            <a:avLst>
+              <a:gd name="adj" fmla="val 8000"/>
+            </a:avLst>
+          </a:prstGeom>
+          <a:solidFill>
+            <a:srgbClr val="FFFFFF"/>
+          </a:solidFill>
+          <a:ln w="15875">
+            <a:solidFill>
+              <a:srgbClr val="E8EEF6"/>
+            </a:solidFill>
+          </a:ln>
+          <a:effectLst/>
+        </p:spPr>
+        <p:style>
+          <a:lnRef idx="1">
+            <a:schemeClr val="accent1"/>
+          </a:lnRef>
+          <a:fillRef idx="3">
+            <a:schemeClr val="accent1"/>
+          </a:fillRef>
+          <a:effectRef idx="2">
+            <a:schemeClr val="accent1"/>
+          </a:effectRef>
+          <a:fontRef idx="minor">
+            <a:schemeClr val="lt1"/>
+          </a:fontRef>
+        </p:style>
+        <p:txBody>
+          <a:bodyPr rtlCol="0" anchor="ctr"/>
+          <a:lstStyle/>
+          <a:p>
+            <a:pPr algn="ctr"/>
+          </a:p>
+        </p:txBody>
+      </p:sp>
+      <p:sp>
+        <p:nvSpPr>
+          <p:cNvPr id="22" name="Oval 21"/>
+          <p:cNvSpPr/>
+          <p:nvPr/>
+        </p:nvSpPr>
+        <p:spPr>
+          <a:xfrm>
+            <a:off x="5550408" y="4584192"/>
+            <a:ext cx="457200" cy="457200"/>
+          </a:xfrm>
+          <a:prstGeom prst="ellipse">
+            <a:avLst/>
+          </a:prstGeom>
+          <a:solidFill>
+            <a:srgbClr val="0B1F3A"/>
+          </a:solidFill>
+          <a:ln>
+            <a:noFill/>
+          </a:ln>
+          <a:effectLst/>
+        </p:spPr>
+        <p:style>
+          <a:lnRef idx="1">
+            <a:schemeClr val="accent1"/>
+          </a:lnRef>
+          <a:fillRef idx="3">
+            <a:schemeClr val="accent1"/>
+          </a:fillRef>
+          <a:effectRef idx="2">
+            <a:schemeClr val="accent1"/>
+          </a:effectRef>
+          <a:fontRef idx="minor">
+            <a:schemeClr val="lt1"/>
+          </a:fontRef>
+        </p:style>
+        <p:txBody>
+          <a:bodyPr rtlCol="0" anchor="ctr" wrap="square" lIns="0" rIns="0" tIns="36576" bIns="36576"/>
+          <a:lstStyle/>
+          <a:p>
+            <a:pPr algn="ctr">
+              <a:spcAft>
+                <a:spcPts val="200"/>
+              </a:spcAft>
+            </a:pPr>
+            <a:r>
+              <a:rPr sz="1600" b="1">
+                <a:solidFill>
+                  <a:srgbClr val="FFFFFF"/>
+                </a:solidFill>
+                <a:latin typeface="Calibri"/>
+              </a:rPr>
+              <a:t>5</a:t>
+            </a:r>
+          </a:p>
+        </p:txBody>
+      </p:sp>
+      <p:sp>
+        <p:nvSpPr>
+          <p:cNvPr id="23" name="TextBox 22"/>
+          <p:cNvSpPr txBox="1"/>
+          <p:nvPr/>
+        </p:nvSpPr>
+        <p:spPr>
+          <a:xfrm>
+            <a:off x="6080760" y="4184904"/>
+            <a:ext cx="2259939" cy="1255776"/>
+          </a:xfrm>
+          <a:prstGeom prst="rect">
+            <a:avLst/>
+          </a:prstGeom>
+          <a:noFill/>
+        </p:spPr>
+        <p:txBody>
+          <a:bodyPr wrap="square" anchor="ctr" lIns="18288" rIns="18288" tIns="36576" bIns="36576">
+            <a:spAutoFit/>
+          </a:bodyPr>
+          <a:lstStyle/>
+          <a:p>
+            <a:pPr algn="l">
+              <a:spcAft>
+                <a:spcPts val="200"/>
+              </a:spcAft>
+            </a:pPr>
+            <a:r>
+              <a:rPr sz="1600" b="1">
+                <a:solidFill>
+                  <a:srgbClr val="0B1F3A"/>
+                </a:solidFill>
+                <a:latin typeface="Calibri"/>
+              </a:rPr>
+              <a:t>Yog‘ni cho‘ktirish</a:t>
+            </a:r>
+          </a:p>
+          <a:p>
+            <a:pPr algn="l">
+              <a:spcAft>
+                <a:spcPts val="200"/>
+              </a:spcAft>
+            </a:pPr>
+            <a:r>
+              <a:rPr sz="1400" b="0">
+                <a:solidFill>
+                  <a:srgbClr val="1F2937"/>
+                </a:solidFill>
+                <a:latin typeface="Calibri"/>
+              </a:rPr>
+              <a:t>Aseton, atsetonitril, sovuqda</a:t>
+            </a:r>
+          </a:p>
+        </p:txBody>
+      </p:sp>
+      <p:sp>
+        <p:nvSpPr>
+          <p:cNvPr id="24" name="TextBox 23"/>
+          <p:cNvSpPr txBox="1"/>
+          <p:nvPr/>
+        </p:nvSpPr>
+        <p:spPr>
+          <a:xfrm>
+            <a:off x="5440680" y="5486400"/>
+            <a:ext cx="6110935" cy="365760"/>
+          </a:xfrm>
+          <a:prstGeom prst="rect">
+            <a:avLst/>
+          </a:prstGeom>
+          <a:noFill/>
+        </p:spPr>
+        <p:txBody>
+          <a:bodyPr wrap="square">
+            <a:spAutoFit/>
+          </a:bodyPr>
+          <a:lstStyle/>
+          <a:p>
+            <a:r>
+              <a:rPr sz="1200" b="0">
+                <a:solidFill>
+                  <a:srgbClr val="6B7280"/>
+                </a:solidFill>
+                <a:latin typeface="Calibri"/>
+              </a:rPr>
+              <a:t>Tozalash usullari</a:t>
+            </a:r>
+          </a:p>
+        </p:txBody>
+      </p:sp>
+      <p:sp>
+        <p:nvSpPr>
+          <p:cNvPr id="25" name="TextBox 24"/>
           <p:cNvSpPr txBox="1"/>
           <p:nvPr/>
         </p:nvSpPr>
@@ -15250,7 +19312,7 @@
         <p:spPr>
           <a:xfrm>
             <a:off x="640080" y="1417320"/>
-            <a:ext cx="5394960" cy="4480560"/>
+            <a:ext cx="4572000" cy="4480560"/>
           </a:xfrm>
           <a:prstGeom prst="rect">
             <a:avLst/>
@@ -15312,218 +19374,557 @@
           </a:p>
         </p:txBody>
       </p:sp>
-      <p:graphicFrame>
-        <p:nvGraphicFramePr>
-          <p:cNvPr id="9" name="Table 8"/>
-          <p:cNvGraphicFramePr>
-            <a:graphicFrameLocks noGrp="1"/>
-          </p:cNvGraphicFramePr>
-          <p:nvPr/>
-        </p:nvGraphicFramePr>
-        <p:xfrm>
-          <a:off x="6263640" y="1463040"/>
-          <a:ext cx="5287974" cy="3072384"/>
-        </p:xfrm>
-        <a:graphic>
-          <a:graphicData uri="http://schemas.openxmlformats.org/drawingml/2006/table">
-            <a:tbl>
-              <a:tblPr firstRow="1" bandRow="1">
-                <a:tableStyleId>{5C22544A-7EE6-4342-B048-85BDC9FD1C3A}</a:tableStyleId>
-              </a:tblPr>
-              <a:tblGrid>
-                <a:gridCol w="1982990"/>
-                <a:gridCol w="3304984"/>
-              </a:tblGrid>
-              <a:tr h="768096">
-                <a:tc>
-                  <a:txBody>
-                    <a:bodyPr/>
-                    <a:lstStyle/>
-                    <a:p>
-                      <a:r>
-                        <a:rPr sz="1800" b="1">
-                          <a:solidFill>
-                            <a:srgbClr val="FFFFFF"/>
-                          </a:solidFill>
-                        </a:rPr>
-                        <a:t>Guruh</a:t>
-                      </a:r>
-                    </a:p>
-                  </a:txBody>
-                  <a:tcPr marL="73152" marR="73152" marT="36576" marB="36576">
-                    <a:solidFill>
-                      <a:srgbClr val="0B1F3A"/>
-                    </a:solidFill>
-                  </a:tcPr>
-                </a:tc>
-                <a:tc>
-                  <a:txBody>
-                    <a:bodyPr/>
-                    <a:lstStyle/>
-                    <a:p>
-                      <a:r>
-                        <a:rPr sz="1800" b="1">
-                          <a:solidFill>
-                            <a:srgbClr val="FFFFFF"/>
-                          </a:solidFill>
-                        </a:rPr>
-                        <a:t>Tarkibi</a:t>
-                      </a:r>
-                    </a:p>
-                  </a:txBody>
-                  <a:tcPr marL="73152" marR="73152" marT="36576" marB="36576">
-                    <a:solidFill>
-                      <a:srgbClr val="0B1F3A"/>
-                    </a:solidFill>
-                  </a:tcPr>
-                </a:tc>
-              </a:tr>
-              <a:tr h="768096">
-                <a:tc>
-                  <a:txBody>
-                    <a:bodyPr/>
-                    <a:lstStyle/>
-                    <a:p>
-                      <a:r>
-                        <a:rPr sz="1700" b="0">
-                          <a:solidFill>
-                            <a:srgbClr val="1F2937"/>
-                          </a:solidFill>
-                        </a:rPr>
-                        <a:t>1. Murda ob’ektlari</a:t>
-                      </a:r>
-                    </a:p>
-                  </a:txBody>
-                  <a:tcPr marL="73152" marR="73152" marT="36576" marB="36576">
-                    <a:solidFill>
-                      <a:srgbClr val="E8EEF6"/>
-                    </a:solidFill>
-                  </a:tcPr>
-                </a:tc>
-                <a:tc>
-                  <a:txBody>
-                    <a:bodyPr/>
-                    <a:lstStyle/>
-                    <a:p>
-                      <a:r>
-                        <a:rPr sz="1700" b="0">
-                          <a:solidFill>
-                            <a:srgbClr val="1F2937"/>
-                          </a:solidFill>
-                        </a:rPr>
-                        <a:t>A’zolar, qon, peshob, qusuq qoldiqlari</a:t>
-                      </a:r>
-                    </a:p>
-                  </a:txBody>
-                  <a:tcPr marL="73152" marR="73152" marT="36576" marB="36576">
-                    <a:solidFill>
-                      <a:srgbClr val="E8EEF6"/>
-                    </a:solidFill>
-                  </a:tcPr>
-                </a:tc>
-              </a:tr>
-              <a:tr h="768096">
-                <a:tc>
-                  <a:txBody>
-                    <a:bodyPr/>
-                    <a:lstStyle/>
-                    <a:p>
-                      <a:r>
-                        <a:rPr sz="1700" b="0">
-                          <a:solidFill>
-                            <a:srgbClr val="1F2937"/>
-                          </a:solidFill>
-                        </a:rPr>
-                        <a:t>2. Zaharlanish manbalari</a:t>
-                      </a:r>
-                    </a:p>
-                  </a:txBody>
-                  <a:tcPr marL="73152" marR="73152" marT="36576" marB="36576">
-                    <a:solidFill>
-                      <a:srgbClr val="FFFFFF"/>
-                    </a:solidFill>
-                  </a:tcPr>
-                </a:tc>
-                <a:tc>
-                  <a:txBody>
-                    <a:bodyPr/>
-                    <a:lstStyle/>
-                    <a:p>
-                      <a:r>
-                        <a:rPr sz="1700" b="0">
-                          <a:solidFill>
-                            <a:srgbClr val="1F2937"/>
-                          </a:solidFill>
-                        </a:rPr>
-                        <a:t>Ovqat, suv, ichimlik, o‘simlik, dori, havo</a:t>
-                      </a:r>
-                    </a:p>
-                  </a:txBody>
-                  <a:tcPr marL="73152" marR="73152" marT="36576" marB="36576">
-                    <a:solidFill>
-                      <a:srgbClr val="FFFFFF"/>
-                    </a:solidFill>
-                  </a:tcPr>
-                </a:tc>
-              </a:tr>
-              <a:tr h="768096">
-                <a:tc>
-                  <a:txBody>
-                    <a:bodyPr/>
-                    <a:lstStyle/>
-                    <a:p>
-                      <a:r>
-                        <a:rPr sz="1700" b="0">
-                          <a:solidFill>
-                            <a:srgbClr val="1F2937"/>
-                          </a:solidFill>
-                        </a:rPr>
-                        <a:t>3. Buyumlar</a:t>
-                      </a:r>
-                    </a:p>
-                  </a:txBody>
-                  <a:tcPr marL="73152" marR="73152" marT="36576" marB="36576">
-                    <a:solidFill>
-                      <a:srgbClr val="E8EEF6"/>
-                    </a:solidFill>
-                  </a:tcPr>
-                </a:tc>
-                <a:tc>
-                  <a:txBody>
-                    <a:bodyPr/>
-                    <a:lstStyle/>
-                    <a:p>
-                      <a:r>
-                        <a:rPr sz="1700" b="0">
-                          <a:solidFill>
-                            <a:srgbClr val="1F2937"/>
-                          </a:solidFill>
-                        </a:rPr>
-                        <a:t>Kiyim, dog‘lar, idish, asboblar</a:t>
-                      </a:r>
-                    </a:p>
-                  </a:txBody>
-                  <a:tcPr marL="73152" marR="73152" marT="36576" marB="36576">
-                    <a:solidFill>
-                      <a:srgbClr val="E8EEF6"/>
-                    </a:solidFill>
-                  </a:tcPr>
-                </a:tc>
-              </a:tr>
-            </a:tbl>
-          </a:graphicData>
-        </a:graphic>
-      </p:graphicFrame>
-      <p:sp>
-        <p:nvSpPr>
-          <p:cNvPr id="10" name="TextBox 9"/>
+      <p:sp>
+        <p:nvSpPr>
+          <p:cNvPr id="9" name="Rounded Rectangle 8"/>
+          <p:cNvSpPr/>
+          <p:nvPr/>
+        </p:nvSpPr>
+        <p:spPr>
+          <a:xfrm>
+            <a:off x="5440680" y="2788920"/>
+            <a:ext cx="2011680" cy="1280160"/>
+          </a:xfrm>
+          <a:prstGeom prst="roundRect">
+            <a:avLst/>
+          </a:prstGeom>
+          <a:solidFill>
+            <a:srgbClr val="0B1F3A"/>
+          </a:solidFill>
+          <a:ln>
+            <a:noFill/>
+          </a:ln>
+          <a:effectLst/>
+        </p:spPr>
+        <p:style>
+          <a:lnRef idx="1">
+            <a:schemeClr val="accent1"/>
+          </a:lnRef>
+          <a:fillRef idx="3">
+            <a:schemeClr val="accent1"/>
+          </a:fillRef>
+          <a:effectRef idx="2">
+            <a:schemeClr val="accent1"/>
+          </a:effectRef>
+          <a:fontRef idx="minor">
+            <a:schemeClr val="lt1"/>
+          </a:fontRef>
+        </p:style>
+        <p:txBody>
+          <a:bodyPr rtlCol="0" anchor="ctr" wrap="square" tIns="36576" bIns="36576"/>
+          <a:lstStyle/>
+          <a:p>
+            <a:pPr algn="ctr">
+              <a:spcAft>
+                <a:spcPts val="200"/>
+              </a:spcAft>
+            </a:pPr>
+            <a:r>
+              <a:rPr sz="1800" b="1">
+                <a:solidFill>
+                  <a:srgbClr val="FFFFFF"/>
+                </a:solidFill>
+                <a:latin typeface="Calibri"/>
+              </a:rPr>
+              <a:t>Kimyo-toksikologik ob’ekt</a:t>
+            </a:r>
+          </a:p>
+        </p:txBody>
+      </p:sp>
+      <p:cxnSp>
+        <p:nvCxnSpPr>
+          <p:cNvPr id="10" name="Connector 9"/>
+          <p:cNvCxnSpPr/>
+          <p:nvPr/>
+        </p:nvCxnSpPr>
+        <p:spPr>
+          <a:xfrm>
+            <a:off x="7452360" y="3429000"/>
+            <a:ext cx="160020" cy="0"/>
+          </a:xfrm>
+          <a:prstGeom prst="line">
+            <a:avLst/>
+          </a:prstGeom>
+          <a:ln w="25400">
+            <a:solidFill>
+              <a:srgbClr val="C9A227"/>
+            </a:solidFill>
+          </a:ln>
+        </p:spPr>
+        <p:style>
+          <a:lnRef idx="2">
+            <a:schemeClr val="accent1"/>
+          </a:lnRef>
+          <a:fillRef idx="0">
+            <a:schemeClr val="accent1"/>
+          </a:fillRef>
+          <a:effectRef idx="1">
+            <a:schemeClr val="accent1"/>
+          </a:effectRef>
+          <a:fontRef idx="minor">
+            <a:schemeClr val="tx1"/>
+          </a:fontRef>
+        </p:style>
+      </p:cxnSp>
+      <p:cxnSp>
+        <p:nvCxnSpPr>
+          <p:cNvPr id="11" name="Connector 10"/>
+          <p:cNvCxnSpPr/>
+          <p:nvPr/>
+        </p:nvCxnSpPr>
+        <p:spPr>
+          <a:xfrm>
+            <a:off x="7612380" y="2063496"/>
+            <a:ext cx="0" cy="2731008"/>
+          </a:xfrm>
+          <a:prstGeom prst="line">
+            <a:avLst/>
+          </a:prstGeom>
+          <a:ln w="25400">
+            <a:solidFill>
+              <a:srgbClr val="C9A227"/>
+            </a:solidFill>
+          </a:ln>
+        </p:spPr>
+        <p:style>
+          <a:lnRef idx="2">
+            <a:schemeClr val="accent1"/>
+          </a:lnRef>
+          <a:fillRef idx="0">
+            <a:schemeClr val="accent1"/>
+          </a:fillRef>
+          <a:effectRef idx="1">
+            <a:schemeClr val="accent1"/>
+          </a:effectRef>
+          <a:fontRef idx="minor">
+            <a:schemeClr val="tx1"/>
+          </a:fontRef>
+        </p:style>
+      </p:cxnSp>
+      <p:cxnSp>
+        <p:nvCxnSpPr>
+          <p:cNvPr id="12" name="Connector 11"/>
+          <p:cNvCxnSpPr/>
+          <p:nvPr/>
+        </p:nvCxnSpPr>
+        <p:spPr>
+          <a:xfrm>
+            <a:off x="7612380" y="2063496"/>
+            <a:ext cx="160020" cy="0"/>
+          </a:xfrm>
+          <a:prstGeom prst="line">
+            <a:avLst/>
+          </a:prstGeom>
+          <a:ln w="25400">
+            <a:solidFill>
+              <a:srgbClr val="C9A227"/>
+            </a:solidFill>
+          </a:ln>
+        </p:spPr>
+        <p:style>
+          <a:lnRef idx="2">
+            <a:schemeClr val="accent1"/>
+          </a:lnRef>
+          <a:fillRef idx="0">
+            <a:schemeClr val="accent1"/>
+          </a:fillRef>
+          <a:effectRef idx="1">
+            <a:schemeClr val="accent1"/>
+          </a:effectRef>
+          <a:fontRef idx="minor">
+            <a:schemeClr val="tx1"/>
+          </a:fontRef>
+        </p:style>
+      </p:cxnSp>
+      <p:sp>
+        <p:nvSpPr>
+          <p:cNvPr id="13" name="Rounded Rectangle 12"/>
+          <p:cNvSpPr/>
+          <p:nvPr/>
+        </p:nvSpPr>
+        <p:spPr>
+          <a:xfrm>
+            <a:off x="7772400" y="1417320"/>
+            <a:ext cx="3779215" cy="1292352"/>
+          </a:xfrm>
+          <a:prstGeom prst="roundRect">
+            <a:avLst>
+              <a:gd name="adj" fmla="val 8000"/>
+            </a:avLst>
+          </a:prstGeom>
+          <a:solidFill>
+            <a:srgbClr val="FFFFFF"/>
+          </a:solidFill>
+          <a:ln w="15875">
+            <a:solidFill>
+              <a:srgbClr val="C9A227"/>
+            </a:solidFill>
+          </a:ln>
+          <a:effectLst/>
+        </p:spPr>
+        <p:style>
+          <a:lnRef idx="1">
+            <a:schemeClr val="accent1"/>
+          </a:lnRef>
+          <a:fillRef idx="3">
+            <a:schemeClr val="accent1"/>
+          </a:fillRef>
+          <a:effectRef idx="2">
+            <a:schemeClr val="accent1"/>
+          </a:effectRef>
+          <a:fontRef idx="minor">
+            <a:schemeClr val="lt1"/>
+          </a:fontRef>
+        </p:style>
+        <p:txBody>
+          <a:bodyPr rtlCol="0" anchor="ctr"/>
+          <a:lstStyle/>
+          <a:p>
+            <a:pPr algn="ctr"/>
+          </a:p>
+        </p:txBody>
+      </p:sp>
+      <p:sp>
+        <p:nvSpPr>
+          <p:cNvPr id="14" name="TextBox 13"/>
           <p:cNvSpPr txBox="1"/>
           <p:nvPr/>
         </p:nvSpPr>
         <p:spPr>
           <a:xfrm>
-            <a:off x="6263640" y="5349240"/>
-            <a:ext cx="5287975" cy="365760"/>
+            <a:off x="7772400" y="1417320"/>
+            <a:ext cx="3779215" cy="1292352"/>
+          </a:xfrm>
+          <a:prstGeom prst="rect">
+            <a:avLst/>
+          </a:prstGeom>
+          <a:noFill/>
+        </p:spPr>
+        <p:txBody>
+          <a:bodyPr wrap="square" anchor="ctr" tIns="36576" bIns="36576">
+            <a:spAutoFit/>
+          </a:bodyPr>
+          <a:lstStyle/>
+          <a:p>
+            <a:pPr algn="l">
+              <a:spcAft>
+                <a:spcPts val="0"/>
+              </a:spcAft>
+            </a:pPr>
+            <a:r>
+              <a:rPr sz="1400" b="1">
+                <a:solidFill>
+                  <a:srgbClr val="0B1F3A"/>
+                </a:solidFill>
+                <a:latin typeface="Calibri"/>
+              </a:rPr>
+              <a:t>Biologik ob’ekt</a:t>
+            </a:r>
+          </a:p>
+          <a:p>
+            <a:pPr algn="l">
+              <a:spcAft>
+                <a:spcPts val="0"/>
+              </a:spcAft>
+            </a:pPr>
+            <a:r>
+              <a:rPr sz="1200" b="0">
+                <a:solidFill>
+                  <a:srgbClr val="1F2937"/>
+                </a:solidFill>
+                <a:latin typeface="Calibri"/>
+              </a:rPr>
+              <a:t>Murda a’zolari, qon, peshob  ·  Qusuq, oshqozon yuvindisi</a:t>
+            </a:r>
+          </a:p>
+        </p:txBody>
+      </p:sp>
+      <p:cxnSp>
+        <p:nvCxnSpPr>
+          <p:cNvPr id="15" name="Connector 14"/>
+          <p:cNvCxnSpPr/>
+          <p:nvPr/>
+        </p:nvCxnSpPr>
+        <p:spPr>
+          <a:xfrm>
+            <a:off x="7612380" y="3429000"/>
+            <a:ext cx="160020" cy="0"/>
+          </a:xfrm>
+          <a:prstGeom prst="line">
+            <a:avLst/>
+          </a:prstGeom>
+          <a:ln w="25400">
+            <a:solidFill>
+              <a:srgbClr val="C9A227"/>
+            </a:solidFill>
+          </a:ln>
+        </p:spPr>
+        <p:style>
+          <a:lnRef idx="2">
+            <a:schemeClr val="accent1"/>
+          </a:lnRef>
+          <a:fillRef idx="0">
+            <a:schemeClr val="accent1"/>
+          </a:fillRef>
+          <a:effectRef idx="1">
+            <a:schemeClr val="accent1"/>
+          </a:effectRef>
+          <a:fontRef idx="minor">
+            <a:schemeClr val="tx1"/>
+          </a:fontRef>
+        </p:style>
+      </p:cxnSp>
+      <p:sp>
+        <p:nvSpPr>
+          <p:cNvPr id="16" name="Rounded Rectangle 15"/>
+          <p:cNvSpPr/>
+          <p:nvPr/>
+        </p:nvSpPr>
+        <p:spPr>
+          <a:xfrm>
+            <a:off x="7772400" y="2782824"/>
+            <a:ext cx="3779215" cy="1292352"/>
+          </a:xfrm>
+          <a:prstGeom prst="roundRect">
+            <a:avLst>
+              <a:gd name="adj" fmla="val 8000"/>
+            </a:avLst>
+          </a:prstGeom>
+          <a:solidFill>
+            <a:srgbClr val="FFFFFF"/>
+          </a:solidFill>
+          <a:ln w="15875">
+            <a:solidFill>
+              <a:srgbClr val="C9A227"/>
+            </a:solidFill>
+          </a:ln>
+          <a:effectLst/>
+        </p:spPr>
+        <p:style>
+          <a:lnRef idx="1">
+            <a:schemeClr val="accent1"/>
+          </a:lnRef>
+          <a:fillRef idx="3">
+            <a:schemeClr val="accent1"/>
+          </a:fillRef>
+          <a:effectRef idx="2">
+            <a:schemeClr val="accent1"/>
+          </a:effectRef>
+          <a:fontRef idx="minor">
+            <a:schemeClr val="lt1"/>
+          </a:fontRef>
+        </p:style>
+        <p:txBody>
+          <a:bodyPr rtlCol="0" anchor="ctr"/>
+          <a:lstStyle/>
+          <a:p>
+            <a:pPr algn="ctr"/>
+          </a:p>
+        </p:txBody>
+      </p:sp>
+      <p:sp>
+        <p:nvSpPr>
+          <p:cNvPr id="17" name="TextBox 16"/>
+          <p:cNvSpPr txBox="1"/>
+          <p:nvPr/>
+        </p:nvSpPr>
+        <p:spPr>
+          <a:xfrm>
+            <a:off x="7772400" y="2782824"/>
+            <a:ext cx="3779215" cy="1292352"/>
+          </a:xfrm>
+          <a:prstGeom prst="rect">
+            <a:avLst/>
+          </a:prstGeom>
+          <a:noFill/>
+        </p:spPr>
+        <p:txBody>
+          <a:bodyPr wrap="square" anchor="ctr" tIns="36576" bIns="36576">
+            <a:spAutoFit/>
+          </a:bodyPr>
+          <a:lstStyle/>
+          <a:p>
+            <a:pPr algn="l">
+              <a:spcAft>
+                <a:spcPts val="0"/>
+              </a:spcAft>
+            </a:pPr>
+            <a:r>
+              <a:rPr sz="1400" b="1">
+                <a:solidFill>
+                  <a:srgbClr val="0B1F3A"/>
+                </a:solidFill>
+                <a:latin typeface="Calibri"/>
+              </a:rPr>
+              <a:t>Mahsulot va muhit</a:t>
+            </a:r>
+          </a:p>
+          <a:p>
+            <a:pPr algn="l">
+              <a:spcAft>
+                <a:spcPts val="0"/>
+              </a:spcAft>
+            </a:pPr>
+            <a:r>
+              <a:rPr sz="1200" b="0">
+                <a:solidFill>
+                  <a:srgbClr val="1F2937"/>
+                </a:solidFill>
+                <a:latin typeface="Calibri"/>
+              </a:rPr>
+              <a:t>Oziq-ovqat, suv, dori, havo</a:t>
+            </a:r>
+          </a:p>
+        </p:txBody>
+      </p:sp>
+      <p:cxnSp>
+        <p:nvCxnSpPr>
+          <p:cNvPr id="18" name="Connector 17"/>
+          <p:cNvCxnSpPr/>
+          <p:nvPr/>
+        </p:nvCxnSpPr>
+        <p:spPr>
+          <a:xfrm>
+            <a:off x="7612380" y="4794504"/>
+            <a:ext cx="160020" cy="0"/>
+          </a:xfrm>
+          <a:prstGeom prst="line">
+            <a:avLst/>
+          </a:prstGeom>
+          <a:ln w="25400">
+            <a:solidFill>
+              <a:srgbClr val="C9A227"/>
+            </a:solidFill>
+          </a:ln>
+        </p:spPr>
+        <p:style>
+          <a:lnRef idx="2">
+            <a:schemeClr val="accent1"/>
+          </a:lnRef>
+          <a:fillRef idx="0">
+            <a:schemeClr val="accent1"/>
+          </a:fillRef>
+          <a:effectRef idx="1">
+            <a:schemeClr val="accent1"/>
+          </a:effectRef>
+          <a:fontRef idx="minor">
+            <a:schemeClr val="tx1"/>
+          </a:fontRef>
+        </p:style>
+      </p:cxnSp>
+      <p:sp>
+        <p:nvSpPr>
+          <p:cNvPr id="19" name="Rounded Rectangle 18"/>
+          <p:cNvSpPr/>
+          <p:nvPr/>
+        </p:nvSpPr>
+        <p:spPr>
+          <a:xfrm>
+            <a:off x="7772400" y="4148328"/>
+            <a:ext cx="3779215" cy="1292352"/>
+          </a:xfrm>
+          <a:prstGeom prst="roundRect">
+            <a:avLst>
+              <a:gd name="adj" fmla="val 8000"/>
+            </a:avLst>
+          </a:prstGeom>
+          <a:solidFill>
+            <a:srgbClr val="FFFFFF"/>
+          </a:solidFill>
+          <a:ln w="15875">
+            <a:solidFill>
+              <a:srgbClr val="C9A227"/>
+            </a:solidFill>
+          </a:ln>
+          <a:effectLst/>
+        </p:spPr>
+        <p:style>
+          <a:lnRef idx="1">
+            <a:schemeClr val="accent1"/>
+          </a:lnRef>
+          <a:fillRef idx="3">
+            <a:schemeClr val="accent1"/>
+          </a:fillRef>
+          <a:effectRef idx="2">
+            <a:schemeClr val="accent1"/>
+          </a:effectRef>
+          <a:fontRef idx="minor">
+            <a:schemeClr val="lt1"/>
+          </a:fontRef>
+        </p:style>
+        <p:txBody>
+          <a:bodyPr rtlCol="0" anchor="ctr"/>
+          <a:lstStyle/>
+          <a:p>
+            <a:pPr algn="ctr"/>
+          </a:p>
+        </p:txBody>
+      </p:sp>
+      <p:sp>
+        <p:nvSpPr>
+          <p:cNvPr id="20" name="TextBox 19"/>
+          <p:cNvSpPr txBox="1"/>
+          <p:nvPr/>
+        </p:nvSpPr>
+        <p:spPr>
+          <a:xfrm>
+            <a:off x="7772400" y="4148328"/>
+            <a:ext cx="3779215" cy="1292352"/>
+          </a:xfrm>
+          <a:prstGeom prst="rect">
+            <a:avLst/>
+          </a:prstGeom>
+          <a:noFill/>
+        </p:spPr>
+        <p:txBody>
+          <a:bodyPr wrap="square" anchor="ctr" tIns="36576" bIns="36576">
+            <a:spAutoFit/>
+          </a:bodyPr>
+          <a:lstStyle/>
+          <a:p>
+            <a:pPr algn="l">
+              <a:spcAft>
+                <a:spcPts val="0"/>
+              </a:spcAft>
+            </a:pPr>
+            <a:r>
+              <a:rPr sz="1400" b="1">
+                <a:solidFill>
+                  <a:srgbClr val="0B1F3A"/>
+                </a:solidFill>
+                <a:latin typeface="Calibri"/>
+              </a:rPr>
+              <a:t>Buyumlar</a:t>
+            </a:r>
+          </a:p>
+          <a:p>
+            <a:pPr algn="l">
+              <a:spcAft>
+                <a:spcPts val="0"/>
+              </a:spcAft>
+            </a:pPr>
+            <a:r>
+              <a:rPr sz="1200" b="0">
+                <a:solidFill>
+                  <a:srgbClr val="1F2937"/>
+                </a:solidFill>
+                <a:latin typeface="Calibri"/>
+              </a:rPr>
+              <a:t>Kiyim, dog‘lar, idishlar</a:t>
+            </a:r>
+          </a:p>
+        </p:txBody>
+      </p:sp>
+      <p:sp>
+        <p:nvSpPr>
+          <p:cNvPr id="21" name="TextBox 20"/>
+          <p:cNvSpPr txBox="1"/>
+          <p:nvPr/>
+        </p:nvSpPr>
+        <p:spPr>
+          <a:xfrm>
+            <a:off x="5440680" y="5486400"/>
+            <a:ext cx="6110935" cy="365760"/>
           </a:xfrm>
           <a:prstGeom prst="rect">
             <a:avLst/>
@@ -15537,20 +19938,20 @@
           <a:lstStyle/>
           <a:p>
             <a:r>
-              <a:rPr sz="1100" b="0">
+              <a:rPr sz="1200" b="0">
                 <a:solidFill>
                   <a:srgbClr val="6B7280"/>
                 </a:solidFill>
                 <a:latin typeface="Calibri"/>
               </a:rPr>
-              <a:t>Ob’ektlarning uch guruhi</a:t>
-            </a:r>
-          </a:p>
-        </p:txBody>
-      </p:sp>
-      <p:sp>
-        <p:nvSpPr>
-          <p:cNvPr id="11" name="TextBox 10"/>
+              <a:t>Tahlil ob’ektlari</a:t>
+            </a:r>
+          </a:p>
+        </p:txBody>
+      </p:sp>
+      <p:sp>
+        <p:nvSpPr>
+          <p:cNvPr id="22" name="TextBox 21"/>
           <p:cNvSpPr txBox="1"/>
           <p:nvPr/>
         </p:nvSpPr>
@@ -15885,7 +20286,7 @@
                 </a:solidFill>
                 <a:latin typeface="Calibri"/>
               </a:rPr>
-              <a:t>▸  Ob’ektni tejash va vaqtni tejash uchun sud kimyogari aniq reja tuzadi; dastlabki tekshiruv reja ichidagi ko‘p moddalarni inkor qilish yoki taxmin qilish imkonini beradi.</a:t>
+              <a:t>▸  Ob’ektni tejash va vaqtni tejash uchun sud kimyogari aniq reja tuzadi.</a:t>
             </a:r>
           </a:p>
           <a:p>
@@ -15901,7 +20302,39 @@
                 </a:solidFill>
                 <a:latin typeface="Calibri"/>
               </a:rPr>
-              <a:t>▸  Reja asoslari: yo‘llanmalar va o‘lim sabablari, kasallik tarixi va sud-tibbiyot ekspertizasi akti, ob’ektning tashqi ko‘rinishi (pH, hid, rang), dastlabki taxminiy tekshiruv natijalari.</a:t>
+              <a:t>▸  Dastlabki tekshiruv reja ichidagi ko‘p moddalarni inkor qilish yoki taxmin qilish imkonini beradi.</a:t>
+            </a:r>
+          </a:p>
+          <a:p>
+            <a:pPr>
+              <a:spcAft>
+                <a:spcPts val="1200"/>
+              </a:spcAft>
+            </a:pPr>
+            <a:r>
+              <a:rPr sz="2200">
+                <a:solidFill>
+                  <a:srgbClr val="1F2937"/>
+                </a:solidFill>
+                <a:latin typeface="Calibri"/>
+              </a:rPr>
+              <a:t>▸  Reja asoslari: yo‘llanmalar va o‘lim sabablari, kasallik tarixi va sud-tibbiyot ekspertizasi akti.</a:t>
+            </a:r>
+          </a:p>
+          <a:p>
+            <a:pPr>
+              <a:spcAft>
+                <a:spcPts val="1200"/>
+              </a:spcAft>
+            </a:pPr>
+            <a:r>
+              <a:rPr sz="2200">
+                <a:solidFill>
+                  <a:srgbClr val="1F2937"/>
+                </a:solidFill>
+                <a:latin typeface="Calibri"/>
+              </a:rPr>
+              <a:t>▸  Ob’ektning tashqi ko‘rinishi (pH, hid, rang), dastlabki taxminiy tekshiruv natijalari.</a:t>
             </a:r>
           </a:p>
         </p:txBody>
@@ -17055,7 +21488,23 @@
                 </a:solidFill>
                 <a:latin typeface="Calibri"/>
               </a:rPr>
-              <a:t>▸  Ko‘z yoki mikroskopda zaharga xos qo‘shimchalar ko‘rinishi mumkin: margimush oksidining chinnisimon kristallari, strixnin nitritining prizmatik kristallari, zaharli o‘simlik urug‘i.</a:t>
+              <a:t>▸  Ko‘z yoki mikroskopda zaharga xos qo‘shimchalar ko‘rinishi mumkin: margimush oksidining chinnisimon kristallari.</a:t>
+            </a:r>
+          </a:p>
+          <a:p>
+            <a:pPr>
+              <a:spcAft>
+                <a:spcPts val="1200"/>
+              </a:spcAft>
+            </a:pPr>
+            <a:r>
+              <a:rPr sz="2200">
+                <a:solidFill>
+                  <a:srgbClr val="1F2937"/>
+                </a:solidFill>
+                <a:latin typeface="Calibri"/>
+              </a:rPr>
+              <a:t>▸  Strixnin nitritining prizmatik kristallari, zaharli o‘simlik urug‘i.</a:t>
             </a:r>
           </a:p>
           <a:p>
@@ -18445,7 +22894,23 @@
                 </a:solidFill>
                 <a:latin typeface="Calibri"/>
               </a:rPr>
-              <a:t>▸  Misol: fenotiazin hosilalari peshobga temir xloridning sulfat kislotali eritmasi qo‘shilsa och-qizil rang beradi; barbituratlar uchun kobalt atsetat ammiak yoki litiy ishqori sharoitida.</a:t>
+              <a:t>▸  Misol: fenotiazin hosilalari peshobga temir xloridning sulfat kislotali eritmasi qo‘shilsa och-qizil rang beradi.</a:t>
+            </a:r>
+          </a:p>
+          <a:p>
+            <a:pPr>
+              <a:spcAft>
+                <a:spcPts val="1200"/>
+              </a:spcAft>
+            </a:pPr>
+            <a:r>
+              <a:rPr sz="2200">
+                <a:solidFill>
+                  <a:srgbClr val="1F2937"/>
+                </a:solidFill>
+                <a:latin typeface="Calibri"/>
+              </a:rPr>
+              <a:t>▸  Barbituratlar uchun kobalt atsetat ammiak yoki litiy ishqori sharoitida.</a:t>
             </a:r>
           </a:p>
         </p:txBody>
@@ -18746,7 +23211,7 @@
         <p:spPr>
           <a:xfrm>
             <a:off x="640080" y="1417320"/>
-            <a:ext cx="10911535" cy="4480560"/>
+            <a:ext cx="4572000" cy="4480560"/>
           </a:xfrm>
           <a:prstGeom prst="rect">
             <a:avLst/>
@@ -18761,64 +23226,80 @@
           <a:p>
             <a:pPr>
               <a:spcAft>
-                <a:spcPts val="1200"/>
+                <a:spcPts val="800"/>
               </a:spcAft>
             </a:pPr>
             <a:r>
-              <a:rPr sz="2200">
+              <a:rPr sz="1600">
                 <a:solidFill>
                   <a:srgbClr val="1F2937"/>
                 </a:solidFill>
                 <a:latin typeface="Calibri"/>
               </a:rPr>
-              <a:t>▸  Ob’ektdagi chinni parchasi ko‘rinishidagi qo‘shimcha pinset bilan ajratilib, ingichka shisha probirkaga solinadi, kichik ko‘mir parchasi qo‘shilib kuchsiz alangada qizdiriladi.</a:t>
+              <a:t>▸  Ob’ektdagi chinni parchasi ko‘rinishidagi qo‘shimcha pinset bilan ajratib olinadi.</a:t>
             </a:r>
           </a:p>
           <a:p>
             <a:pPr>
               <a:spcAft>
-                <a:spcPts val="1200"/>
+                <a:spcPts val="800"/>
               </a:spcAft>
             </a:pPr>
             <a:r>
-              <a:rPr sz="2200">
+              <a:rPr sz="1600">
                 <a:solidFill>
                   <a:srgbClr val="1F2937"/>
                 </a:solidFill>
                 <a:latin typeface="Calibri"/>
               </a:rPr>
-              <a:t>▸  Qizdirishdan oldin probirkaning yuqori qismi tozalangan suvda namlangan qog‘oz yoki doka bilan o‘raladi.</a:t>
+              <a:t>▸  Ingichka shisha probirkaga solinadi, kichik ko‘mir parchasi qo‘shilib kuchsiz alangada qizdiriladi.</a:t>
             </a:r>
           </a:p>
           <a:p>
             <a:pPr>
               <a:spcAft>
-                <a:spcPts val="1200"/>
+                <a:spcPts val="800"/>
               </a:spcAft>
             </a:pPr>
             <a:r>
-              <a:rPr sz="2200">
+              <a:rPr sz="1600">
                 <a:solidFill>
                   <a:srgbClr val="1F2937"/>
                 </a:solidFill>
                 <a:latin typeface="Calibri"/>
               </a:rPr>
-              <a:t>▸  Namlangan qism ochilganda devorda qoramtir-kul rangli dog‘ bo‘lsa, oq mishyak borligidan dalolat beradi.</a:t>
+              <a:t>▸  Qizdirishdan oldin probirkaning yuqori qismi tozalangan suvda namlangan qog‘oz yoki doka bilan o‘raladi.</a:t>
             </a:r>
           </a:p>
           <a:p>
             <a:pPr>
               <a:spcAft>
-                <a:spcPts val="1200"/>
+                <a:spcPts val="800"/>
               </a:spcAft>
             </a:pPr>
             <a:r>
-              <a:rPr sz="2200">
+              <a:rPr sz="1600">
                 <a:solidFill>
                   <a:srgbClr val="1F2937"/>
                 </a:solidFill>
                 <a:latin typeface="Calibri"/>
               </a:rPr>
+              <a:t>▸  Namlangan qism ochilganda devorda qoramtir-kul rangli dog‘ bo‘lsa, oq mishyak borligidan dalolat beradi.</a:t>
+            </a:r>
+          </a:p>
+          <a:p>
+            <a:pPr>
+              <a:spcAft>
+                <a:spcPts val="800"/>
+              </a:spcAft>
+            </a:pPr>
+            <a:r>
+              <a:rPr sz="1600">
+                <a:solidFill>
+                  <a:srgbClr val="1F2937"/>
+                </a:solidFill>
+                <a:latin typeface="Calibri"/>
+              </a:rPr>
               <a:t>▸  Tajribani yakunlash uchun probirka uchi sindiriladi, qoramtir dog‘ joyi qizdiriladi, boshqa joyi sovitiladi; sovitilgan joyda oq dog‘ hosil bo‘ladi.</a:t>
             </a:r>
           </a:p>
@@ -18826,7 +23307,841 @@
       </p:sp>
       <p:sp>
         <p:nvSpPr>
-          <p:cNvPr id="9" name="TextBox 8"/>
+          <p:cNvPr id="9" name="Rounded Rectangle 8"/>
+          <p:cNvSpPr/>
+          <p:nvPr/>
+        </p:nvSpPr>
+        <p:spPr>
+          <a:xfrm>
+            <a:off x="5440680" y="1417320"/>
+            <a:ext cx="2973171" cy="1255776"/>
+          </a:xfrm>
+          <a:prstGeom prst="roundRect">
+            <a:avLst>
+              <a:gd name="adj" fmla="val 8000"/>
+            </a:avLst>
+          </a:prstGeom>
+          <a:solidFill>
+            <a:srgbClr val="FFFFFF"/>
+          </a:solidFill>
+          <a:ln w="15875">
+            <a:solidFill>
+              <a:srgbClr val="E8EEF6"/>
+            </a:solidFill>
+          </a:ln>
+          <a:effectLst/>
+        </p:spPr>
+        <p:style>
+          <a:lnRef idx="1">
+            <a:schemeClr val="accent1"/>
+          </a:lnRef>
+          <a:fillRef idx="3">
+            <a:schemeClr val="accent1"/>
+          </a:fillRef>
+          <a:effectRef idx="2">
+            <a:schemeClr val="accent1"/>
+          </a:effectRef>
+          <a:fontRef idx="minor">
+            <a:schemeClr val="lt1"/>
+          </a:fontRef>
+        </p:style>
+        <p:txBody>
+          <a:bodyPr rtlCol="0" anchor="ctr"/>
+          <a:lstStyle/>
+          <a:p>
+            <a:pPr algn="ctr"/>
+          </a:p>
+        </p:txBody>
+      </p:sp>
+      <p:sp>
+        <p:nvSpPr>
+          <p:cNvPr id="10" name="Oval 9"/>
+          <p:cNvSpPr/>
+          <p:nvPr/>
+        </p:nvSpPr>
+        <p:spPr>
+          <a:xfrm>
+            <a:off x="5550408" y="1816608"/>
+            <a:ext cx="457200" cy="457200"/>
+          </a:xfrm>
+          <a:prstGeom prst="ellipse">
+            <a:avLst/>
+          </a:prstGeom>
+          <a:solidFill>
+            <a:srgbClr val="0B1F3A"/>
+          </a:solidFill>
+          <a:ln>
+            <a:noFill/>
+          </a:ln>
+          <a:effectLst/>
+        </p:spPr>
+        <p:style>
+          <a:lnRef idx="1">
+            <a:schemeClr val="accent1"/>
+          </a:lnRef>
+          <a:fillRef idx="3">
+            <a:schemeClr val="accent1"/>
+          </a:fillRef>
+          <a:effectRef idx="2">
+            <a:schemeClr val="accent1"/>
+          </a:effectRef>
+          <a:fontRef idx="minor">
+            <a:schemeClr val="lt1"/>
+          </a:fontRef>
+        </p:style>
+        <p:txBody>
+          <a:bodyPr rtlCol="0" anchor="ctr" wrap="square" lIns="0" rIns="0" tIns="36576" bIns="36576"/>
+          <a:lstStyle/>
+          <a:p>
+            <a:pPr algn="ctr">
+              <a:spcAft>
+                <a:spcPts val="200"/>
+              </a:spcAft>
+            </a:pPr>
+            <a:r>
+              <a:rPr sz="1600" b="1">
+                <a:solidFill>
+                  <a:srgbClr val="FFFFFF"/>
+                </a:solidFill>
+                <a:latin typeface="Calibri"/>
+              </a:rPr>
+              <a:t>1</a:t>
+            </a:r>
+          </a:p>
+        </p:txBody>
+      </p:sp>
+      <p:sp>
+        <p:nvSpPr>
+          <p:cNvPr id="11" name="TextBox 10"/>
+          <p:cNvSpPr txBox="1"/>
+          <p:nvPr/>
+        </p:nvSpPr>
+        <p:spPr>
+          <a:xfrm>
+            <a:off x="6080760" y="1417320"/>
+            <a:ext cx="2259939" cy="1255776"/>
+          </a:xfrm>
+          <a:prstGeom prst="rect">
+            <a:avLst/>
+          </a:prstGeom>
+          <a:noFill/>
+        </p:spPr>
+        <p:txBody>
+          <a:bodyPr wrap="square" anchor="ctr" lIns="18288" rIns="18288" tIns="36576" bIns="36576">
+            <a:spAutoFit/>
+          </a:bodyPr>
+          <a:lstStyle/>
+          <a:p>
+            <a:pPr algn="l">
+              <a:spcAft>
+                <a:spcPts val="200"/>
+              </a:spcAft>
+            </a:pPr>
+            <a:r>
+              <a:rPr sz="1600" b="1">
+                <a:solidFill>
+                  <a:srgbClr val="0B1F3A"/>
+                </a:solidFill>
+                <a:latin typeface="Calibri"/>
+              </a:rPr>
+              <a:t>Ajratish</a:t>
+            </a:r>
+          </a:p>
+          <a:p>
+            <a:pPr algn="l">
+              <a:spcAft>
+                <a:spcPts val="200"/>
+              </a:spcAft>
+            </a:pPr>
+            <a:r>
+              <a:rPr sz="1400" b="0">
+                <a:solidFill>
+                  <a:srgbClr val="1F2937"/>
+                </a:solidFill>
+                <a:latin typeface="Calibri"/>
+              </a:rPr>
+              <a:t>Chinni parchasi pinset bilan</a:t>
+            </a:r>
+          </a:p>
+        </p:txBody>
+      </p:sp>
+      <p:sp>
+        <p:nvSpPr>
+          <p:cNvPr id="12" name="Rounded Rectangle 11"/>
+          <p:cNvSpPr/>
+          <p:nvPr/>
+        </p:nvSpPr>
+        <p:spPr>
+          <a:xfrm>
+            <a:off x="8578443" y="1417320"/>
+            <a:ext cx="2973171" cy="1255776"/>
+          </a:xfrm>
+          <a:prstGeom prst="roundRect">
+            <a:avLst>
+              <a:gd name="adj" fmla="val 8000"/>
+            </a:avLst>
+          </a:prstGeom>
+          <a:solidFill>
+            <a:srgbClr val="FFFFFF"/>
+          </a:solidFill>
+          <a:ln w="15875">
+            <a:solidFill>
+              <a:srgbClr val="E8EEF6"/>
+            </a:solidFill>
+          </a:ln>
+          <a:effectLst/>
+        </p:spPr>
+        <p:style>
+          <a:lnRef idx="1">
+            <a:schemeClr val="accent1"/>
+          </a:lnRef>
+          <a:fillRef idx="3">
+            <a:schemeClr val="accent1"/>
+          </a:fillRef>
+          <a:effectRef idx="2">
+            <a:schemeClr val="accent1"/>
+          </a:effectRef>
+          <a:fontRef idx="minor">
+            <a:schemeClr val="lt1"/>
+          </a:fontRef>
+        </p:style>
+        <p:txBody>
+          <a:bodyPr rtlCol="0" anchor="ctr"/>
+          <a:lstStyle/>
+          <a:p>
+            <a:pPr algn="ctr"/>
+          </a:p>
+        </p:txBody>
+      </p:sp>
+      <p:sp>
+        <p:nvSpPr>
+          <p:cNvPr id="13" name="Oval 12"/>
+          <p:cNvSpPr/>
+          <p:nvPr/>
+        </p:nvSpPr>
+        <p:spPr>
+          <a:xfrm>
+            <a:off x="8688171" y="1816608"/>
+            <a:ext cx="457200" cy="457200"/>
+          </a:xfrm>
+          <a:prstGeom prst="ellipse">
+            <a:avLst/>
+          </a:prstGeom>
+          <a:solidFill>
+            <a:srgbClr val="0B1F3A"/>
+          </a:solidFill>
+          <a:ln>
+            <a:noFill/>
+          </a:ln>
+          <a:effectLst/>
+        </p:spPr>
+        <p:style>
+          <a:lnRef idx="1">
+            <a:schemeClr val="accent1"/>
+          </a:lnRef>
+          <a:fillRef idx="3">
+            <a:schemeClr val="accent1"/>
+          </a:fillRef>
+          <a:effectRef idx="2">
+            <a:schemeClr val="accent1"/>
+          </a:effectRef>
+          <a:fontRef idx="minor">
+            <a:schemeClr val="lt1"/>
+          </a:fontRef>
+        </p:style>
+        <p:txBody>
+          <a:bodyPr rtlCol="0" anchor="ctr" wrap="square" lIns="0" rIns="0" tIns="36576" bIns="36576"/>
+          <a:lstStyle/>
+          <a:p>
+            <a:pPr algn="ctr">
+              <a:spcAft>
+                <a:spcPts val="200"/>
+              </a:spcAft>
+            </a:pPr>
+            <a:r>
+              <a:rPr sz="1600" b="1">
+                <a:solidFill>
+                  <a:srgbClr val="FFFFFF"/>
+                </a:solidFill>
+                <a:latin typeface="Calibri"/>
+              </a:rPr>
+              <a:t>2</a:t>
+            </a:r>
+          </a:p>
+        </p:txBody>
+      </p:sp>
+      <p:sp>
+        <p:nvSpPr>
+          <p:cNvPr id="14" name="TextBox 13"/>
+          <p:cNvSpPr txBox="1"/>
+          <p:nvPr/>
+        </p:nvSpPr>
+        <p:spPr>
+          <a:xfrm>
+            <a:off x="9218523" y="1417320"/>
+            <a:ext cx="2259939" cy="1255776"/>
+          </a:xfrm>
+          <a:prstGeom prst="rect">
+            <a:avLst/>
+          </a:prstGeom>
+          <a:noFill/>
+        </p:spPr>
+        <p:txBody>
+          <a:bodyPr wrap="square" anchor="ctr" lIns="18288" rIns="18288" tIns="36576" bIns="36576">
+            <a:spAutoFit/>
+          </a:bodyPr>
+          <a:lstStyle/>
+          <a:p>
+            <a:pPr algn="l">
+              <a:spcAft>
+                <a:spcPts val="200"/>
+              </a:spcAft>
+            </a:pPr>
+            <a:r>
+              <a:rPr sz="1600" b="1">
+                <a:solidFill>
+                  <a:srgbClr val="0B1F3A"/>
+                </a:solidFill>
+                <a:latin typeface="Calibri"/>
+              </a:rPr>
+              <a:t>Qizdirish</a:t>
+            </a:r>
+          </a:p>
+          <a:p>
+            <a:pPr algn="l">
+              <a:spcAft>
+                <a:spcPts val="200"/>
+              </a:spcAft>
+            </a:pPr>
+            <a:r>
+              <a:rPr sz="1400" b="0">
+                <a:solidFill>
+                  <a:srgbClr val="1F2937"/>
+                </a:solidFill>
+                <a:latin typeface="Calibri"/>
+              </a:rPr>
+              <a:t>Probirkada ko‘mir bilan, kuchsiz alanga</a:t>
+            </a:r>
+          </a:p>
+        </p:txBody>
+      </p:sp>
+      <p:sp>
+        <p:nvSpPr>
+          <p:cNvPr id="15" name="Rounded Rectangle 14"/>
+          <p:cNvSpPr/>
+          <p:nvPr/>
+        </p:nvSpPr>
+        <p:spPr>
+          <a:xfrm>
+            <a:off x="5440680" y="2801112"/>
+            <a:ext cx="2973171" cy="1255776"/>
+          </a:xfrm>
+          <a:prstGeom prst="roundRect">
+            <a:avLst>
+              <a:gd name="adj" fmla="val 8000"/>
+            </a:avLst>
+          </a:prstGeom>
+          <a:solidFill>
+            <a:srgbClr val="FFFFFF"/>
+          </a:solidFill>
+          <a:ln w="15875">
+            <a:solidFill>
+              <a:srgbClr val="E8EEF6"/>
+            </a:solidFill>
+          </a:ln>
+          <a:effectLst/>
+        </p:spPr>
+        <p:style>
+          <a:lnRef idx="1">
+            <a:schemeClr val="accent1"/>
+          </a:lnRef>
+          <a:fillRef idx="3">
+            <a:schemeClr val="accent1"/>
+          </a:fillRef>
+          <a:effectRef idx="2">
+            <a:schemeClr val="accent1"/>
+          </a:effectRef>
+          <a:fontRef idx="minor">
+            <a:schemeClr val="lt1"/>
+          </a:fontRef>
+        </p:style>
+        <p:txBody>
+          <a:bodyPr rtlCol="0" anchor="ctr"/>
+          <a:lstStyle/>
+          <a:p>
+            <a:pPr algn="ctr"/>
+          </a:p>
+        </p:txBody>
+      </p:sp>
+      <p:sp>
+        <p:nvSpPr>
+          <p:cNvPr id="16" name="Oval 15"/>
+          <p:cNvSpPr/>
+          <p:nvPr/>
+        </p:nvSpPr>
+        <p:spPr>
+          <a:xfrm>
+            <a:off x="5550408" y="3200400"/>
+            <a:ext cx="457200" cy="457200"/>
+          </a:xfrm>
+          <a:prstGeom prst="ellipse">
+            <a:avLst/>
+          </a:prstGeom>
+          <a:solidFill>
+            <a:srgbClr val="0B1F3A"/>
+          </a:solidFill>
+          <a:ln>
+            <a:noFill/>
+          </a:ln>
+          <a:effectLst/>
+        </p:spPr>
+        <p:style>
+          <a:lnRef idx="1">
+            <a:schemeClr val="accent1"/>
+          </a:lnRef>
+          <a:fillRef idx="3">
+            <a:schemeClr val="accent1"/>
+          </a:fillRef>
+          <a:effectRef idx="2">
+            <a:schemeClr val="accent1"/>
+          </a:effectRef>
+          <a:fontRef idx="minor">
+            <a:schemeClr val="lt1"/>
+          </a:fontRef>
+        </p:style>
+        <p:txBody>
+          <a:bodyPr rtlCol="0" anchor="ctr" wrap="square" lIns="0" rIns="0" tIns="36576" bIns="36576"/>
+          <a:lstStyle/>
+          <a:p>
+            <a:pPr algn="ctr">
+              <a:spcAft>
+                <a:spcPts val="200"/>
+              </a:spcAft>
+            </a:pPr>
+            <a:r>
+              <a:rPr sz="1600" b="1">
+                <a:solidFill>
+                  <a:srgbClr val="FFFFFF"/>
+                </a:solidFill>
+                <a:latin typeface="Calibri"/>
+              </a:rPr>
+              <a:t>3</a:t>
+            </a:r>
+          </a:p>
+        </p:txBody>
+      </p:sp>
+      <p:sp>
+        <p:nvSpPr>
+          <p:cNvPr id="17" name="TextBox 16"/>
+          <p:cNvSpPr txBox="1"/>
+          <p:nvPr/>
+        </p:nvSpPr>
+        <p:spPr>
+          <a:xfrm>
+            <a:off x="6080760" y="2801112"/>
+            <a:ext cx="2259939" cy="1255776"/>
+          </a:xfrm>
+          <a:prstGeom prst="rect">
+            <a:avLst/>
+          </a:prstGeom>
+          <a:noFill/>
+        </p:spPr>
+        <p:txBody>
+          <a:bodyPr wrap="square" anchor="ctr" lIns="18288" rIns="18288" tIns="36576" bIns="36576">
+            <a:spAutoFit/>
+          </a:bodyPr>
+          <a:lstStyle/>
+          <a:p>
+            <a:pPr algn="l">
+              <a:spcAft>
+                <a:spcPts val="200"/>
+              </a:spcAft>
+            </a:pPr>
+            <a:r>
+              <a:rPr sz="1600" b="1">
+                <a:solidFill>
+                  <a:srgbClr val="0B1F3A"/>
+                </a:solidFill>
+                <a:latin typeface="Calibri"/>
+              </a:rPr>
+              <a:t>Namlangan qog‘oz</a:t>
+            </a:r>
+          </a:p>
+          <a:p>
+            <a:pPr algn="l">
+              <a:spcAft>
+                <a:spcPts val="200"/>
+              </a:spcAft>
+            </a:pPr>
+            <a:r>
+              <a:rPr sz="1400" b="0">
+                <a:solidFill>
+                  <a:srgbClr val="1F2937"/>
+                </a:solidFill>
+                <a:latin typeface="Calibri"/>
+              </a:rPr>
+              <a:t>Yuqori qism o‘raladi</a:t>
+            </a:r>
+          </a:p>
+        </p:txBody>
+      </p:sp>
+      <p:sp>
+        <p:nvSpPr>
+          <p:cNvPr id="18" name="Rounded Rectangle 17"/>
+          <p:cNvSpPr/>
+          <p:nvPr/>
+        </p:nvSpPr>
+        <p:spPr>
+          <a:xfrm>
+            <a:off x="8578443" y="2801112"/>
+            <a:ext cx="2973171" cy="1255776"/>
+          </a:xfrm>
+          <a:prstGeom prst="roundRect">
+            <a:avLst>
+              <a:gd name="adj" fmla="val 8000"/>
+            </a:avLst>
+          </a:prstGeom>
+          <a:solidFill>
+            <a:srgbClr val="FFFFFF"/>
+          </a:solidFill>
+          <a:ln w="15875">
+            <a:solidFill>
+              <a:srgbClr val="E8EEF6"/>
+            </a:solidFill>
+          </a:ln>
+          <a:effectLst/>
+        </p:spPr>
+        <p:style>
+          <a:lnRef idx="1">
+            <a:schemeClr val="accent1"/>
+          </a:lnRef>
+          <a:fillRef idx="3">
+            <a:schemeClr val="accent1"/>
+          </a:fillRef>
+          <a:effectRef idx="2">
+            <a:schemeClr val="accent1"/>
+          </a:effectRef>
+          <a:fontRef idx="minor">
+            <a:schemeClr val="lt1"/>
+          </a:fontRef>
+        </p:style>
+        <p:txBody>
+          <a:bodyPr rtlCol="0" anchor="ctr"/>
+          <a:lstStyle/>
+          <a:p>
+            <a:pPr algn="ctr"/>
+          </a:p>
+        </p:txBody>
+      </p:sp>
+      <p:sp>
+        <p:nvSpPr>
+          <p:cNvPr id="19" name="Oval 18"/>
+          <p:cNvSpPr/>
+          <p:nvPr/>
+        </p:nvSpPr>
+        <p:spPr>
+          <a:xfrm>
+            <a:off x="8688171" y="3200400"/>
+            <a:ext cx="457200" cy="457200"/>
+          </a:xfrm>
+          <a:prstGeom prst="ellipse">
+            <a:avLst/>
+          </a:prstGeom>
+          <a:solidFill>
+            <a:srgbClr val="0B1F3A"/>
+          </a:solidFill>
+          <a:ln>
+            <a:noFill/>
+          </a:ln>
+          <a:effectLst/>
+        </p:spPr>
+        <p:style>
+          <a:lnRef idx="1">
+            <a:schemeClr val="accent1"/>
+          </a:lnRef>
+          <a:fillRef idx="3">
+            <a:schemeClr val="accent1"/>
+          </a:fillRef>
+          <a:effectRef idx="2">
+            <a:schemeClr val="accent1"/>
+          </a:effectRef>
+          <a:fontRef idx="minor">
+            <a:schemeClr val="lt1"/>
+          </a:fontRef>
+        </p:style>
+        <p:txBody>
+          <a:bodyPr rtlCol="0" anchor="ctr" wrap="square" lIns="0" rIns="0" tIns="36576" bIns="36576"/>
+          <a:lstStyle/>
+          <a:p>
+            <a:pPr algn="ctr">
+              <a:spcAft>
+                <a:spcPts val="200"/>
+              </a:spcAft>
+            </a:pPr>
+            <a:r>
+              <a:rPr sz="1600" b="1">
+                <a:solidFill>
+                  <a:srgbClr val="FFFFFF"/>
+                </a:solidFill>
+                <a:latin typeface="Calibri"/>
+              </a:rPr>
+              <a:t>4</a:t>
+            </a:r>
+          </a:p>
+        </p:txBody>
+      </p:sp>
+      <p:sp>
+        <p:nvSpPr>
+          <p:cNvPr id="20" name="TextBox 19"/>
+          <p:cNvSpPr txBox="1"/>
+          <p:nvPr/>
+        </p:nvSpPr>
+        <p:spPr>
+          <a:xfrm>
+            <a:off x="9218523" y="2801112"/>
+            <a:ext cx="2259939" cy="1255776"/>
+          </a:xfrm>
+          <a:prstGeom prst="rect">
+            <a:avLst/>
+          </a:prstGeom>
+          <a:noFill/>
+        </p:spPr>
+        <p:txBody>
+          <a:bodyPr wrap="square" anchor="ctr" lIns="18288" rIns="18288" tIns="36576" bIns="36576">
+            <a:spAutoFit/>
+          </a:bodyPr>
+          <a:lstStyle/>
+          <a:p>
+            <a:pPr algn="l">
+              <a:spcAft>
+                <a:spcPts val="200"/>
+              </a:spcAft>
+            </a:pPr>
+            <a:r>
+              <a:rPr sz="1600" b="1">
+                <a:solidFill>
+                  <a:srgbClr val="0B1F3A"/>
+                </a:solidFill>
+                <a:latin typeface="Calibri"/>
+              </a:rPr>
+              <a:t>Natija</a:t>
+            </a:r>
+          </a:p>
+          <a:p>
+            <a:pPr algn="l">
+              <a:spcAft>
+                <a:spcPts val="200"/>
+              </a:spcAft>
+            </a:pPr>
+            <a:r>
+              <a:rPr sz="1400" b="0">
+                <a:solidFill>
+                  <a:srgbClr val="1F2937"/>
+                </a:solidFill>
+                <a:latin typeface="Calibri"/>
+              </a:rPr>
+              <a:t>Qoramtir-kul rang dog‘</a:t>
+            </a:r>
+          </a:p>
+        </p:txBody>
+      </p:sp>
+      <p:sp>
+        <p:nvSpPr>
+          <p:cNvPr id="21" name="Rounded Rectangle 20"/>
+          <p:cNvSpPr/>
+          <p:nvPr/>
+        </p:nvSpPr>
+        <p:spPr>
+          <a:xfrm>
+            <a:off x="5440680" y="4184904"/>
+            <a:ext cx="2973171" cy="1255776"/>
+          </a:xfrm>
+          <a:prstGeom prst="roundRect">
+            <a:avLst>
+              <a:gd name="adj" fmla="val 8000"/>
+            </a:avLst>
+          </a:prstGeom>
+          <a:solidFill>
+            <a:srgbClr val="FFFFFF"/>
+          </a:solidFill>
+          <a:ln w="15875">
+            <a:solidFill>
+              <a:srgbClr val="E8EEF6"/>
+            </a:solidFill>
+          </a:ln>
+          <a:effectLst/>
+        </p:spPr>
+        <p:style>
+          <a:lnRef idx="1">
+            <a:schemeClr val="accent1"/>
+          </a:lnRef>
+          <a:fillRef idx="3">
+            <a:schemeClr val="accent1"/>
+          </a:fillRef>
+          <a:effectRef idx="2">
+            <a:schemeClr val="accent1"/>
+          </a:effectRef>
+          <a:fontRef idx="minor">
+            <a:schemeClr val="lt1"/>
+          </a:fontRef>
+        </p:style>
+        <p:txBody>
+          <a:bodyPr rtlCol="0" anchor="ctr"/>
+          <a:lstStyle/>
+          <a:p>
+            <a:pPr algn="ctr"/>
+          </a:p>
+        </p:txBody>
+      </p:sp>
+      <p:sp>
+        <p:nvSpPr>
+          <p:cNvPr id="22" name="Oval 21"/>
+          <p:cNvSpPr/>
+          <p:nvPr/>
+        </p:nvSpPr>
+        <p:spPr>
+          <a:xfrm>
+            <a:off x="5550408" y="4584192"/>
+            <a:ext cx="457200" cy="457200"/>
+          </a:xfrm>
+          <a:prstGeom prst="ellipse">
+            <a:avLst/>
+          </a:prstGeom>
+          <a:solidFill>
+            <a:srgbClr val="0B1F3A"/>
+          </a:solidFill>
+          <a:ln>
+            <a:noFill/>
+          </a:ln>
+          <a:effectLst/>
+        </p:spPr>
+        <p:style>
+          <a:lnRef idx="1">
+            <a:schemeClr val="accent1"/>
+          </a:lnRef>
+          <a:fillRef idx="3">
+            <a:schemeClr val="accent1"/>
+          </a:fillRef>
+          <a:effectRef idx="2">
+            <a:schemeClr val="accent1"/>
+          </a:effectRef>
+          <a:fontRef idx="minor">
+            <a:schemeClr val="lt1"/>
+          </a:fontRef>
+        </p:style>
+        <p:txBody>
+          <a:bodyPr rtlCol="0" anchor="ctr" wrap="square" lIns="0" rIns="0" tIns="36576" bIns="36576"/>
+          <a:lstStyle/>
+          <a:p>
+            <a:pPr algn="ctr">
+              <a:spcAft>
+                <a:spcPts val="200"/>
+              </a:spcAft>
+            </a:pPr>
+            <a:r>
+              <a:rPr sz="1600" b="1">
+                <a:solidFill>
+                  <a:srgbClr val="FFFFFF"/>
+                </a:solidFill>
+                <a:latin typeface="Calibri"/>
+              </a:rPr>
+              <a:t>5</a:t>
+            </a:r>
+          </a:p>
+        </p:txBody>
+      </p:sp>
+      <p:sp>
+        <p:nvSpPr>
+          <p:cNvPr id="23" name="TextBox 22"/>
+          <p:cNvSpPr txBox="1"/>
+          <p:nvPr/>
+        </p:nvSpPr>
+        <p:spPr>
+          <a:xfrm>
+            <a:off x="6080760" y="4184904"/>
+            <a:ext cx="2259939" cy="1255776"/>
+          </a:xfrm>
+          <a:prstGeom prst="rect">
+            <a:avLst/>
+          </a:prstGeom>
+          <a:noFill/>
+        </p:spPr>
+        <p:txBody>
+          <a:bodyPr wrap="square" anchor="ctr" lIns="18288" rIns="18288" tIns="36576" bIns="36576">
+            <a:spAutoFit/>
+          </a:bodyPr>
+          <a:lstStyle/>
+          <a:p>
+            <a:pPr algn="l">
+              <a:spcAft>
+                <a:spcPts val="200"/>
+              </a:spcAft>
+            </a:pPr>
+            <a:r>
+              <a:rPr sz="1600" b="1">
+                <a:solidFill>
+                  <a:srgbClr val="0B1F3A"/>
+                </a:solidFill>
+                <a:latin typeface="Calibri"/>
+              </a:rPr>
+              <a:t>Tasdiq</a:t>
+            </a:r>
+          </a:p>
+          <a:p>
+            <a:pPr algn="l">
+              <a:spcAft>
+                <a:spcPts val="200"/>
+              </a:spcAft>
+            </a:pPr>
+            <a:r>
+              <a:rPr sz="1400" b="0">
+                <a:solidFill>
+                  <a:srgbClr val="1F2937"/>
+                </a:solidFill>
+                <a:latin typeface="Calibri"/>
+              </a:rPr>
+              <a:t>Uchi sindirilsa, sovigan joyda oq dog‘</a:t>
+            </a:r>
+          </a:p>
+        </p:txBody>
+      </p:sp>
+      <p:sp>
+        <p:nvSpPr>
+          <p:cNvPr id="24" name="TextBox 23"/>
+          <p:cNvSpPr txBox="1"/>
+          <p:nvPr/>
+        </p:nvSpPr>
+        <p:spPr>
+          <a:xfrm>
+            <a:off x="5440680" y="5486400"/>
+            <a:ext cx="6110935" cy="365760"/>
+          </a:xfrm>
+          <a:prstGeom prst="rect">
+            <a:avLst/>
+          </a:prstGeom>
+          <a:noFill/>
+        </p:spPr>
+        <p:txBody>
+          <a:bodyPr wrap="square">
+            <a:spAutoFit/>
+          </a:bodyPr>
+          <a:lstStyle/>
+          <a:p>
+            <a:r>
+              <a:rPr sz="1200" b="0">
+                <a:solidFill>
+                  <a:srgbClr val="6B7280"/>
+                </a:solidFill>
+                <a:latin typeface="Calibri"/>
+              </a:rPr>
+              <a:t>Oq mishyakka dastlabki sinov</a:t>
+            </a:r>
+          </a:p>
+        </p:txBody>
+      </p:sp>
+      <p:sp>
+        <p:nvSpPr>
+          <p:cNvPr id="25" name="TextBox 24"/>
           <p:cNvSpPr txBox="1"/>
           <p:nvPr/>
         </p:nvSpPr>
@@ -19120,7 +24435,7 @@
         <p:spPr>
           <a:xfrm>
             <a:off x="640080" y="1417320"/>
-            <a:ext cx="10911535" cy="4480560"/>
+            <a:ext cx="4572000" cy="4480560"/>
           </a:xfrm>
           <a:prstGeom prst="rect">
             <a:avLst/>
@@ -19135,11 +24450,11 @@
           <a:p>
             <a:pPr>
               <a:spcAft>
-                <a:spcPts val="1200"/>
+                <a:spcPts val="800"/>
               </a:spcAft>
             </a:pPr>
             <a:r>
-              <a:rPr sz="2200">
+              <a:rPr sz="1800">
                 <a:solidFill>
                   <a:srgbClr val="1F2937"/>
                 </a:solidFill>
@@ -19151,11 +24466,11 @@
           <a:p>
             <a:pPr>
               <a:spcAft>
-                <a:spcPts val="1200"/>
+                <a:spcPts val="800"/>
               </a:spcAft>
             </a:pPr>
             <a:r>
-              <a:rPr sz="2200">
+              <a:rPr sz="1800">
                 <a:solidFill>
                   <a:srgbClr val="1F2937"/>
                 </a:solidFill>
@@ -19167,11 +24482,11 @@
           <a:p>
             <a:pPr>
               <a:spcAft>
-                <a:spcPts val="1200"/>
+                <a:spcPts val="800"/>
               </a:spcAft>
             </a:pPr>
             <a:r>
-              <a:rPr sz="2200">
+              <a:rPr sz="1800">
                 <a:solidFill>
                   <a:srgbClr val="1F2937"/>
                 </a:solidFill>
@@ -19183,11 +24498,11 @@
           <a:p>
             <a:pPr>
               <a:spcAft>
-                <a:spcPts val="1200"/>
+                <a:spcPts val="800"/>
               </a:spcAft>
             </a:pPr>
             <a:r>
-              <a:rPr sz="2200">
+              <a:rPr sz="1800">
                 <a:solidFill>
                   <a:srgbClr val="1F2937"/>
                 </a:solidFill>
@@ -19200,7 +24515,480 @@
       </p:sp>
       <p:sp>
         <p:nvSpPr>
-          <p:cNvPr id="9" name="TextBox 8"/>
+          <p:cNvPr id="9" name="Rounded Rectangle 8"/>
+          <p:cNvSpPr/>
+          <p:nvPr/>
+        </p:nvSpPr>
+        <p:spPr>
+          <a:xfrm>
+            <a:off x="5440680" y="1417320"/>
+            <a:ext cx="2278227" cy="856488"/>
+          </a:xfrm>
+          <a:prstGeom prst="roundRect">
+            <a:avLst/>
+          </a:prstGeom>
+          <a:solidFill>
+            <a:srgbClr val="0B1F3A"/>
+          </a:solidFill>
+          <a:ln>
+            <a:noFill/>
+          </a:ln>
+          <a:effectLst/>
+        </p:spPr>
+        <p:style>
+          <a:lnRef idx="1">
+            <a:schemeClr val="accent1"/>
+          </a:lnRef>
+          <a:fillRef idx="3">
+            <a:schemeClr val="accent1"/>
+          </a:fillRef>
+          <a:effectRef idx="2">
+            <a:schemeClr val="accent1"/>
+          </a:effectRef>
+          <a:fontRef idx="minor">
+            <a:schemeClr val="lt1"/>
+          </a:fontRef>
+        </p:style>
+        <p:txBody>
+          <a:bodyPr rtlCol="0" anchor="ctr" wrap="square" tIns="36576" bIns="36576"/>
+          <a:lstStyle/>
+          <a:p>
+            <a:pPr algn="ctr">
+              <a:spcAft>
+                <a:spcPts val="200"/>
+              </a:spcAft>
+            </a:pPr>
+            <a:r>
+              <a:rPr sz="1700" b="1">
+                <a:solidFill>
+                  <a:srgbClr val="FFFFFF"/>
+                </a:solidFill>
+                <a:latin typeface="Calibri"/>
+              </a:rPr>
+              <a:t>Ob’ekt + oksalat kislota</a:t>
+            </a:r>
+          </a:p>
+        </p:txBody>
+      </p:sp>
+      <p:sp>
+        <p:nvSpPr>
+          <p:cNvPr id="10" name="TextBox 9"/>
+          <p:cNvSpPr txBox="1"/>
+          <p:nvPr/>
+        </p:nvSpPr>
+        <p:spPr>
+          <a:xfrm>
+            <a:off x="5440680" y="2273808"/>
+            <a:ext cx="2278227" cy="292608"/>
+          </a:xfrm>
+          <a:prstGeom prst="rect">
+            <a:avLst/>
+          </a:prstGeom>
+          <a:noFill/>
+        </p:spPr>
+        <p:txBody>
+          <a:bodyPr wrap="square" anchor="ctr">
+            <a:spAutoFit/>
+          </a:bodyPr>
+          <a:lstStyle/>
+          <a:p>
+            <a:pPr algn="ctr"/>
+            <a:r>
+              <a:rPr sz="1600" b="1">
+                <a:solidFill>
+                  <a:srgbClr val="C9A227"/>
+                </a:solidFill>
+                <a:latin typeface="Calibri"/>
+              </a:rPr>
+              <a:t>+</a:t>
+            </a:r>
+          </a:p>
+        </p:txBody>
+      </p:sp>
+      <p:sp>
+        <p:nvSpPr>
+          <p:cNvPr id="11" name="Rounded Rectangle 10"/>
+          <p:cNvSpPr/>
+          <p:nvPr/>
+        </p:nvSpPr>
+        <p:spPr>
+          <a:xfrm>
+            <a:off x="5440680" y="2566416"/>
+            <a:ext cx="2278227" cy="856488"/>
+          </a:xfrm>
+          <a:prstGeom prst="roundRect">
+            <a:avLst/>
+          </a:prstGeom>
+          <a:solidFill>
+            <a:srgbClr val="0B1F3A"/>
+          </a:solidFill>
+          <a:ln>
+            <a:noFill/>
+          </a:ln>
+          <a:effectLst/>
+        </p:spPr>
+        <p:style>
+          <a:lnRef idx="1">
+            <a:schemeClr val="accent1"/>
+          </a:lnRef>
+          <a:fillRef idx="3">
+            <a:schemeClr val="accent1"/>
+          </a:fillRef>
+          <a:effectRef idx="2">
+            <a:schemeClr val="accent1"/>
+          </a:effectRef>
+          <a:fontRef idx="minor">
+            <a:schemeClr val="lt1"/>
+          </a:fontRef>
+        </p:style>
+        <p:txBody>
+          <a:bodyPr rtlCol="0" anchor="ctr" wrap="square" tIns="36576" bIns="36576"/>
+          <a:lstStyle/>
+          <a:p>
+            <a:pPr algn="ctr">
+              <a:spcAft>
+                <a:spcPts val="200"/>
+              </a:spcAft>
+            </a:pPr>
+            <a:r>
+              <a:rPr sz="1700" b="1">
+                <a:solidFill>
+                  <a:srgbClr val="FFFFFF"/>
+                </a:solidFill>
+                <a:latin typeface="Calibri"/>
+              </a:rPr>
+              <a:t>Ishqor tomchisi (oynacha ostida)</a:t>
+            </a:r>
+          </a:p>
+        </p:txBody>
+      </p:sp>
+      <p:sp>
+        <p:nvSpPr>
+          <p:cNvPr id="12" name="TextBox 11"/>
+          <p:cNvSpPr txBox="1"/>
+          <p:nvPr/>
+        </p:nvSpPr>
+        <p:spPr>
+          <a:xfrm>
+            <a:off x="5440680" y="3422904"/>
+            <a:ext cx="2278227" cy="292608"/>
+          </a:xfrm>
+          <a:prstGeom prst="rect">
+            <a:avLst/>
+          </a:prstGeom>
+          <a:noFill/>
+        </p:spPr>
+        <p:txBody>
+          <a:bodyPr wrap="square" anchor="ctr">
+            <a:spAutoFit/>
+          </a:bodyPr>
+          <a:lstStyle/>
+          <a:p>
+            <a:pPr algn="ctr"/>
+            <a:r>
+              <a:rPr sz="1600" b="1">
+                <a:solidFill>
+                  <a:srgbClr val="C9A227"/>
+                </a:solidFill>
+                <a:latin typeface="Calibri"/>
+              </a:rPr>
+              <a:t>+</a:t>
+            </a:r>
+          </a:p>
+        </p:txBody>
+      </p:sp>
+      <p:sp>
+        <p:nvSpPr>
+          <p:cNvPr id="13" name="Rounded Rectangle 12"/>
+          <p:cNvSpPr/>
+          <p:nvPr/>
+        </p:nvSpPr>
+        <p:spPr>
+          <a:xfrm>
+            <a:off x="5440680" y="3715512"/>
+            <a:ext cx="2278227" cy="856488"/>
+          </a:xfrm>
+          <a:prstGeom prst="roundRect">
+            <a:avLst/>
+          </a:prstGeom>
+          <a:solidFill>
+            <a:srgbClr val="0B1F3A"/>
+          </a:solidFill>
+          <a:ln>
+            <a:noFill/>
+          </a:ln>
+          <a:effectLst/>
+        </p:spPr>
+        <p:style>
+          <a:lnRef idx="1">
+            <a:schemeClr val="accent1"/>
+          </a:lnRef>
+          <a:fillRef idx="3">
+            <a:schemeClr val="accent1"/>
+          </a:fillRef>
+          <a:effectRef idx="2">
+            <a:schemeClr val="accent1"/>
+          </a:effectRef>
+          <a:fontRef idx="minor">
+            <a:schemeClr val="lt1"/>
+          </a:fontRef>
+        </p:style>
+        <p:txBody>
+          <a:bodyPr rtlCol="0" anchor="ctr" wrap="square" tIns="36576" bIns="36576"/>
+          <a:lstStyle/>
+          <a:p>
+            <a:pPr algn="ctr">
+              <a:spcAft>
+                <a:spcPts val="200"/>
+              </a:spcAft>
+            </a:pPr>
+            <a:r>
+              <a:rPr sz="1700" b="1">
+                <a:solidFill>
+                  <a:srgbClr val="FFFFFF"/>
+                </a:solidFill>
+                <a:latin typeface="Calibri"/>
+              </a:rPr>
+              <a:t>FeCl3 + FeCl2 aralashmasi, HCl</a:t>
+            </a:r>
+          </a:p>
+        </p:txBody>
+      </p:sp>
+      <p:sp>
+        <p:nvSpPr>
+          <p:cNvPr id="14" name="Rounded Rectangle 13"/>
+          <p:cNvSpPr/>
+          <p:nvPr/>
+        </p:nvSpPr>
+        <p:spPr>
+          <a:xfrm>
+            <a:off x="9273387" y="2537460"/>
+            <a:ext cx="2278227" cy="914400"/>
+          </a:xfrm>
+          <a:prstGeom prst="roundRect">
+            <a:avLst/>
+          </a:prstGeom>
+          <a:solidFill>
+            <a:srgbClr val="1F4E79"/>
+          </a:solidFill>
+          <a:ln>
+            <a:noFill/>
+          </a:ln>
+          <a:effectLst/>
+        </p:spPr>
+        <p:style>
+          <a:lnRef idx="1">
+            <a:schemeClr val="accent1"/>
+          </a:lnRef>
+          <a:fillRef idx="3">
+            <a:schemeClr val="accent1"/>
+          </a:fillRef>
+          <a:effectRef idx="2">
+            <a:schemeClr val="accent1"/>
+          </a:effectRef>
+          <a:fontRef idx="minor">
+            <a:schemeClr val="lt1"/>
+          </a:fontRef>
+        </p:style>
+        <p:txBody>
+          <a:bodyPr rtlCol="0" anchor="ctr" wrap="square" tIns="36576" bIns="36576"/>
+          <a:lstStyle/>
+          <a:p>
+            <a:pPr algn="ctr">
+              <a:spcAft>
+                <a:spcPts val="200"/>
+              </a:spcAft>
+            </a:pPr>
+            <a:r>
+              <a:rPr sz="1700" b="1">
+                <a:solidFill>
+                  <a:srgbClr val="FFFFFF"/>
+                </a:solidFill>
+                <a:latin typeface="Calibri"/>
+              </a:rPr>
+              <a:t>Ko‘k rang (sianid kislota bor)</a:t>
+            </a:r>
+          </a:p>
+        </p:txBody>
+      </p:sp>
+      <p:cxnSp>
+        <p:nvCxnSpPr>
+          <p:cNvPr id="15" name="Connector 14"/>
+          <p:cNvCxnSpPr/>
+          <p:nvPr/>
+        </p:nvCxnSpPr>
+        <p:spPr>
+          <a:xfrm>
+            <a:off x="7810347" y="2994660"/>
+            <a:ext cx="1371600" cy="0"/>
+          </a:xfrm>
+          <a:prstGeom prst="line">
+            <a:avLst/>
+          </a:prstGeom>
+          <a:ln w="50800">
+            <a:solidFill>
+              <a:srgbClr val="C9A227"/>
+            </a:solidFill>
+            <a:tailEnd type="triangle" w="med" len="med"/>
+          </a:ln>
+        </p:spPr>
+        <p:style>
+          <a:lnRef idx="2">
+            <a:schemeClr val="accent1"/>
+          </a:lnRef>
+          <a:fillRef idx="0">
+            <a:schemeClr val="accent1"/>
+          </a:fillRef>
+          <a:effectRef idx="1">
+            <a:schemeClr val="accent1"/>
+          </a:effectRef>
+          <a:fontRef idx="minor">
+            <a:schemeClr val="tx1"/>
+          </a:fontRef>
+        </p:style>
+      </p:cxnSp>
+      <p:sp>
+        <p:nvSpPr>
+          <p:cNvPr id="16" name="TextBox 15"/>
+          <p:cNvSpPr txBox="1"/>
+          <p:nvPr/>
+        </p:nvSpPr>
+        <p:spPr>
+          <a:xfrm>
+            <a:off x="7718907" y="2217420"/>
+            <a:ext cx="1554480" cy="713232"/>
+          </a:xfrm>
+          <a:prstGeom prst="rect">
+            <a:avLst/>
+          </a:prstGeom>
+          <a:noFill/>
+        </p:spPr>
+        <p:txBody>
+          <a:bodyPr wrap="square" anchor="b">
+            <a:spAutoFit/>
+          </a:bodyPr>
+          <a:lstStyle/>
+          <a:p>
+            <a:pPr algn="ctr"/>
+            <a:r>
+              <a:rPr sz="1300" b="1">
+                <a:solidFill>
+                  <a:srgbClr val="1F2937"/>
+                </a:solidFill>
+                <a:latin typeface="Calibri"/>
+              </a:rPr>
+              <a:t>Chinni tavoqcha, buyum oynachasi</a:t>
+            </a:r>
+          </a:p>
+        </p:txBody>
+      </p:sp>
+      <p:sp>
+        <p:nvSpPr>
+          <p:cNvPr id="17" name="Rounded Rectangle 16"/>
+          <p:cNvSpPr/>
+          <p:nvPr/>
+        </p:nvSpPr>
+        <p:spPr>
+          <a:xfrm>
+            <a:off x="5440680" y="4709160"/>
+            <a:ext cx="6110935" cy="731520"/>
+          </a:xfrm>
+          <a:prstGeom prst="roundRect">
+            <a:avLst>
+              <a:gd name="adj" fmla="val 8000"/>
+            </a:avLst>
+          </a:prstGeom>
+          <a:solidFill>
+            <a:srgbClr val="FFF6D6"/>
+          </a:solidFill>
+          <a:ln w="15875">
+            <a:solidFill>
+              <a:srgbClr val="C9A227"/>
+            </a:solidFill>
+          </a:ln>
+          <a:effectLst/>
+        </p:spPr>
+        <p:style>
+          <a:lnRef idx="1">
+            <a:schemeClr val="accent1"/>
+          </a:lnRef>
+          <a:fillRef idx="3">
+            <a:schemeClr val="accent1"/>
+          </a:fillRef>
+          <a:effectRef idx="2">
+            <a:schemeClr val="accent1"/>
+          </a:effectRef>
+          <a:fontRef idx="minor">
+            <a:schemeClr val="lt1"/>
+          </a:fontRef>
+        </p:style>
+        <p:txBody>
+          <a:bodyPr rtlCol="0" anchor="ctr" wrap="square" lIns="137160" rIns="137160" tIns="36576" bIns="36576"/>
+          <a:lstStyle/>
+          <a:p>
+            <a:pPr algn="l">
+              <a:spcAft>
+                <a:spcPts val="200"/>
+              </a:spcAft>
+            </a:pPr>
+            <a:r>
+              <a:rPr sz="1300" b="1">
+                <a:solidFill>
+                  <a:srgbClr val="0B1F3A"/>
+                </a:solidFill>
+                <a:latin typeface="Calibri"/>
+              </a:rPr>
+              <a:t>Kuzatuv:  </a:t>
+            </a:r>
+            <a:r>
+              <a:rPr sz="1500" b="0">
+                <a:solidFill>
+                  <a:srgbClr val="1F2937"/>
+                </a:solidFill>
+                <a:latin typeface="Calibri"/>
+              </a:rPr>
+              <a:t>Sianid kislota bo‘lsa — ko‘k rang</a:t>
+            </a:r>
+          </a:p>
+        </p:txBody>
+      </p:sp>
+      <p:sp>
+        <p:nvSpPr>
+          <p:cNvPr id="18" name="TextBox 17"/>
+          <p:cNvSpPr txBox="1"/>
+          <p:nvPr/>
+        </p:nvSpPr>
+        <p:spPr>
+          <a:xfrm>
+            <a:off x="5440680" y="5486400"/>
+            <a:ext cx="6110935" cy="365760"/>
+          </a:xfrm>
+          <a:prstGeom prst="rect">
+            <a:avLst/>
+          </a:prstGeom>
+          <a:noFill/>
+        </p:spPr>
+        <p:txBody>
+          <a:bodyPr wrap="square">
+            <a:spAutoFit/>
+          </a:bodyPr>
+          <a:lstStyle/>
+          <a:p>
+            <a:r>
+              <a:rPr sz="1200" b="0">
+                <a:solidFill>
+                  <a:srgbClr val="6B7280"/>
+                </a:solidFill>
+                <a:latin typeface="Calibri"/>
+              </a:rPr>
+              <a:t>HCN ga dastlabki sinov</a:t>
+            </a:r>
+          </a:p>
+        </p:txBody>
+      </p:sp>
+      <p:sp>
+        <p:nvSpPr>
+          <p:cNvPr id="19" name="TextBox 18"/>
           <p:cNvSpPr txBox="1"/>
           <p:nvPr/>
         </p:nvSpPr>
@@ -19494,7 +25282,7 @@
         <p:spPr>
           <a:xfrm>
             <a:off x="640080" y="1417320"/>
-            <a:ext cx="10911535" cy="4480560"/>
+            <a:ext cx="4572000" cy="4480560"/>
           </a:xfrm>
           <a:prstGeom prst="rect">
             <a:avLst/>
@@ -19509,11 +25297,11 @@
           <a:p>
             <a:pPr>
               <a:spcAft>
-                <a:spcPts val="1200"/>
+                <a:spcPts val="800"/>
               </a:spcAft>
             </a:pPr>
             <a:r>
-              <a:rPr sz="2200">
+              <a:rPr sz="1600">
                 <a:solidFill>
                   <a:srgbClr val="1F2937"/>
                 </a:solidFill>
@@ -19525,11 +25313,11 @@
           <a:p>
             <a:pPr>
               <a:spcAft>
-                <a:spcPts val="1200"/>
+                <a:spcPts val="800"/>
               </a:spcAft>
             </a:pPr>
             <a:r>
-              <a:rPr sz="2200">
+              <a:rPr sz="1600">
                 <a:solidFill>
                   <a:srgbClr val="1F2937"/>
                 </a:solidFill>
@@ -19541,11 +25329,11 @@
           <a:p>
             <a:pPr>
               <a:spcAft>
-                <a:spcPts val="1200"/>
+                <a:spcPts val="800"/>
               </a:spcAft>
             </a:pPr>
             <a:r>
-              <a:rPr sz="2200">
+              <a:rPr sz="1600">
                 <a:solidFill>
                   <a:srgbClr val="1F2937"/>
                 </a:solidFill>
@@ -19557,11 +25345,11 @@
           <a:p>
             <a:pPr>
               <a:spcAft>
-                <a:spcPts val="1200"/>
+                <a:spcPts val="800"/>
               </a:spcAft>
             </a:pPr>
             <a:r>
-              <a:rPr sz="2200">
+              <a:rPr sz="1600">
                 <a:solidFill>
                   <a:srgbClr val="1F2937"/>
                 </a:solidFill>
@@ -19574,7 +25362,445 @@
       </p:sp>
       <p:sp>
         <p:nvSpPr>
-          <p:cNvPr id="9" name="TextBox 8"/>
+          <p:cNvPr id="9" name="Rounded Rectangle 8"/>
+          <p:cNvSpPr/>
+          <p:nvPr/>
+        </p:nvSpPr>
+        <p:spPr>
+          <a:xfrm>
+            <a:off x="5440680" y="1417320"/>
+            <a:ext cx="2278227" cy="856488"/>
+          </a:xfrm>
+          <a:prstGeom prst="roundRect">
+            <a:avLst/>
+          </a:prstGeom>
+          <a:solidFill>
+            <a:srgbClr val="0B1F3A"/>
+          </a:solidFill>
+          <a:ln>
+            <a:noFill/>
+          </a:ln>
+          <a:effectLst/>
+        </p:spPr>
+        <p:style>
+          <a:lnRef idx="1">
+            <a:schemeClr val="accent1"/>
+          </a:lnRef>
+          <a:fillRef idx="3">
+            <a:schemeClr val="accent1"/>
+          </a:fillRef>
+          <a:effectRef idx="2">
+            <a:schemeClr val="accent1"/>
+          </a:effectRef>
+          <a:fontRef idx="minor">
+            <a:schemeClr val="lt1"/>
+          </a:fontRef>
+        </p:style>
+        <p:txBody>
+          <a:bodyPr rtlCol="0" anchor="ctr" wrap="square" tIns="36576" bIns="36576"/>
+          <a:lstStyle/>
+          <a:p>
+            <a:pPr algn="ctr">
+              <a:spcAft>
+                <a:spcPts val="200"/>
+              </a:spcAft>
+            </a:pPr>
+            <a:r>
+              <a:rPr sz="1700" b="1">
+                <a:solidFill>
+                  <a:srgbClr val="FFFFFF"/>
+                </a:solidFill>
+                <a:latin typeface="Calibri"/>
+              </a:rPr>
+              <a:t>Suvli eritma (ob’ekt bo‘lagi)</a:t>
+            </a:r>
+          </a:p>
+        </p:txBody>
+      </p:sp>
+      <p:sp>
+        <p:nvSpPr>
+          <p:cNvPr id="10" name="TextBox 9"/>
+          <p:cNvSpPr txBox="1"/>
+          <p:nvPr/>
+        </p:nvSpPr>
+        <p:spPr>
+          <a:xfrm>
+            <a:off x="5440680" y="2273808"/>
+            <a:ext cx="2278227" cy="292608"/>
+          </a:xfrm>
+          <a:prstGeom prst="rect">
+            <a:avLst/>
+          </a:prstGeom>
+          <a:noFill/>
+        </p:spPr>
+        <p:txBody>
+          <a:bodyPr wrap="square" anchor="ctr">
+            <a:spAutoFit/>
+          </a:bodyPr>
+          <a:lstStyle/>
+          <a:p>
+            <a:pPr algn="ctr"/>
+            <a:r>
+              <a:rPr sz="1600" b="1">
+                <a:solidFill>
+                  <a:srgbClr val="C9A227"/>
+                </a:solidFill>
+                <a:latin typeface="Calibri"/>
+              </a:rPr>
+              <a:t>+</a:t>
+            </a:r>
+          </a:p>
+        </p:txBody>
+      </p:sp>
+      <p:sp>
+        <p:nvSpPr>
+          <p:cNvPr id="11" name="Rounded Rectangle 10"/>
+          <p:cNvSpPr/>
+          <p:nvPr/>
+        </p:nvSpPr>
+        <p:spPr>
+          <a:xfrm>
+            <a:off x="5440680" y="2566416"/>
+            <a:ext cx="2278227" cy="856488"/>
+          </a:xfrm>
+          <a:prstGeom prst="roundRect">
+            <a:avLst/>
+          </a:prstGeom>
+          <a:solidFill>
+            <a:srgbClr val="0B1F3A"/>
+          </a:solidFill>
+          <a:ln>
+            <a:noFill/>
+          </a:ln>
+          <a:effectLst/>
+        </p:spPr>
+        <p:style>
+          <a:lnRef idx="1">
+            <a:schemeClr val="accent1"/>
+          </a:lnRef>
+          <a:fillRef idx="3">
+            <a:schemeClr val="accent1"/>
+          </a:fillRef>
+          <a:effectRef idx="2">
+            <a:schemeClr val="accent1"/>
+          </a:effectRef>
+          <a:fontRef idx="minor">
+            <a:schemeClr val="lt1"/>
+          </a:fontRef>
+        </p:style>
+        <p:txBody>
+          <a:bodyPr rtlCol="0" anchor="ctr" wrap="square" tIns="36576" bIns="36576"/>
+          <a:lstStyle/>
+          <a:p>
+            <a:pPr algn="ctr">
+              <a:spcAft>
+                <a:spcPts val="200"/>
+              </a:spcAft>
+            </a:pPr>
+            <a:r>
+              <a:rPr sz="1700" b="1">
+                <a:solidFill>
+                  <a:srgbClr val="FFFFFF"/>
+                </a:solidFill>
+                <a:latin typeface="Calibri"/>
+              </a:rPr>
+              <a:t>Difenilamin reaktivi</a:t>
+            </a:r>
+          </a:p>
+        </p:txBody>
+      </p:sp>
+      <p:sp>
+        <p:nvSpPr>
+          <p:cNvPr id="12" name="TextBox 11"/>
+          <p:cNvSpPr txBox="1"/>
+          <p:nvPr/>
+        </p:nvSpPr>
+        <p:spPr>
+          <a:xfrm>
+            <a:off x="5440680" y="3422904"/>
+            <a:ext cx="2278227" cy="292608"/>
+          </a:xfrm>
+          <a:prstGeom prst="rect">
+            <a:avLst/>
+          </a:prstGeom>
+          <a:noFill/>
+        </p:spPr>
+        <p:txBody>
+          <a:bodyPr wrap="square" anchor="ctr">
+            <a:spAutoFit/>
+          </a:bodyPr>
+          <a:lstStyle/>
+          <a:p>
+            <a:pPr algn="ctr"/>
+            <a:r>
+              <a:rPr sz="1600" b="1">
+                <a:solidFill>
+                  <a:srgbClr val="C9A227"/>
+                </a:solidFill>
+                <a:latin typeface="Calibri"/>
+              </a:rPr>
+              <a:t>+</a:t>
+            </a:r>
+          </a:p>
+        </p:txBody>
+      </p:sp>
+      <p:sp>
+        <p:nvSpPr>
+          <p:cNvPr id="13" name="Rounded Rectangle 12"/>
+          <p:cNvSpPr/>
+          <p:nvPr/>
+        </p:nvSpPr>
+        <p:spPr>
+          <a:xfrm>
+            <a:off x="5440680" y="3715512"/>
+            <a:ext cx="2278227" cy="856488"/>
+          </a:xfrm>
+          <a:prstGeom prst="roundRect">
+            <a:avLst/>
+          </a:prstGeom>
+          <a:solidFill>
+            <a:srgbClr val="0B1F3A"/>
+          </a:solidFill>
+          <a:ln>
+            <a:noFill/>
+          </a:ln>
+          <a:effectLst/>
+        </p:spPr>
+        <p:style>
+          <a:lnRef idx="1">
+            <a:schemeClr val="accent1"/>
+          </a:lnRef>
+          <a:fillRef idx="3">
+            <a:schemeClr val="accent1"/>
+          </a:fillRef>
+          <a:effectRef idx="2">
+            <a:schemeClr val="accent1"/>
+          </a:effectRef>
+          <a:fontRef idx="minor">
+            <a:schemeClr val="lt1"/>
+          </a:fontRef>
+        </p:style>
+        <p:txBody>
+          <a:bodyPr rtlCol="0" anchor="ctr" wrap="square" tIns="36576" bIns="36576"/>
+          <a:lstStyle/>
+          <a:p>
+            <a:pPr algn="ctr">
+              <a:spcAft>
+                <a:spcPts val="200"/>
+              </a:spcAft>
+            </a:pPr>
+            <a:r>
+              <a:rPr sz="1700" b="1">
+                <a:solidFill>
+                  <a:srgbClr val="FFFFFF"/>
+                </a:solidFill>
+                <a:latin typeface="Calibri"/>
+              </a:rPr>
+              <a:t>Konsentrlangan H2SO4</a:t>
+            </a:r>
+          </a:p>
+        </p:txBody>
+      </p:sp>
+      <p:sp>
+        <p:nvSpPr>
+          <p:cNvPr id="14" name="Rounded Rectangle 13"/>
+          <p:cNvSpPr/>
+          <p:nvPr/>
+        </p:nvSpPr>
+        <p:spPr>
+          <a:xfrm>
+            <a:off x="9273387" y="2537460"/>
+            <a:ext cx="2278227" cy="914400"/>
+          </a:xfrm>
+          <a:prstGeom prst="roundRect">
+            <a:avLst/>
+          </a:prstGeom>
+          <a:solidFill>
+            <a:srgbClr val="1F4E79"/>
+          </a:solidFill>
+          <a:ln>
+            <a:noFill/>
+          </a:ln>
+          <a:effectLst/>
+        </p:spPr>
+        <p:style>
+          <a:lnRef idx="1">
+            <a:schemeClr val="accent1"/>
+          </a:lnRef>
+          <a:fillRef idx="3">
+            <a:schemeClr val="accent1"/>
+          </a:fillRef>
+          <a:effectRef idx="2">
+            <a:schemeClr val="accent1"/>
+          </a:effectRef>
+          <a:fontRef idx="minor">
+            <a:schemeClr val="lt1"/>
+          </a:fontRef>
+        </p:style>
+        <p:txBody>
+          <a:bodyPr rtlCol="0" anchor="ctr" wrap="square" tIns="36576" bIns="36576"/>
+          <a:lstStyle/>
+          <a:p>
+            <a:pPr algn="ctr">
+              <a:spcAft>
+                <a:spcPts val="200"/>
+              </a:spcAft>
+            </a:pPr>
+            <a:r>
+              <a:rPr sz="1700" b="1">
+                <a:solidFill>
+                  <a:srgbClr val="FFFFFF"/>
+                </a:solidFill>
+                <a:latin typeface="Calibri"/>
+              </a:rPr>
+              <a:t>Zangori rang</a:t>
+            </a:r>
+          </a:p>
+        </p:txBody>
+      </p:sp>
+      <p:cxnSp>
+        <p:nvCxnSpPr>
+          <p:cNvPr id="15" name="Connector 14"/>
+          <p:cNvCxnSpPr/>
+          <p:nvPr/>
+        </p:nvCxnSpPr>
+        <p:spPr>
+          <a:xfrm>
+            <a:off x="7810347" y="2994660"/>
+            <a:ext cx="1371600" cy="0"/>
+          </a:xfrm>
+          <a:prstGeom prst="line">
+            <a:avLst/>
+          </a:prstGeom>
+          <a:ln w="50800">
+            <a:solidFill>
+              <a:srgbClr val="C9A227"/>
+            </a:solidFill>
+            <a:tailEnd type="triangle" w="med" len="med"/>
+          </a:ln>
+        </p:spPr>
+        <p:style>
+          <a:lnRef idx="2">
+            <a:schemeClr val="accent1"/>
+          </a:lnRef>
+          <a:fillRef idx="0">
+            <a:schemeClr val="accent1"/>
+          </a:fillRef>
+          <a:effectRef idx="1">
+            <a:schemeClr val="accent1"/>
+          </a:effectRef>
+          <a:fontRef idx="minor">
+            <a:schemeClr val="tx1"/>
+          </a:fontRef>
+        </p:style>
+      </p:cxnSp>
+      <p:sp>
+        <p:nvSpPr>
+          <p:cNvPr id="16" name="Rounded Rectangle 15"/>
+          <p:cNvSpPr/>
+          <p:nvPr/>
+        </p:nvSpPr>
+        <p:spPr>
+          <a:xfrm>
+            <a:off x="5440680" y="4709160"/>
+            <a:ext cx="6110935" cy="731520"/>
+          </a:xfrm>
+          <a:prstGeom prst="roundRect">
+            <a:avLst>
+              <a:gd name="adj" fmla="val 8000"/>
+            </a:avLst>
+          </a:prstGeom>
+          <a:solidFill>
+            <a:srgbClr val="FFF6D6"/>
+          </a:solidFill>
+          <a:ln w="15875">
+            <a:solidFill>
+              <a:srgbClr val="C9A227"/>
+            </a:solidFill>
+          </a:ln>
+          <a:effectLst/>
+        </p:spPr>
+        <p:style>
+          <a:lnRef idx="1">
+            <a:schemeClr val="accent1"/>
+          </a:lnRef>
+          <a:fillRef idx="3">
+            <a:schemeClr val="accent1"/>
+          </a:fillRef>
+          <a:effectRef idx="2">
+            <a:schemeClr val="accent1"/>
+          </a:effectRef>
+          <a:fontRef idx="minor">
+            <a:schemeClr val="lt1"/>
+          </a:fontRef>
+        </p:style>
+        <p:txBody>
+          <a:bodyPr rtlCol="0" anchor="ctr" wrap="square" lIns="137160" rIns="137160" tIns="36576" bIns="36576"/>
+          <a:lstStyle/>
+          <a:p>
+            <a:pPr algn="l">
+              <a:spcAft>
+                <a:spcPts val="200"/>
+              </a:spcAft>
+            </a:pPr>
+            <a:r>
+              <a:rPr sz="1300" b="1">
+                <a:solidFill>
+                  <a:srgbClr val="0B1F3A"/>
+                </a:solidFill>
+                <a:latin typeface="Calibri"/>
+              </a:rPr>
+              <a:t>Kuzatuv:  </a:t>
+            </a:r>
+            <a:r>
+              <a:rPr sz="1500" b="0">
+                <a:solidFill>
+                  <a:srgbClr val="1F2937"/>
+                </a:solidFill>
+                <a:latin typeface="Calibri"/>
+              </a:rPr>
+              <a:t>Ijobiy bo‘lsa: azobo‘yoq reaksiyasi — qizil</a:t>
+            </a:r>
+          </a:p>
+        </p:txBody>
+      </p:sp>
+      <p:sp>
+        <p:nvSpPr>
+          <p:cNvPr id="17" name="TextBox 16"/>
+          <p:cNvSpPr txBox="1"/>
+          <p:nvPr/>
+        </p:nvSpPr>
+        <p:spPr>
+          <a:xfrm>
+            <a:off x="5440680" y="5486400"/>
+            <a:ext cx="6110935" cy="365760"/>
+          </a:xfrm>
+          <a:prstGeom prst="rect">
+            <a:avLst/>
+          </a:prstGeom>
+          <a:noFill/>
+        </p:spPr>
+        <p:txBody>
+          <a:bodyPr wrap="square">
+            <a:spAutoFit/>
+          </a:bodyPr>
+          <a:lstStyle/>
+          <a:p>
+            <a:r>
+              <a:rPr sz="1200" b="0">
+                <a:solidFill>
+                  <a:srgbClr val="6B7280"/>
+                </a:solidFill>
+                <a:latin typeface="Calibri"/>
+              </a:rPr>
+              <a:t>Nitrat va nitritga sinov</a:t>
+            </a:r>
+          </a:p>
+        </p:txBody>
+      </p:sp>
+      <p:sp>
+        <p:nvSpPr>
+          <p:cNvPr id="18" name="TextBox 17"/>
           <p:cNvSpPr txBox="1"/>
           <p:nvPr/>
         </p:nvSpPr>
@@ -20242,7 +26468,7 @@
         <p:spPr>
           <a:xfrm>
             <a:off x="640080" y="1417320"/>
-            <a:ext cx="10911535" cy="4480560"/>
+            <a:ext cx="5394960" cy="4480560"/>
           </a:xfrm>
           <a:prstGeom prst="rect">
             <a:avLst/>
@@ -20257,64 +26483,80 @@
           <a:p>
             <a:pPr>
               <a:spcAft>
-                <a:spcPts val="1200"/>
+                <a:spcPts val="800"/>
               </a:spcAft>
             </a:pPr>
             <a:r>
-              <a:rPr sz="2200">
+              <a:rPr sz="1600">
                 <a:solidFill>
                   <a:srgbClr val="1F2937"/>
                 </a:solidFill>
                 <a:latin typeface="Calibri"/>
               </a:rPr>
-              <a:t>▸  Ichki a’zolar, qon va siydik yuboriladi; tanlashda zaharning tabiati, kirish yo‘li, tarqalishi, chiqish yo‘li va tezligi, intoksikatsiya davomiyligi va davolash muolajalari hisobga olinadi.</a:t>
+              <a:t>▸  Ichki a’zolar, qon va siydik yuboriladi.</a:t>
             </a:r>
           </a:p>
           <a:p>
             <a:pPr>
               <a:spcAft>
-                <a:spcPts val="1200"/>
+                <a:spcPts val="800"/>
               </a:spcAft>
             </a:pPr>
             <a:r>
-              <a:rPr sz="2200">
+              <a:rPr sz="1600">
                 <a:solidFill>
                   <a:srgbClr val="1F2937"/>
                 </a:solidFill>
                 <a:latin typeface="Calibri"/>
               </a:rPr>
-              <a:t>▸  Qusuq moddalari, yuvindi suvning birinchi qismi, kimyoviy va dori moddalar, ovqatlar, ichimliklar ham yuboriladi.</a:t>
+              <a:t>▸  Tanlashda zaharning tabiati, kirish yo‘li, tarqalishi, chiqish yo‘li va tezligi, intoksikatsiya davomiyligi va davolash muolajalari hisobga olinadi.</a:t>
             </a:r>
           </a:p>
           <a:p>
             <a:pPr>
               <a:spcAft>
-                <a:spcPts val="1200"/>
+                <a:spcPts val="800"/>
               </a:spcAft>
             </a:pPr>
             <a:r>
-              <a:rPr sz="2200">
+              <a:rPr sz="1600">
                 <a:solidFill>
                   <a:srgbClr val="1F2937"/>
                 </a:solidFill>
                 <a:latin typeface="Calibri"/>
               </a:rPr>
-              <a:t>▸  Ob’ektlar uchdan bir qismi qayta tekshiruv uchun arxivda qolishini hisobga olib, yetarli miqdorda yuboriladi.</a:t>
+              <a:t>▸  Qusuq moddalari, yuvindi suvning birinchi qismi, kimyoviy va dori moddalar, ovqatlar, ichimliklar ham yuboriladi.</a:t>
             </a:r>
           </a:p>
           <a:p>
             <a:pPr>
               <a:spcAft>
-                <a:spcPts val="1200"/>
+                <a:spcPts val="800"/>
               </a:spcAft>
             </a:pPr>
             <a:r>
-              <a:rPr sz="2200">
+              <a:rPr sz="1600">
                 <a:solidFill>
                   <a:srgbClr val="1F2937"/>
                 </a:solidFill>
                 <a:latin typeface="Calibri"/>
               </a:rPr>
+              <a:t>▸  Ob’ektlar uchdan bir qismi qayta tekshiruv uchun arxivda qolishini hisobga olib, yetarli miqdorda yuboriladi.</a:t>
+            </a:r>
+          </a:p>
+          <a:p>
+            <a:pPr>
+              <a:spcAft>
+                <a:spcPts val="800"/>
+              </a:spcAft>
+            </a:pPr>
+            <a:r>
+              <a:rPr sz="1600">
+                <a:solidFill>
+                  <a:srgbClr val="1F2937"/>
+                </a:solidFill>
+                <a:latin typeface="Calibri"/>
+              </a:rPr>
               <a:t>▸  Yuborilgan ob’ektlarning uchdan ikki qismi ishlatiladi, uchdan bir qismi bo‘lim arxivida qayta tahlil uchun saqlanadi.</a:t>
             </a:r>
           </a:p>
@@ -20322,7 +26564,477 @@
       </p:sp>
       <p:sp>
         <p:nvSpPr>
-          <p:cNvPr id="9" name="TextBox 8"/>
+          <p:cNvPr id="9" name="Rounded Rectangle 8"/>
+          <p:cNvSpPr/>
+          <p:nvPr/>
+        </p:nvSpPr>
+        <p:spPr>
+          <a:xfrm>
+            <a:off x="6263640" y="1463040"/>
+            <a:ext cx="5287975" cy="534009"/>
+          </a:xfrm>
+          <a:prstGeom prst="roundRect">
+            <a:avLst/>
+          </a:prstGeom>
+          <a:solidFill>
+            <a:srgbClr val="0B1F3A"/>
+          </a:solidFill>
+          <a:ln>
+            <a:noFill/>
+          </a:ln>
+          <a:effectLst/>
+        </p:spPr>
+        <p:style>
+          <a:lnRef idx="1">
+            <a:schemeClr val="accent1"/>
+          </a:lnRef>
+          <a:fillRef idx="3">
+            <a:schemeClr val="accent1"/>
+          </a:fillRef>
+          <a:effectRef idx="2">
+            <a:schemeClr val="accent1"/>
+          </a:effectRef>
+          <a:fontRef idx="minor">
+            <a:schemeClr val="lt1"/>
+          </a:fontRef>
+        </p:style>
+        <p:txBody>
+          <a:bodyPr rtlCol="0" anchor="ctr" wrap="square"/>
+          <a:lstStyle/>
+          <a:p>
+            <a:pPr algn="ctr"/>
+            <a:r>
+              <a:rPr sz="1600" b="1">
+                <a:solidFill>
+                  <a:srgbClr val="FFFFFF"/>
+                </a:solidFill>
+              </a:rPr>
+              <a:t>Zahar tabiati, kirish yo‘li</a:t>
+            </a:r>
+          </a:p>
+        </p:txBody>
+      </p:sp>
+      <p:sp>
+        <p:nvSpPr>
+          <p:cNvPr id="10" name="Down Arrow 9"/>
+          <p:cNvSpPr/>
+          <p:nvPr/>
+        </p:nvSpPr>
+        <p:spPr>
+          <a:xfrm>
+            <a:off x="8770467" y="2015337"/>
+            <a:ext cx="274320" cy="256032"/>
+          </a:xfrm>
+          <a:prstGeom prst="downArrow">
+            <a:avLst/>
+          </a:prstGeom>
+          <a:solidFill>
+            <a:srgbClr val="C9A227"/>
+          </a:solidFill>
+          <a:ln>
+            <a:noFill/>
+          </a:ln>
+          <a:effectLst/>
+        </p:spPr>
+        <p:style>
+          <a:lnRef idx="1">
+            <a:schemeClr val="accent1"/>
+          </a:lnRef>
+          <a:fillRef idx="3">
+            <a:schemeClr val="accent1"/>
+          </a:fillRef>
+          <a:effectRef idx="2">
+            <a:schemeClr val="accent1"/>
+          </a:effectRef>
+          <a:fontRef idx="minor">
+            <a:schemeClr val="lt1"/>
+          </a:fontRef>
+        </p:style>
+        <p:txBody>
+          <a:bodyPr rtlCol="0" anchor="ctr"/>
+          <a:lstStyle/>
+          <a:p>
+            <a:pPr algn="ctr"/>
+          </a:p>
+        </p:txBody>
+      </p:sp>
+      <p:sp>
+        <p:nvSpPr>
+          <p:cNvPr id="11" name="Rounded Rectangle 10"/>
+          <p:cNvSpPr/>
+          <p:nvPr/>
+        </p:nvSpPr>
+        <p:spPr>
+          <a:xfrm>
+            <a:off x="6263640" y="2289657"/>
+            <a:ext cx="5287975" cy="534009"/>
+          </a:xfrm>
+          <a:prstGeom prst="roundRect">
+            <a:avLst/>
+          </a:prstGeom>
+          <a:solidFill>
+            <a:srgbClr val="1F4E79"/>
+          </a:solidFill>
+          <a:ln>
+            <a:noFill/>
+          </a:ln>
+          <a:effectLst/>
+        </p:spPr>
+        <p:style>
+          <a:lnRef idx="1">
+            <a:schemeClr val="accent1"/>
+          </a:lnRef>
+          <a:fillRef idx="3">
+            <a:schemeClr val="accent1"/>
+          </a:fillRef>
+          <a:effectRef idx="2">
+            <a:schemeClr val="accent1"/>
+          </a:effectRef>
+          <a:fontRef idx="minor">
+            <a:schemeClr val="lt1"/>
+          </a:fontRef>
+        </p:style>
+        <p:txBody>
+          <a:bodyPr rtlCol="0" anchor="ctr" wrap="square"/>
+          <a:lstStyle/>
+          <a:p>
+            <a:pPr algn="ctr"/>
+            <a:r>
+              <a:rPr sz="1600" b="1">
+                <a:solidFill>
+                  <a:srgbClr val="FFFFFF"/>
+                </a:solidFill>
+              </a:rPr>
+              <a:t>Tarqalishi, chiqish tezligi</a:t>
+            </a:r>
+          </a:p>
+        </p:txBody>
+      </p:sp>
+      <p:sp>
+        <p:nvSpPr>
+          <p:cNvPr id="12" name="Down Arrow 11"/>
+          <p:cNvSpPr/>
+          <p:nvPr/>
+        </p:nvSpPr>
+        <p:spPr>
+          <a:xfrm>
+            <a:off x="8770467" y="2841955"/>
+            <a:ext cx="274320" cy="256032"/>
+          </a:xfrm>
+          <a:prstGeom prst="downArrow">
+            <a:avLst/>
+          </a:prstGeom>
+          <a:solidFill>
+            <a:srgbClr val="C9A227"/>
+          </a:solidFill>
+          <a:ln>
+            <a:noFill/>
+          </a:ln>
+          <a:effectLst/>
+        </p:spPr>
+        <p:style>
+          <a:lnRef idx="1">
+            <a:schemeClr val="accent1"/>
+          </a:lnRef>
+          <a:fillRef idx="3">
+            <a:schemeClr val="accent1"/>
+          </a:fillRef>
+          <a:effectRef idx="2">
+            <a:schemeClr val="accent1"/>
+          </a:effectRef>
+          <a:fontRef idx="minor">
+            <a:schemeClr val="lt1"/>
+          </a:fontRef>
+        </p:style>
+        <p:txBody>
+          <a:bodyPr rtlCol="0" anchor="ctr"/>
+          <a:lstStyle/>
+          <a:p>
+            <a:pPr algn="ctr"/>
+          </a:p>
+        </p:txBody>
+      </p:sp>
+      <p:sp>
+        <p:nvSpPr>
+          <p:cNvPr id="13" name="Rounded Rectangle 12"/>
+          <p:cNvSpPr/>
+          <p:nvPr/>
+        </p:nvSpPr>
+        <p:spPr>
+          <a:xfrm>
+            <a:off x="6263640" y="3116275"/>
+            <a:ext cx="5287975" cy="534009"/>
+          </a:xfrm>
+          <a:prstGeom prst="roundRect">
+            <a:avLst/>
+          </a:prstGeom>
+          <a:solidFill>
+            <a:srgbClr val="0B1F3A"/>
+          </a:solidFill>
+          <a:ln>
+            <a:noFill/>
+          </a:ln>
+          <a:effectLst/>
+        </p:spPr>
+        <p:style>
+          <a:lnRef idx="1">
+            <a:schemeClr val="accent1"/>
+          </a:lnRef>
+          <a:fillRef idx="3">
+            <a:schemeClr val="accent1"/>
+          </a:fillRef>
+          <a:effectRef idx="2">
+            <a:schemeClr val="accent1"/>
+          </a:effectRef>
+          <a:fontRef idx="minor">
+            <a:schemeClr val="lt1"/>
+          </a:fontRef>
+        </p:style>
+        <p:txBody>
+          <a:bodyPr rtlCol="0" anchor="ctr" wrap="square"/>
+          <a:lstStyle/>
+          <a:p>
+            <a:pPr algn="ctr"/>
+            <a:r>
+              <a:rPr sz="1600" b="1">
+                <a:solidFill>
+                  <a:srgbClr val="FFFFFF"/>
+                </a:solidFill>
+              </a:rPr>
+              <a:t>Intoksikatsiya davomiyligi, davolash</a:t>
+            </a:r>
+          </a:p>
+        </p:txBody>
+      </p:sp>
+      <p:sp>
+        <p:nvSpPr>
+          <p:cNvPr id="14" name="Down Arrow 13"/>
+          <p:cNvSpPr/>
+          <p:nvPr/>
+        </p:nvSpPr>
+        <p:spPr>
+          <a:xfrm>
+            <a:off x="8770467" y="3668572"/>
+            <a:ext cx="274320" cy="256032"/>
+          </a:xfrm>
+          <a:prstGeom prst="downArrow">
+            <a:avLst/>
+          </a:prstGeom>
+          <a:solidFill>
+            <a:srgbClr val="C9A227"/>
+          </a:solidFill>
+          <a:ln>
+            <a:noFill/>
+          </a:ln>
+          <a:effectLst/>
+        </p:spPr>
+        <p:style>
+          <a:lnRef idx="1">
+            <a:schemeClr val="accent1"/>
+          </a:lnRef>
+          <a:fillRef idx="3">
+            <a:schemeClr val="accent1"/>
+          </a:fillRef>
+          <a:effectRef idx="2">
+            <a:schemeClr val="accent1"/>
+          </a:effectRef>
+          <a:fontRef idx="minor">
+            <a:schemeClr val="lt1"/>
+          </a:fontRef>
+        </p:style>
+        <p:txBody>
+          <a:bodyPr rtlCol="0" anchor="ctr"/>
+          <a:lstStyle/>
+          <a:p>
+            <a:pPr algn="ctr"/>
+          </a:p>
+        </p:txBody>
+      </p:sp>
+      <p:sp>
+        <p:nvSpPr>
+          <p:cNvPr id="15" name="Rounded Rectangle 14"/>
+          <p:cNvSpPr/>
+          <p:nvPr/>
+        </p:nvSpPr>
+        <p:spPr>
+          <a:xfrm>
+            <a:off x="6263640" y="3942892"/>
+            <a:ext cx="5287975" cy="534009"/>
+          </a:xfrm>
+          <a:prstGeom prst="roundRect">
+            <a:avLst/>
+          </a:prstGeom>
+          <a:solidFill>
+            <a:srgbClr val="1F4E79"/>
+          </a:solidFill>
+          <a:ln>
+            <a:noFill/>
+          </a:ln>
+          <a:effectLst/>
+        </p:spPr>
+        <p:style>
+          <a:lnRef idx="1">
+            <a:schemeClr val="accent1"/>
+          </a:lnRef>
+          <a:fillRef idx="3">
+            <a:schemeClr val="accent1"/>
+          </a:fillRef>
+          <a:effectRef idx="2">
+            <a:schemeClr val="accent1"/>
+          </a:effectRef>
+          <a:fontRef idx="minor">
+            <a:schemeClr val="lt1"/>
+          </a:fontRef>
+        </p:style>
+        <p:txBody>
+          <a:bodyPr rtlCol="0" anchor="ctr" wrap="square"/>
+          <a:lstStyle/>
+          <a:p>
+            <a:pPr algn="ctr"/>
+            <a:r>
+              <a:rPr sz="1600" b="1">
+                <a:solidFill>
+                  <a:srgbClr val="FFFFFF"/>
+                </a:solidFill>
+              </a:rPr>
+              <a:t>Ob’ektlar tanlanadi</a:t>
+            </a:r>
+          </a:p>
+        </p:txBody>
+      </p:sp>
+      <p:sp>
+        <p:nvSpPr>
+          <p:cNvPr id="16" name="Down Arrow 15"/>
+          <p:cNvSpPr/>
+          <p:nvPr/>
+        </p:nvSpPr>
+        <p:spPr>
+          <a:xfrm>
+            <a:off x="8770467" y="4495190"/>
+            <a:ext cx="274320" cy="256032"/>
+          </a:xfrm>
+          <a:prstGeom prst="downArrow">
+            <a:avLst/>
+          </a:prstGeom>
+          <a:solidFill>
+            <a:srgbClr val="C9A227"/>
+          </a:solidFill>
+          <a:ln>
+            <a:noFill/>
+          </a:ln>
+          <a:effectLst/>
+        </p:spPr>
+        <p:style>
+          <a:lnRef idx="1">
+            <a:schemeClr val="accent1"/>
+          </a:lnRef>
+          <a:fillRef idx="3">
+            <a:schemeClr val="accent1"/>
+          </a:fillRef>
+          <a:effectRef idx="2">
+            <a:schemeClr val="accent1"/>
+          </a:effectRef>
+          <a:fontRef idx="minor">
+            <a:schemeClr val="lt1"/>
+          </a:fontRef>
+        </p:style>
+        <p:txBody>
+          <a:bodyPr rtlCol="0" anchor="ctr"/>
+          <a:lstStyle/>
+          <a:p>
+            <a:pPr algn="ctr"/>
+          </a:p>
+        </p:txBody>
+      </p:sp>
+      <p:sp>
+        <p:nvSpPr>
+          <p:cNvPr id="17" name="Rounded Rectangle 16"/>
+          <p:cNvSpPr/>
+          <p:nvPr/>
+        </p:nvSpPr>
+        <p:spPr>
+          <a:xfrm>
+            <a:off x="6263640" y="4769510"/>
+            <a:ext cx="5287975" cy="534009"/>
+          </a:xfrm>
+          <a:prstGeom prst="roundRect">
+            <a:avLst/>
+          </a:prstGeom>
+          <a:solidFill>
+            <a:srgbClr val="0B1F3A"/>
+          </a:solidFill>
+          <a:ln>
+            <a:noFill/>
+          </a:ln>
+          <a:effectLst/>
+        </p:spPr>
+        <p:style>
+          <a:lnRef idx="1">
+            <a:schemeClr val="accent1"/>
+          </a:lnRef>
+          <a:fillRef idx="3">
+            <a:schemeClr val="accent1"/>
+          </a:fillRef>
+          <a:effectRef idx="2">
+            <a:schemeClr val="accent1"/>
+          </a:effectRef>
+          <a:fontRef idx="minor">
+            <a:schemeClr val="lt1"/>
+          </a:fontRef>
+        </p:style>
+        <p:txBody>
+          <a:bodyPr rtlCol="0" anchor="ctr" wrap="square"/>
+          <a:lstStyle/>
+          <a:p>
+            <a:pPr algn="ctr"/>
+            <a:r>
+              <a:rPr sz="1600" b="1">
+                <a:solidFill>
+                  <a:srgbClr val="FFFFFF"/>
+                </a:solidFill>
+              </a:rPr>
+              <a:t>1/3 qismi arxivda qoladi</a:t>
+            </a:r>
+          </a:p>
+        </p:txBody>
+      </p:sp>
+      <p:sp>
+        <p:nvSpPr>
+          <p:cNvPr id="18" name="TextBox 17"/>
+          <p:cNvSpPr txBox="1"/>
+          <p:nvPr/>
+        </p:nvSpPr>
+        <p:spPr>
+          <a:xfrm>
+            <a:off x="6263640" y="5349240"/>
+            <a:ext cx="5287975" cy="365760"/>
+          </a:xfrm>
+          <a:prstGeom prst="rect">
+            <a:avLst/>
+          </a:prstGeom>
+          <a:noFill/>
+        </p:spPr>
+        <p:txBody>
+          <a:bodyPr wrap="square">
+            <a:spAutoFit/>
+          </a:bodyPr>
+          <a:lstStyle/>
+          <a:p>
+            <a:r>
+              <a:rPr sz="1100" b="0">
+                <a:solidFill>
+                  <a:srgbClr val="6B7280"/>
+                </a:solidFill>
+                <a:latin typeface="Calibri"/>
+              </a:rPr>
+              <a:t>A-6: ob’ekt tanlash</a:t>
+            </a:r>
+          </a:p>
+        </p:txBody>
+      </p:sp>
+      <p:sp>
+        <p:nvSpPr>
+          <p:cNvPr id="19" name="TextBox 18"/>
           <p:cNvSpPr txBox="1"/>
           <p:nvPr/>
         </p:nvSpPr>
@@ -21280,7 +27992,7 @@
         <p:spPr>
           <a:xfrm>
             <a:off x="640080" y="1417320"/>
-            <a:ext cx="10911535" cy="4480560"/>
+            <a:ext cx="4572000" cy="4480560"/>
           </a:xfrm>
           <a:prstGeom prst="rect">
             <a:avLst/>
@@ -21295,11 +28007,11 @@
           <a:p>
             <a:pPr>
               <a:spcAft>
-                <a:spcPts val="1200"/>
+                <a:spcPts val="800"/>
               </a:spcAft>
             </a:pPr>
             <a:r>
-              <a:rPr sz="2200">
+              <a:rPr sz="1800">
                 <a:solidFill>
                   <a:srgbClr val="1F2937"/>
                 </a:solidFill>
@@ -21311,11 +28023,11 @@
           <a:p>
             <a:pPr>
               <a:spcAft>
-                <a:spcPts val="1200"/>
+                <a:spcPts val="800"/>
               </a:spcAft>
             </a:pPr>
             <a:r>
-              <a:rPr sz="2200">
+              <a:rPr sz="1800">
                 <a:solidFill>
                   <a:srgbClr val="1F2937"/>
                 </a:solidFill>
@@ -21327,11 +28039,11 @@
           <a:p>
             <a:pPr>
               <a:spcAft>
-                <a:spcPts val="1200"/>
+                <a:spcPts val="800"/>
               </a:spcAft>
             </a:pPr>
             <a:r>
-              <a:rPr sz="2200">
+              <a:rPr sz="1800">
                 <a:solidFill>
                   <a:srgbClr val="1F2937"/>
                 </a:solidFill>
@@ -21343,11 +28055,11 @@
           <a:p>
             <a:pPr>
               <a:spcAft>
-                <a:spcPts val="1200"/>
+                <a:spcPts val="800"/>
               </a:spcAft>
             </a:pPr>
             <a:r>
-              <a:rPr sz="2200">
+              <a:rPr sz="1800">
                 <a:solidFill>
                   <a:srgbClr val="1F2937"/>
                 </a:solidFill>
@@ -21360,7 +28072,923 @@
       </p:sp>
       <p:sp>
         <p:nvSpPr>
-          <p:cNvPr id="9" name="TextBox 8"/>
+          <p:cNvPr id="9" name="Rounded Rectangle 8"/>
+          <p:cNvSpPr/>
+          <p:nvPr/>
+        </p:nvSpPr>
+        <p:spPr>
+          <a:xfrm>
+            <a:off x="5440680" y="1417320"/>
+            <a:ext cx="2973171" cy="1243584"/>
+          </a:xfrm>
+          <a:prstGeom prst="roundRect">
+            <a:avLst>
+              <a:gd name="adj" fmla="val 8000"/>
+            </a:avLst>
+          </a:prstGeom>
+          <a:solidFill>
+            <a:srgbClr val="FFFFFF"/>
+          </a:solidFill>
+          <a:ln w="15875">
+            <a:solidFill>
+              <a:srgbClr val="E8EEF6"/>
+            </a:solidFill>
+          </a:ln>
+          <a:effectLst/>
+        </p:spPr>
+        <p:style>
+          <a:lnRef idx="1">
+            <a:schemeClr val="accent1"/>
+          </a:lnRef>
+          <a:fillRef idx="3">
+            <a:schemeClr val="accent1"/>
+          </a:fillRef>
+          <a:effectRef idx="2">
+            <a:schemeClr val="accent1"/>
+          </a:effectRef>
+          <a:fontRef idx="minor">
+            <a:schemeClr val="lt1"/>
+          </a:fontRef>
+        </p:style>
+        <p:txBody>
+          <a:bodyPr rtlCol="0" anchor="ctr"/>
+          <a:lstStyle/>
+          <a:p>
+            <a:pPr algn="ctr"/>
+          </a:p>
+        </p:txBody>
+      </p:sp>
+      <p:sp>
+        <p:nvSpPr>
+          <p:cNvPr id="10" name="Rectangle 9"/>
+          <p:cNvSpPr/>
+          <p:nvPr/>
+        </p:nvSpPr>
+        <p:spPr>
+          <a:xfrm>
+            <a:off x="5440680" y="1508760"/>
+            <a:ext cx="64008" cy="1060704"/>
+          </a:xfrm>
+          <a:prstGeom prst="rect">
+            <a:avLst/>
+          </a:prstGeom>
+          <a:solidFill>
+            <a:srgbClr val="C9A227"/>
+          </a:solidFill>
+          <a:ln>
+            <a:noFill/>
+          </a:ln>
+          <a:effectLst/>
+        </p:spPr>
+        <p:style>
+          <a:lnRef idx="1">
+            <a:schemeClr val="accent1"/>
+          </a:lnRef>
+          <a:fillRef idx="3">
+            <a:schemeClr val="accent1"/>
+          </a:fillRef>
+          <a:effectRef idx="2">
+            <a:schemeClr val="accent1"/>
+          </a:effectRef>
+          <a:fontRef idx="minor">
+            <a:schemeClr val="lt1"/>
+          </a:fontRef>
+        </p:style>
+        <p:txBody>
+          <a:bodyPr rtlCol="0" anchor="ctr"/>
+          <a:lstStyle/>
+          <a:p>
+            <a:pPr algn="ctr"/>
+          </a:p>
+        </p:txBody>
+      </p:sp>
+      <p:sp>
+        <p:nvSpPr>
+          <p:cNvPr id="11" name="TextBox 10"/>
+          <p:cNvSpPr txBox="1"/>
+          <p:nvPr/>
+        </p:nvSpPr>
+        <p:spPr>
+          <a:xfrm>
+            <a:off x="5550408" y="1417320"/>
+            <a:ext cx="2863443" cy="1243584"/>
+          </a:xfrm>
+          <a:prstGeom prst="rect">
+            <a:avLst/>
+          </a:prstGeom>
+          <a:noFill/>
+        </p:spPr>
+        <p:txBody>
+          <a:bodyPr wrap="square" anchor="ctr" tIns="36576" bIns="36576">
+            <a:spAutoFit/>
+          </a:bodyPr>
+          <a:lstStyle/>
+          <a:p>
+            <a:pPr algn="l">
+              <a:spcAft>
+                <a:spcPts val="100"/>
+              </a:spcAft>
+            </a:pPr>
+            <a:r>
+              <a:rPr sz="1300" b="0">
+                <a:solidFill>
+                  <a:srgbClr val="6B7280"/>
+                </a:solidFill>
+                <a:latin typeface="Calibri"/>
+              </a:rPr>
+              <a:t>Jigar</a:t>
+            </a:r>
+          </a:p>
+          <a:p>
+            <a:pPr algn="l">
+              <a:spcAft>
+                <a:spcPts val="100"/>
+              </a:spcAft>
+            </a:pPr>
+            <a:r>
+              <a:rPr sz="3000" b="1">
+                <a:solidFill>
+                  <a:srgbClr val="0B1F3A"/>
+                </a:solidFill>
+                <a:latin typeface="Calibri"/>
+              </a:rPr>
+              <a:t>1/3 qismi</a:t>
+            </a:r>
+          </a:p>
+        </p:txBody>
+      </p:sp>
+      <p:sp>
+        <p:nvSpPr>
+          <p:cNvPr id="12" name="Rounded Rectangle 11"/>
+          <p:cNvSpPr/>
+          <p:nvPr/>
+        </p:nvSpPr>
+        <p:spPr>
+          <a:xfrm>
+            <a:off x="8578443" y="1417320"/>
+            <a:ext cx="2973171" cy="1243584"/>
+          </a:xfrm>
+          <a:prstGeom prst="roundRect">
+            <a:avLst>
+              <a:gd name="adj" fmla="val 8000"/>
+            </a:avLst>
+          </a:prstGeom>
+          <a:solidFill>
+            <a:srgbClr val="FFFFFF"/>
+          </a:solidFill>
+          <a:ln w="15875">
+            <a:solidFill>
+              <a:srgbClr val="E8EEF6"/>
+            </a:solidFill>
+          </a:ln>
+          <a:effectLst/>
+        </p:spPr>
+        <p:style>
+          <a:lnRef idx="1">
+            <a:schemeClr val="accent1"/>
+          </a:lnRef>
+          <a:fillRef idx="3">
+            <a:schemeClr val="accent1"/>
+          </a:fillRef>
+          <a:effectRef idx="2">
+            <a:schemeClr val="accent1"/>
+          </a:effectRef>
+          <a:fontRef idx="minor">
+            <a:schemeClr val="lt1"/>
+          </a:fontRef>
+        </p:style>
+        <p:txBody>
+          <a:bodyPr rtlCol="0" anchor="ctr"/>
+          <a:lstStyle/>
+          <a:p>
+            <a:pPr algn="ctr"/>
+          </a:p>
+        </p:txBody>
+      </p:sp>
+      <p:sp>
+        <p:nvSpPr>
+          <p:cNvPr id="13" name="Rectangle 12"/>
+          <p:cNvSpPr/>
+          <p:nvPr/>
+        </p:nvSpPr>
+        <p:spPr>
+          <a:xfrm>
+            <a:off x="8578443" y="1508760"/>
+            <a:ext cx="64008" cy="1060704"/>
+          </a:xfrm>
+          <a:prstGeom prst="rect">
+            <a:avLst/>
+          </a:prstGeom>
+          <a:solidFill>
+            <a:srgbClr val="C9A227"/>
+          </a:solidFill>
+          <a:ln>
+            <a:noFill/>
+          </a:ln>
+          <a:effectLst/>
+        </p:spPr>
+        <p:style>
+          <a:lnRef idx="1">
+            <a:schemeClr val="accent1"/>
+          </a:lnRef>
+          <a:fillRef idx="3">
+            <a:schemeClr val="accent1"/>
+          </a:fillRef>
+          <a:effectRef idx="2">
+            <a:schemeClr val="accent1"/>
+          </a:effectRef>
+          <a:fontRef idx="minor">
+            <a:schemeClr val="lt1"/>
+          </a:fontRef>
+        </p:style>
+        <p:txBody>
+          <a:bodyPr rtlCol="0" anchor="ctr"/>
+          <a:lstStyle/>
+          <a:p>
+            <a:pPr algn="ctr"/>
+          </a:p>
+        </p:txBody>
+      </p:sp>
+      <p:sp>
+        <p:nvSpPr>
+          <p:cNvPr id="14" name="TextBox 13"/>
+          <p:cNvSpPr txBox="1"/>
+          <p:nvPr/>
+        </p:nvSpPr>
+        <p:spPr>
+          <a:xfrm>
+            <a:off x="8688171" y="1417320"/>
+            <a:ext cx="2863443" cy="1243584"/>
+          </a:xfrm>
+          <a:prstGeom prst="rect">
+            <a:avLst/>
+          </a:prstGeom>
+          <a:noFill/>
+        </p:spPr>
+        <p:txBody>
+          <a:bodyPr wrap="square" anchor="ctr" tIns="36576" bIns="36576">
+            <a:spAutoFit/>
+          </a:bodyPr>
+          <a:lstStyle/>
+          <a:p>
+            <a:pPr algn="l">
+              <a:spcAft>
+                <a:spcPts val="100"/>
+              </a:spcAft>
+            </a:pPr>
+            <a:r>
+              <a:rPr sz="1300" b="0">
+                <a:solidFill>
+                  <a:srgbClr val="6B7280"/>
+                </a:solidFill>
+                <a:latin typeface="Calibri"/>
+              </a:rPr>
+              <a:t>Buyrak</a:t>
+            </a:r>
+          </a:p>
+          <a:p>
+            <a:pPr algn="l">
+              <a:spcAft>
+                <a:spcPts val="100"/>
+              </a:spcAft>
+            </a:pPr>
+            <a:r>
+              <a:rPr sz="3000" b="1">
+                <a:solidFill>
+                  <a:srgbClr val="0B1F3A"/>
+                </a:solidFill>
+                <a:latin typeface="Calibri"/>
+              </a:rPr>
+              <a:t>bitta</a:t>
+            </a:r>
+          </a:p>
+        </p:txBody>
+      </p:sp>
+      <p:sp>
+        <p:nvSpPr>
+          <p:cNvPr id="15" name="Rounded Rectangle 14"/>
+          <p:cNvSpPr/>
+          <p:nvPr/>
+        </p:nvSpPr>
+        <p:spPr>
+          <a:xfrm>
+            <a:off x="5440680" y="2807208"/>
+            <a:ext cx="2973171" cy="1243584"/>
+          </a:xfrm>
+          <a:prstGeom prst="roundRect">
+            <a:avLst>
+              <a:gd name="adj" fmla="val 8000"/>
+            </a:avLst>
+          </a:prstGeom>
+          <a:solidFill>
+            <a:srgbClr val="FFFFFF"/>
+          </a:solidFill>
+          <a:ln w="15875">
+            <a:solidFill>
+              <a:srgbClr val="E8EEF6"/>
+            </a:solidFill>
+          </a:ln>
+          <a:effectLst/>
+        </p:spPr>
+        <p:style>
+          <a:lnRef idx="1">
+            <a:schemeClr val="accent1"/>
+          </a:lnRef>
+          <a:fillRef idx="3">
+            <a:schemeClr val="accent1"/>
+          </a:fillRef>
+          <a:effectRef idx="2">
+            <a:schemeClr val="accent1"/>
+          </a:effectRef>
+          <a:fontRef idx="minor">
+            <a:schemeClr val="lt1"/>
+          </a:fontRef>
+        </p:style>
+        <p:txBody>
+          <a:bodyPr rtlCol="0" anchor="ctr"/>
+          <a:lstStyle/>
+          <a:p>
+            <a:pPr algn="ctr"/>
+          </a:p>
+        </p:txBody>
+      </p:sp>
+      <p:sp>
+        <p:nvSpPr>
+          <p:cNvPr id="16" name="Rectangle 15"/>
+          <p:cNvSpPr/>
+          <p:nvPr/>
+        </p:nvSpPr>
+        <p:spPr>
+          <a:xfrm>
+            <a:off x="5440680" y="2898648"/>
+            <a:ext cx="64008" cy="1060704"/>
+          </a:xfrm>
+          <a:prstGeom prst="rect">
+            <a:avLst/>
+          </a:prstGeom>
+          <a:solidFill>
+            <a:srgbClr val="C9A227"/>
+          </a:solidFill>
+          <a:ln>
+            <a:noFill/>
+          </a:ln>
+          <a:effectLst/>
+        </p:spPr>
+        <p:style>
+          <a:lnRef idx="1">
+            <a:schemeClr val="accent1"/>
+          </a:lnRef>
+          <a:fillRef idx="3">
+            <a:schemeClr val="accent1"/>
+          </a:fillRef>
+          <a:effectRef idx="2">
+            <a:schemeClr val="accent1"/>
+          </a:effectRef>
+          <a:fontRef idx="minor">
+            <a:schemeClr val="lt1"/>
+          </a:fontRef>
+        </p:style>
+        <p:txBody>
+          <a:bodyPr rtlCol="0" anchor="ctr"/>
+          <a:lstStyle/>
+          <a:p>
+            <a:pPr algn="ctr"/>
+          </a:p>
+        </p:txBody>
+      </p:sp>
+      <p:sp>
+        <p:nvSpPr>
+          <p:cNvPr id="17" name="TextBox 16"/>
+          <p:cNvSpPr txBox="1"/>
+          <p:nvPr/>
+        </p:nvSpPr>
+        <p:spPr>
+          <a:xfrm>
+            <a:off x="5550408" y="2807208"/>
+            <a:ext cx="2863443" cy="1243584"/>
+          </a:xfrm>
+          <a:prstGeom prst="rect">
+            <a:avLst/>
+          </a:prstGeom>
+          <a:noFill/>
+        </p:spPr>
+        <p:txBody>
+          <a:bodyPr wrap="square" anchor="ctr" tIns="36576" bIns="36576">
+            <a:spAutoFit/>
+          </a:bodyPr>
+          <a:lstStyle/>
+          <a:p>
+            <a:pPr algn="l">
+              <a:spcAft>
+                <a:spcPts val="100"/>
+              </a:spcAft>
+            </a:pPr>
+            <a:r>
+              <a:rPr sz="1300" b="0">
+                <a:solidFill>
+                  <a:srgbClr val="6B7280"/>
+                </a:solidFill>
+                <a:latin typeface="Calibri"/>
+              </a:rPr>
+              <a:t>Siydik</a:t>
+            </a:r>
+          </a:p>
+          <a:p>
+            <a:pPr algn="l">
+              <a:spcAft>
+                <a:spcPts val="100"/>
+              </a:spcAft>
+            </a:pPr>
+            <a:r>
+              <a:rPr sz="3000" b="1">
+                <a:solidFill>
+                  <a:srgbClr val="0B1F3A"/>
+                </a:solidFill>
+                <a:latin typeface="Calibri"/>
+              </a:rPr>
+              <a:t>200 ml gacha</a:t>
+            </a:r>
+          </a:p>
+        </p:txBody>
+      </p:sp>
+      <p:sp>
+        <p:nvSpPr>
+          <p:cNvPr id="18" name="Rounded Rectangle 17"/>
+          <p:cNvSpPr/>
+          <p:nvPr/>
+        </p:nvSpPr>
+        <p:spPr>
+          <a:xfrm>
+            <a:off x="8578443" y="2807208"/>
+            <a:ext cx="2973171" cy="1243584"/>
+          </a:xfrm>
+          <a:prstGeom prst="roundRect">
+            <a:avLst>
+              <a:gd name="adj" fmla="val 8000"/>
+            </a:avLst>
+          </a:prstGeom>
+          <a:solidFill>
+            <a:srgbClr val="FFFFFF"/>
+          </a:solidFill>
+          <a:ln w="15875">
+            <a:solidFill>
+              <a:srgbClr val="E8EEF6"/>
+            </a:solidFill>
+          </a:ln>
+          <a:effectLst/>
+        </p:spPr>
+        <p:style>
+          <a:lnRef idx="1">
+            <a:schemeClr val="accent1"/>
+          </a:lnRef>
+          <a:fillRef idx="3">
+            <a:schemeClr val="accent1"/>
+          </a:fillRef>
+          <a:effectRef idx="2">
+            <a:schemeClr val="accent1"/>
+          </a:effectRef>
+          <a:fontRef idx="minor">
+            <a:schemeClr val="lt1"/>
+          </a:fontRef>
+        </p:style>
+        <p:txBody>
+          <a:bodyPr rtlCol="0" anchor="ctr"/>
+          <a:lstStyle/>
+          <a:p>
+            <a:pPr algn="ctr"/>
+          </a:p>
+        </p:txBody>
+      </p:sp>
+      <p:sp>
+        <p:nvSpPr>
+          <p:cNvPr id="19" name="Rectangle 18"/>
+          <p:cNvSpPr/>
+          <p:nvPr/>
+        </p:nvSpPr>
+        <p:spPr>
+          <a:xfrm>
+            <a:off x="8578443" y="2898648"/>
+            <a:ext cx="64008" cy="1060704"/>
+          </a:xfrm>
+          <a:prstGeom prst="rect">
+            <a:avLst/>
+          </a:prstGeom>
+          <a:solidFill>
+            <a:srgbClr val="C9A227"/>
+          </a:solidFill>
+          <a:ln>
+            <a:noFill/>
+          </a:ln>
+          <a:effectLst/>
+        </p:spPr>
+        <p:style>
+          <a:lnRef idx="1">
+            <a:schemeClr val="accent1"/>
+          </a:lnRef>
+          <a:fillRef idx="3">
+            <a:schemeClr val="accent1"/>
+          </a:fillRef>
+          <a:effectRef idx="2">
+            <a:schemeClr val="accent1"/>
+          </a:effectRef>
+          <a:fontRef idx="minor">
+            <a:schemeClr val="lt1"/>
+          </a:fontRef>
+        </p:style>
+        <p:txBody>
+          <a:bodyPr rtlCol="0" anchor="ctr"/>
+          <a:lstStyle/>
+          <a:p>
+            <a:pPr algn="ctr"/>
+          </a:p>
+        </p:txBody>
+      </p:sp>
+      <p:sp>
+        <p:nvSpPr>
+          <p:cNvPr id="20" name="TextBox 19"/>
+          <p:cNvSpPr txBox="1"/>
+          <p:nvPr/>
+        </p:nvSpPr>
+        <p:spPr>
+          <a:xfrm>
+            <a:off x="8688171" y="2807208"/>
+            <a:ext cx="2863443" cy="1243584"/>
+          </a:xfrm>
+          <a:prstGeom prst="rect">
+            <a:avLst/>
+          </a:prstGeom>
+          <a:noFill/>
+        </p:spPr>
+        <p:txBody>
+          <a:bodyPr wrap="square" anchor="ctr" tIns="36576" bIns="36576">
+            <a:spAutoFit/>
+          </a:bodyPr>
+          <a:lstStyle/>
+          <a:p>
+            <a:pPr algn="l">
+              <a:spcAft>
+                <a:spcPts val="100"/>
+              </a:spcAft>
+            </a:pPr>
+            <a:r>
+              <a:rPr sz="1300" b="0">
+                <a:solidFill>
+                  <a:srgbClr val="6B7280"/>
+                </a:solidFill>
+                <a:latin typeface="Calibri"/>
+              </a:rPr>
+              <a:t>Qon</a:t>
+            </a:r>
+          </a:p>
+          <a:p>
+            <a:pPr algn="l">
+              <a:spcAft>
+                <a:spcPts val="100"/>
+              </a:spcAft>
+            </a:pPr>
+            <a:r>
+              <a:rPr sz="3000" b="1">
+                <a:solidFill>
+                  <a:srgbClr val="0B1F3A"/>
+                </a:solidFill>
+                <a:latin typeface="Calibri"/>
+              </a:rPr>
+              <a:t>200 ml</a:t>
+            </a:r>
+          </a:p>
+        </p:txBody>
+      </p:sp>
+      <p:sp>
+        <p:nvSpPr>
+          <p:cNvPr id="21" name="Rounded Rectangle 20"/>
+          <p:cNvSpPr/>
+          <p:nvPr/>
+        </p:nvSpPr>
+        <p:spPr>
+          <a:xfrm>
+            <a:off x="5440680" y="4197096"/>
+            <a:ext cx="2973171" cy="1243584"/>
+          </a:xfrm>
+          <a:prstGeom prst="roundRect">
+            <a:avLst>
+              <a:gd name="adj" fmla="val 8000"/>
+            </a:avLst>
+          </a:prstGeom>
+          <a:solidFill>
+            <a:srgbClr val="FFFFFF"/>
+          </a:solidFill>
+          <a:ln w="15875">
+            <a:solidFill>
+              <a:srgbClr val="E8EEF6"/>
+            </a:solidFill>
+          </a:ln>
+          <a:effectLst/>
+        </p:spPr>
+        <p:style>
+          <a:lnRef idx="1">
+            <a:schemeClr val="accent1"/>
+          </a:lnRef>
+          <a:fillRef idx="3">
+            <a:schemeClr val="accent1"/>
+          </a:fillRef>
+          <a:effectRef idx="2">
+            <a:schemeClr val="accent1"/>
+          </a:effectRef>
+          <a:fontRef idx="minor">
+            <a:schemeClr val="lt1"/>
+          </a:fontRef>
+        </p:style>
+        <p:txBody>
+          <a:bodyPr rtlCol="0" anchor="ctr"/>
+          <a:lstStyle/>
+          <a:p>
+            <a:pPr algn="ctr"/>
+          </a:p>
+        </p:txBody>
+      </p:sp>
+      <p:sp>
+        <p:nvSpPr>
+          <p:cNvPr id="22" name="Rectangle 21"/>
+          <p:cNvSpPr/>
+          <p:nvPr/>
+        </p:nvSpPr>
+        <p:spPr>
+          <a:xfrm>
+            <a:off x="5440680" y="4288536"/>
+            <a:ext cx="64008" cy="1060704"/>
+          </a:xfrm>
+          <a:prstGeom prst="rect">
+            <a:avLst/>
+          </a:prstGeom>
+          <a:solidFill>
+            <a:srgbClr val="C9A227"/>
+          </a:solidFill>
+          <a:ln>
+            <a:noFill/>
+          </a:ln>
+          <a:effectLst/>
+        </p:spPr>
+        <p:style>
+          <a:lnRef idx="1">
+            <a:schemeClr val="accent1"/>
+          </a:lnRef>
+          <a:fillRef idx="3">
+            <a:schemeClr val="accent1"/>
+          </a:fillRef>
+          <a:effectRef idx="2">
+            <a:schemeClr val="accent1"/>
+          </a:effectRef>
+          <a:fontRef idx="minor">
+            <a:schemeClr val="lt1"/>
+          </a:fontRef>
+        </p:style>
+        <p:txBody>
+          <a:bodyPr rtlCol="0" anchor="ctr"/>
+          <a:lstStyle/>
+          <a:p>
+            <a:pPr algn="ctr"/>
+          </a:p>
+        </p:txBody>
+      </p:sp>
+      <p:sp>
+        <p:nvSpPr>
+          <p:cNvPr id="23" name="TextBox 22"/>
+          <p:cNvSpPr txBox="1"/>
+          <p:nvPr/>
+        </p:nvSpPr>
+        <p:spPr>
+          <a:xfrm>
+            <a:off x="5550408" y="4197096"/>
+            <a:ext cx="2863443" cy="1243584"/>
+          </a:xfrm>
+          <a:prstGeom prst="rect">
+            <a:avLst/>
+          </a:prstGeom>
+          <a:noFill/>
+        </p:spPr>
+        <p:txBody>
+          <a:bodyPr wrap="square" anchor="ctr" tIns="36576" bIns="36576">
+            <a:spAutoFit/>
+          </a:bodyPr>
+          <a:lstStyle/>
+          <a:p>
+            <a:pPr algn="l">
+              <a:spcAft>
+                <a:spcPts val="100"/>
+              </a:spcAft>
+            </a:pPr>
+            <a:r>
+              <a:rPr sz="1300" b="0">
+                <a:solidFill>
+                  <a:srgbClr val="6B7280"/>
+                </a:solidFill>
+                <a:latin typeface="Calibri"/>
+              </a:rPr>
+              <a:t>O‘t suyuqligi</a:t>
+            </a:r>
+          </a:p>
+          <a:p>
+            <a:pPr algn="l">
+              <a:spcAft>
+                <a:spcPts val="100"/>
+              </a:spcAft>
+            </a:pPr>
+            <a:r>
+              <a:rPr sz="3000" b="1">
+                <a:solidFill>
+                  <a:srgbClr val="0B1F3A"/>
+                </a:solidFill>
+                <a:latin typeface="Calibri"/>
+              </a:rPr>
+              <a:t>olinadi</a:t>
+            </a:r>
+          </a:p>
+        </p:txBody>
+      </p:sp>
+      <p:sp>
+        <p:nvSpPr>
+          <p:cNvPr id="24" name="Rounded Rectangle 23"/>
+          <p:cNvSpPr/>
+          <p:nvPr/>
+        </p:nvSpPr>
+        <p:spPr>
+          <a:xfrm>
+            <a:off x="8578443" y="4197096"/>
+            <a:ext cx="2973171" cy="1243584"/>
+          </a:xfrm>
+          <a:prstGeom prst="roundRect">
+            <a:avLst>
+              <a:gd name="adj" fmla="val 8000"/>
+            </a:avLst>
+          </a:prstGeom>
+          <a:solidFill>
+            <a:srgbClr val="FFFFFF"/>
+          </a:solidFill>
+          <a:ln w="15875">
+            <a:solidFill>
+              <a:srgbClr val="E8EEF6"/>
+            </a:solidFill>
+          </a:ln>
+          <a:effectLst/>
+        </p:spPr>
+        <p:style>
+          <a:lnRef idx="1">
+            <a:schemeClr val="accent1"/>
+          </a:lnRef>
+          <a:fillRef idx="3">
+            <a:schemeClr val="accent1"/>
+          </a:fillRef>
+          <a:effectRef idx="2">
+            <a:schemeClr val="accent1"/>
+          </a:effectRef>
+          <a:fontRef idx="minor">
+            <a:schemeClr val="lt1"/>
+          </a:fontRef>
+        </p:style>
+        <p:txBody>
+          <a:bodyPr rtlCol="0" anchor="ctr"/>
+          <a:lstStyle/>
+          <a:p>
+            <a:pPr algn="ctr"/>
+          </a:p>
+        </p:txBody>
+      </p:sp>
+      <p:sp>
+        <p:nvSpPr>
+          <p:cNvPr id="25" name="Rectangle 24"/>
+          <p:cNvSpPr/>
+          <p:nvPr/>
+        </p:nvSpPr>
+        <p:spPr>
+          <a:xfrm>
+            <a:off x="8578443" y="4288536"/>
+            <a:ext cx="64008" cy="1060704"/>
+          </a:xfrm>
+          <a:prstGeom prst="rect">
+            <a:avLst/>
+          </a:prstGeom>
+          <a:solidFill>
+            <a:srgbClr val="C9A227"/>
+          </a:solidFill>
+          <a:ln>
+            <a:noFill/>
+          </a:ln>
+          <a:effectLst/>
+        </p:spPr>
+        <p:style>
+          <a:lnRef idx="1">
+            <a:schemeClr val="accent1"/>
+          </a:lnRef>
+          <a:fillRef idx="3">
+            <a:schemeClr val="accent1"/>
+          </a:fillRef>
+          <a:effectRef idx="2">
+            <a:schemeClr val="accent1"/>
+          </a:effectRef>
+          <a:fontRef idx="minor">
+            <a:schemeClr val="lt1"/>
+          </a:fontRef>
+        </p:style>
+        <p:txBody>
+          <a:bodyPr rtlCol="0" anchor="ctr"/>
+          <a:lstStyle/>
+          <a:p>
+            <a:pPr algn="ctr"/>
+          </a:p>
+        </p:txBody>
+      </p:sp>
+      <p:sp>
+        <p:nvSpPr>
+          <p:cNvPr id="26" name="TextBox 25"/>
+          <p:cNvSpPr txBox="1"/>
+          <p:nvPr/>
+        </p:nvSpPr>
+        <p:spPr>
+          <a:xfrm>
+            <a:off x="8688171" y="4197096"/>
+            <a:ext cx="2863443" cy="1243584"/>
+          </a:xfrm>
+          <a:prstGeom prst="rect">
+            <a:avLst/>
+          </a:prstGeom>
+          <a:noFill/>
+        </p:spPr>
+        <p:txBody>
+          <a:bodyPr wrap="square" anchor="ctr" tIns="36576" bIns="36576">
+            <a:spAutoFit/>
+          </a:bodyPr>
+          <a:lstStyle/>
+          <a:p>
+            <a:pPr algn="l">
+              <a:spcAft>
+                <a:spcPts val="100"/>
+              </a:spcAft>
+            </a:pPr>
+            <a:r>
+              <a:rPr sz="1300" b="0">
+                <a:solidFill>
+                  <a:srgbClr val="6B7280"/>
+                </a:solidFill>
+                <a:latin typeface="Calibri"/>
+              </a:rPr>
+              <a:t>Oshqozon ichidagi modda</a:t>
+            </a:r>
+          </a:p>
+          <a:p>
+            <a:pPr algn="l">
+              <a:spcAft>
+                <a:spcPts val="100"/>
+              </a:spcAft>
+            </a:pPr>
+            <a:r>
+              <a:rPr sz="3000" b="1">
+                <a:solidFill>
+                  <a:srgbClr val="0B1F3A"/>
+                </a:solidFill>
+                <a:latin typeface="Calibri"/>
+              </a:rPr>
+              <a:t>olinadi</a:t>
+            </a:r>
+          </a:p>
+        </p:txBody>
+      </p:sp>
+      <p:sp>
+        <p:nvSpPr>
+          <p:cNvPr id="27" name="TextBox 26"/>
+          <p:cNvSpPr txBox="1"/>
+          <p:nvPr/>
+        </p:nvSpPr>
+        <p:spPr>
+          <a:xfrm>
+            <a:off x="5440680" y="5486400"/>
+            <a:ext cx="6110935" cy="365760"/>
+          </a:xfrm>
+          <a:prstGeom prst="rect">
+            <a:avLst/>
+          </a:prstGeom>
+          <a:noFill/>
+        </p:spPr>
+        <p:txBody>
+          <a:bodyPr wrap="square">
+            <a:spAutoFit/>
+          </a:bodyPr>
+          <a:lstStyle/>
+          <a:p>
+            <a:r>
+              <a:rPr sz="1200" b="0">
+                <a:solidFill>
+                  <a:srgbClr val="6B7280"/>
+                </a:solidFill>
+                <a:latin typeface="Calibri"/>
+              </a:rPr>
+              <a:t>Ichki a’zolar kompleksi</a:t>
+            </a:r>
+          </a:p>
+        </p:txBody>
+      </p:sp>
+      <p:sp>
+        <p:nvSpPr>
+          <p:cNvPr id="28" name="TextBox 27"/>
           <p:cNvSpPr txBox="1"/>
           <p:nvPr/>
         </p:nvSpPr>
@@ -22232,7 +29860,7 @@
         <p:spPr>
           <a:xfrm>
             <a:off x="640080" y="1417320"/>
-            <a:ext cx="10911535" cy="4480560"/>
+            <a:ext cx="4572000" cy="4480560"/>
           </a:xfrm>
           <a:prstGeom prst="rect">
             <a:avLst/>
@@ -22247,64 +29875,80 @@
           <a:p>
             <a:pPr>
               <a:spcAft>
-                <a:spcPts val="1200"/>
+                <a:spcPts val="800"/>
               </a:spcAft>
             </a:pPr>
             <a:r>
-              <a:rPr sz="2200">
+              <a:rPr sz="1600">
                 <a:solidFill>
                   <a:srgbClr val="1F2937"/>
                 </a:solidFill>
                 <a:latin typeface="Calibri"/>
               </a:rPr>
-              <a:t>▸  Etanolga: qon va siydik 10-20 ml dan, tiqingacha to‘ldirilgan idishda; qon yirik venalardan yoki miya qattiq pardasi sinuslaridan pipetka yoki shpris bilan olinadi.</a:t>
+              <a:t>▸  Etanolga: qon va siydik 10-20 ml dan, tiqingacha to‘ldirilgan idishda.</a:t>
             </a:r>
           </a:p>
           <a:p>
             <a:pPr>
               <a:spcAft>
-                <a:spcPts val="1200"/>
+                <a:spcPts val="800"/>
               </a:spcAft>
             </a:pPr>
             <a:r>
-              <a:rPr sz="2200">
+              <a:rPr sz="1600">
                 <a:solidFill>
                   <a:srgbClr val="1F2937"/>
                 </a:solidFill>
                 <a:latin typeface="Calibri"/>
               </a:rPr>
-              <a:t>▸  Qon va siydikni yuborish imkoni bo‘lmasa, 100 g atrofida mushak to‘qimasi yuboriladi.</a:t>
+              <a:t>▸  Qon yirik venalardan yoki miya qattiq pardasi sinuslaridan pipetka yoki shpris bilan olinadi.</a:t>
             </a:r>
           </a:p>
           <a:p>
             <a:pPr>
               <a:spcAft>
-                <a:spcPts val="1200"/>
+                <a:spcPts val="800"/>
               </a:spcAft>
             </a:pPr>
             <a:r>
-              <a:rPr sz="2200">
+              <a:rPr sz="1600">
                 <a:solidFill>
                   <a:srgbClr val="1F2937"/>
                 </a:solidFill>
                 <a:latin typeface="Calibri"/>
               </a:rPr>
-              <a:t>▸  Giyohvand vositalar va psixotrop moddalarga: albatta qon (150 ml), siydik (150-200 ml) va o‘t pufagi.</a:t>
+              <a:t>▸  Qon va siydikni yuborish imkoni bo‘lmasa, 100 g atrofida mushak to‘qimasi yuboriladi.</a:t>
             </a:r>
           </a:p>
           <a:p>
             <a:pPr>
               <a:spcAft>
-                <a:spcPts val="1200"/>
+                <a:spcPts val="800"/>
               </a:spcAft>
             </a:pPr>
             <a:r>
-              <a:rPr sz="2200">
+              <a:rPr sz="1600">
                 <a:solidFill>
                   <a:srgbClr val="1F2937"/>
                 </a:solidFill>
                 <a:latin typeface="Calibri"/>
               </a:rPr>
+              <a:t>▸  Giyohvand vositalar va psixotrop moddalarga: albatta qon (150 ml), siydik (150-200 ml) va o‘t pufagi.</a:t>
+            </a:r>
+          </a:p>
+          <a:p>
+            <a:pPr>
+              <a:spcAft>
+                <a:spcPts val="800"/>
+              </a:spcAft>
+            </a:pPr>
+            <a:r>
+              <a:rPr sz="1600">
+                <a:solidFill>
+                  <a:srgbClr val="1F2937"/>
+                </a:solidFill>
+                <a:latin typeface="Calibri"/>
+              </a:rPr>
               <a:t>▸  Etil spirtidan zaharlanishda materiallarni yuborishning kechikishi miqdoriy aniqlashda ishonchsiz natijalarga sabab bo‘lishi mumkin.</a:t>
             </a:r>
           </a:p>
@@ -22312,7 +29956,391 @@
       </p:sp>
       <p:sp>
         <p:nvSpPr>
-          <p:cNvPr id="9" name="TextBox 8"/>
+          <p:cNvPr id="9" name="Rounded Rectangle 8"/>
+          <p:cNvSpPr/>
+          <p:nvPr/>
+        </p:nvSpPr>
+        <p:spPr>
+          <a:xfrm>
+            <a:off x="5440680" y="1417320"/>
+            <a:ext cx="2986887" cy="548640"/>
+          </a:xfrm>
+          <a:prstGeom prst="roundRect">
+            <a:avLst/>
+          </a:prstGeom>
+          <a:solidFill>
+            <a:srgbClr val="0B1F3A"/>
+          </a:solidFill>
+          <a:ln>
+            <a:noFill/>
+          </a:ln>
+          <a:effectLst/>
+        </p:spPr>
+        <p:style>
+          <a:lnRef idx="1">
+            <a:schemeClr val="accent1"/>
+          </a:lnRef>
+          <a:fillRef idx="3">
+            <a:schemeClr val="accent1"/>
+          </a:fillRef>
+          <a:effectRef idx="2">
+            <a:schemeClr val="accent1"/>
+          </a:effectRef>
+          <a:fontRef idx="minor">
+            <a:schemeClr val="lt1"/>
+          </a:fontRef>
+        </p:style>
+        <p:txBody>
+          <a:bodyPr rtlCol="0" anchor="ctr" wrap="square" tIns="36576" bIns="36576"/>
+          <a:lstStyle/>
+          <a:p>
+            <a:pPr algn="ctr">
+              <a:spcAft>
+                <a:spcPts val="200"/>
+              </a:spcAft>
+            </a:pPr>
+            <a:r>
+              <a:rPr sz="1600" b="1">
+                <a:solidFill>
+                  <a:srgbClr val="FFFFFF"/>
+                </a:solidFill>
+                <a:latin typeface="Calibri"/>
+              </a:rPr>
+              <a:t>Etanolga shubha</a:t>
+            </a:r>
+          </a:p>
+        </p:txBody>
+      </p:sp>
+      <p:sp>
+        <p:nvSpPr>
+          <p:cNvPr id="10" name="Rectangle 9"/>
+          <p:cNvSpPr/>
+          <p:nvPr/>
+        </p:nvSpPr>
+        <p:spPr>
+          <a:xfrm>
+            <a:off x="5440680" y="2020824"/>
+            <a:ext cx="2986887" cy="3419856"/>
+          </a:xfrm>
+          <a:prstGeom prst="rect">
+            <a:avLst/>
+          </a:prstGeom>
+          <a:solidFill>
+            <a:srgbClr val="E8EEF6"/>
+          </a:solidFill>
+          <a:ln w="15875">
+            <a:solidFill>
+              <a:srgbClr val="E8EEF6"/>
+            </a:solidFill>
+          </a:ln>
+          <a:effectLst/>
+        </p:spPr>
+        <p:style>
+          <a:lnRef idx="1">
+            <a:schemeClr val="accent1"/>
+          </a:lnRef>
+          <a:fillRef idx="3">
+            <a:schemeClr val="accent1"/>
+          </a:fillRef>
+          <a:effectRef idx="2">
+            <a:schemeClr val="accent1"/>
+          </a:effectRef>
+          <a:fontRef idx="minor">
+            <a:schemeClr val="lt1"/>
+          </a:fontRef>
+        </p:style>
+        <p:txBody>
+          <a:bodyPr rtlCol="0" anchor="t" wrap="square" tIns="36576" bIns="36576"/>
+          <a:lstStyle/>
+          <a:p>
+            <a:pPr algn="l">
+              <a:spcAft>
+                <a:spcPts val="700"/>
+              </a:spcAft>
+            </a:pPr>
+            <a:r>
+              <a:rPr sz="1500" b="1">
+                <a:solidFill>
+                  <a:srgbClr val="C9A227"/>
+                </a:solidFill>
+                <a:latin typeface="Calibri"/>
+              </a:rPr>
+              <a:t>●  </a:t>
+            </a:r>
+            <a:r>
+              <a:rPr sz="1500" b="0">
+                <a:solidFill>
+                  <a:srgbClr val="1F2937"/>
+                </a:solidFill>
+                <a:latin typeface="Calibri"/>
+              </a:rPr>
+              <a:t>Qon, siydik 10-20 ml dan</a:t>
+            </a:r>
+          </a:p>
+          <a:p>
+            <a:pPr algn="l">
+              <a:spcAft>
+                <a:spcPts val="700"/>
+              </a:spcAft>
+            </a:pPr>
+            <a:r>
+              <a:rPr sz="1500" b="1">
+                <a:solidFill>
+                  <a:srgbClr val="C9A227"/>
+                </a:solidFill>
+                <a:latin typeface="Calibri"/>
+              </a:rPr>
+              <a:t>●  </a:t>
+            </a:r>
+            <a:r>
+              <a:rPr sz="1500" b="0">
+                <a:solidFill>
+                  <a:srgbClr val="1F2937"/>
+                </a:solidFill>
+                <a:latin typeface="Calibri"/>
+              </a:rPr>
+              <a:t>Tiqingacha to‘ldirilgan idish</a:t>
+            </a:r>
+          </a:p>
+          <a:p>
+            <a:pPr algn="l">
+              <a:spcAft>
+                <a:spcPts val="700"/>
+              </a:spcAft>
+            </a:pPr>
+            <a:r>
+              <a:rPr sz="1500" b="1">
+                <a:solidFill>
+                  <a:srgbClr val="C9A227"/>
+                </a:solidFill>
+                <a:latin typeface="Calibri"/>
+              </a:rPr>
+              <a:t>●  </a:t>
+            </a:r>
+            <a:r>
+              <a:rPr sz="1500" b="0">
+                <a:solidFill>
+                  <a:srgbClr val="1F2937"/>
+                </a:solidFill>
+                <a:latin typeface="Calibri"/>
+              </a:rPr>
+              <a:t>Imkon bo‘lmasa — 100 g mushak</a:t>
+            </a:r>
+          </a:p>
+        </p:txBody>
+      </p:sp>
+      <p:sp>
+        <p:nvSpPr>
+          <p:cNvPr id="11" name="Rounded Rectangle 10"/>
+          <p:cNvSpPr/>
+          <p:nvPr/>
+        </p:nvSpPr>
+        <p:spPr>
+          <a:xfrm>
+            <a:off x="8564727" y="1417320"/>
+            <a:ext cx="2986887" cy="548640"/>
+          </a:xfrm>
+          <a:prstGeom prst="roundRect">
+            <a:avLst/>
+          </a:prstGeom>
+          <a:solidFill>
+            <a:srgbClr val="1F4E79"/>
+          </a:solidFill>
+          <a:ln>
+            <a:noFill/>
+          </a:ln>
+          <a:effectLst/>
+        </p:spPr>
+        <p:style>
+          <a:lnRef idx="1">
+            <a:schemeClr val="accent1"/>
+          </a:lnRef>
+          <a:fillRef idx="3">
+            <a:schemeClr val="accent1"/>
+          </a:fillRef>
+          <a:effectRef idx="2">
+            <a:schemeClr val="accent1"/>
+          </a:effectRef>
+          <a:fontRef idx="minor">
+            <a:schemeClr val="lt1"/>
+          </a:fontRef>
+        </p:style>
+        <p:txBody>
+          <a:bodyPr rtlCol="0" anchor="ctr" wrap="square" tIns="36576" bIns="36576"/>
+          <a:lstStyle/>
+          <a:p>
+            <a:pPr algn="ctr">
+              <a:spcAft>
+                <a:spcPts val="200"/>
+              </a:spcAft>
+            </a:pPr>
+            <a:r>
+              <a:rPr sz="1600" b="1">
+                <a:solidFill>
+                  <a:srgbClr val="FFFFFF"/>
+                </a:solidFill>
+                <a:latin typeface="Calibri"/>
+              </a:rPr>
+              <a:t>Giyohvand moddalarga</a:t>
+            </a:r>
+          </a:p>
+        </p:txBody>
+      </p:sp>
+      <p:sp>
+        <p:nvSpPr>
+          <p:cNvPr id="12" name="Rectangle 11"/>
+          <p:cNvSpPr/>
+          <p:nvPr/>
+        </p:nvSpPr>
+        <p:spPr>
+          <a:xfrm>
+            <a:off x="8564727" y="2020824"/>
+            <a:ext cx="2986887" cy="3419856"/>
+          </a:xfrm>
+          <a:prstGeom prst="rect">
+            <a:avLst/>
+          </a:prstGeom>
+          <a:solidFill>
+            <a:srgbClr val="E8EEF6"/>
+          </a:solidFill>
+          <a:ln w="15875">
+            <a:solidFill>
+              <a:srgbClr val="E8EEF6"/>
+            </a:solidFill>
+          </a:ln>
+          <a:effectLst/>
+        </p:spPr>
+        <p:style>
+          <a:lnRef idx="1">
+            <a:schemeClr val="accent1"/>
+          </a:lnRef>
+          <a:fillRef idx="3">
+            <a:schemeClr val="accent1"/>
+          </a:fillRef>
+          <a:effectRef idx="2">
+            <a:schemeClr val="accent1"/>
+          </a:effectRef>
+          <a:fontRef idx="minor">
+            <a:schemeClr val="lt1"/>
+          </a:fontRef>
+        </p:style>
+        <p:txBody>
+          <a:bodyPr rtlCol="0" anchor="t" wrap="square" tIns="36576" bIns="36576"/>
+          <a:lstStyle/>
+          <a:p>
+            <a:pPr algn="l">
+              <a:spcAft>
+                <a:spcPts val="700"/>
+              </a:spcAft>
+            </a:pPr>
+            <a:r>
+              <a:rPr sz="1500" b="1">
+                <a:solidFill>
+                  <a:srgbClr val="C9A227"/>
+                </a:solidFill>
+                <a:latin typeface="Calibri"/>
+              </a:rPr>
+              <a:t>●  </a:t>
+            </a:r>
+            <a:r>
+              <a:rPr sz="1500" b="0">
+                <a:solidFill>
+                  <a:srgbClr val="1F2937"/>
+                </a:solidFill>
+                <a:latin typeface="Calibri"/>
+              </a:rPr>
+              <a:t>Albatta qon — 150 ml</a:t>
+            </a:r>
+          </a:p>
+          <a:p>
+            <a:pPr algn="l">
+              <a:spcAft>
+                <a:spcPts val="700"/>
+              </a:spcAft>
+            </a:pPr>
+            <a:r>
+              <a:rPr sz="1500" b="1">
+                <a:solidFill>
+                  <a:srgbClr val="C9A227"/>
+                </a:solidFill>
+                <a:latin typeface="Calibri"/>
+              </a:rPr>
+              <a:t>●  </a:t>
+            </a:r>
+            <a:r>
+              <a:rPr sz="1500" b="0">
+                <a:solidFill>
+                  <a:srgbClr val="1F2937"/>
+                </a:solidFill>
+                <a:latin typeface="Calibri"/>
+              </a:rPr>
+              <a:t>Siydik — 150-200 ml</a:t>
+            </a:r>
+          </a:p>
+          <a:p>
+            <a:pPr algn="l">
+              <a:spcAft>
+                <a:spcPts val="700"/>
+              </a:spcAft>
+            </a:pPr>
+            <a:r>
+              <a:rPr sz="1500" b="1">
+                <a:solidFill>
+                  <a:srgbClr val="C9A227"/>
+                </a:solidFill>
+                <a:latin typeface="Calibri"/>
+              </a:rPr>
+              <a:t>●  </a:t>
+            </a:r>
+            <a:r>
+              <a:rPr sz="1500" b="0">
+                <a:solidFill>
+                  <a:srgbClr val="1F2937"/>
+                </a:solidFill>
+                <a:latin typeface="Calibri"/>
+              </a:rPr>
+              <a:t>O‘t pufagi</a:t>
+            </a:r>
+          </a:p>
+        </p:txBody>
+      </p:sp>
+      <p:sp>
+        <p:nvSpPr>
+          <p:cNvPr id="13" name="TextBox 12"/>
+          <p:cNvSpPr txBox="1"/>
+          <p:nvPr/>
+        </p:nvSpPr>
+        <p:spPr>
+          <a:xfrm>
+            <a:off x="5440680" y="5486400"/>
+            <a:ext cx="6110935" cy="365760"/>
+          </a:xfrm>
+          <a:prstGeom prst="rect">
+            <a:avLst/>
+          </a:prstGeom>
+          <a:noFill/>
+        </p:spPr>
+        <p:txBody>
+          <a:bodyPr wrap="square">
+            <a:spAutoFit/>
+          </a:bodyPr>
+          <a:lstStyle/>
+          <a:p>
+            <a:r>
+              <a:rPr sz="1200" b="0">
+                <a:solidFill>
+                  <a:srgbClr val="6B7280"/>
+                </a:solidFill>
+                <a:latin typeface="Calibri"/>
+              </a:rPr>
+              <a:t>Etanol va giyohvand moddalar</a:t>
+            </a:r>
+          </a:p>
+        </p:txBody>
+      </p:sp>
+      <p:sp>
+        <p:nvSpPr>
+          <p:cNvPr id="14" name="TextBox 13"/>
           <p:cNvSpPr txBox="1"/>
           <p:nvPr/>
         </p:nvSpPr>
